--- a/2024/2024-01-12-AI-Updates.pptx
+++ b/2024/2024-01-12-AI-Updates.pptx
@@ -5,7 +5,7 @@
     <p:sldMasterId id="2147483661" r:id="rId1"/>
   </p:sldMasterIdLst>
   <p:notesMasterIdLst>
-    <p:notesMasterId r:id="rId30"/>
+    <p:notesMasterId r:id="rId31"/>
   </p:notesMasterIdLst>
   <p:sldIdLst>
     <p:sldId id="256" r:id="rId2"/>
@@ -36,16 +36,17 @@
     <p:sldId id="281" r:id="rId27"/>
     <p:sldId id="282" r:id="rId28"/>
     <p:sldId id="283" r:id="rId29"/>
+    <p:sldId id="284" r:id="rId30"/>
   </p:sldIdLst>
   <p:sldSz cx="9144000" cy="5143500" type="screen16x9"/>
   <p:notesSz cx="6858000" cy="9144000"/>
   <p:embeddedFontLst>
     <p:embeddedFont>
       <p:font typeface="Roboto Mono" pitchFamily="49" charset="0"/>
-      <p:regular r:id="rId31"/>
-      <p:bold r:id="rId32"/>
-      <p:italic r:id="rId33"/>
-      <p:boldItalic r:id="rId34"/>
+      <p:regular r:id="rId32"/>
+      <p:bold r:id="rId33"/>
+      <p:italic r:id="rId34"/>
+      <p:boldItalic r:id="rId35"/>
     </p:embeddedFont>
   </p:embeddedFontLst>
   <p:defaultTextStyle>
@@ -830,7 +831,7 @@
   <p:cSld>
     <p:spTree>
       <p:nvGrpSpPr>
-        <p:cNvPr id="1" name="Shape 157"/>
+        <p:cNvPr id="1" name="Shape 149"/>
         <p:cNvGrpSpPr/>
         <p:nvPr/>
       </p:nvGrpSpPr>
@@ -844,7 +845,7 @@
       </p:grpSpPr>
       <p:sp>
         <p:nvSpPr>
-          <p:cNvPr id="158" name="Google Shape;158;g2ae82704064_0_6:notes"/>
+          <p:cNvPr id="150" name="Google Shape;150;g2ad2c197c5e_0_0:notes"/>
           <p:cNvSpPr>
             <a:spLocks noGrp="1" noRot="1" noChangeAspect="1"/>
           </p:cNvSpPr>
@@ -885,7 +886,7 @@
       </p:sp>
       <p:sp>
         <p:nvSpPr>
-          <p:cNvPr id="159" name="Google Shape;159;g2ae82704064_0_6:notes"/>
+          <p:cNvPr id="151" name="Google Shape;151;g2ad2c197c5e_0_0:notes"/>
           <p:cNvSpPr txBox="1">
             <a:spLocks noGrp="1"/>
           </p:cNvSpPr>
@@ -934,7 +935,7 @@
   <p:cSld>
     <p:spTree>
       <p:nvGrpSpPr>
-        <p:cNvPr id="1" name="Shape 174"/>
+        <p:cNvPr id="1" name="Shape 165"/>
         <p:cNvGrpSpPr/>
         <p:nvPr/>
       </p:nvGrpSpPr>
@@ -948,7 +949,7 @@
       </p:grpSpPr>
       <p:sp>
         <p:nvSpPr>
-          <p:cNvPr id="175" name="Google Shape;175;g2ae0440c73d_0_0:notes"/>
+          <p:cNvPr id="166" name="Google Shape;166;g2ae82704064_0_6:notes"/>
           <p:cNvSpPr>
             <a:spLocks noGrp="1" noRot="1" noChangeAspect="1"/>
           </p:cNvSpPr>
@@ -989,7 +990,7 @@
       </p:sp>
       <p:sp>
         <p:nvSpPr>
-          <p:cNvPr id="176" name="Google Shape;176;g2ae0440c73d_0_0:notes"/>
+          <p:cNvPr id="167" name="Google Shape;167;g2ae82704064_0_6:notes"/>
           <p:cNvSpPr txBox="1">
             <a:spLocks noGrp="1"/>
           </p:cNvSpPr>
@@ -1038,7 +1039,7 @@
   <p:cSld>
     <p:spTree>
       <p:nvGrpSpPr>
-        <p:cNvPr id="1" name="Shape 186"/>
+        <p:cNvPr id="1" name="Shape 182"/>
         <p:cNvGrpSpPr/>
         <p:nvPr/>
       </p:nvGrpSpPr>
@@ -1052,7 +1053,7 @@
       </p:grpSpPr>
       <p:sp>
         <p:nvSpPr>
-          <p:cNvPr id="187" name="Google Shape;187;g2ae0440c73d_0_15:notes"/>
+          <p:cNvPr id="183" name="Google Shape;183;g2ae0440c73d_0_0:notes"/>
           <p:cNvSpPr>
             <a:spLocks noGrp="1" noRot="1" noChangeAspect="1"/>
           </p:cNvSpPr>
@@ -1093,7 +1094,7 @@
       </p:sp>
       <p:sp>
         <p:nvSpPr>
-          <p:cNvPr id="188" name="Google Shape;188;g2ae0440c73d_0_15:notes"/>
+          <p:cNvPr id="184" name="Google Shape;184;g2ae0440c73d_0_0:notes"/>
           <p:cNvSpPr txBox="1">
             <a:spLocks noGrp="1"/>
           </p:cNvSpPr>
@@ -1142,7 +1143,7 @@
   <p:cSld>
     <p:spTree>
       <p:nvGrpSpPr>
-        <p:cNvPr id="1" name="Shape 197"/>
+        <p:cNvPr id="1" name="Shape 194"/>
         <p:cNvGrpSpPr/>
         <p:nvPr/>
       </p:nvGrpSpPr>
@@ -1156,7 +1157,7 @@
       </p:grpSpPr>
       <p:sp>
         <p:nvSpPr>
-          <p:cNvPr id="198" name="Google Shape;198;g1ee892301e7_0_0:notes"/>
+          <p:cNvPr id="195" name="Google Shape;195;g2ae0440c73d_0_15:notes"/>
           <p:cNvSpPr>
             <a:spLocks noGrp="1" noRot="1" noChangeAspect="1"/>
           </p:cNvSpPr>
@@ -1197,7 +1198,7 @@
       </p:sp>
       <p:sp>
         <p:nvSpPr>
-          <p:cNvPr id="199" name="Google Shape;199;g1ee892301e7_0_0:notes"/>
+          <p:cNvPr id="196" name="Google Shape;196;g2ae0440c73d_0_15:notes"/>
           <p:cNvSpPr txBox="1">
             <a:spLocks noGrp="1"/>
           </p:cNvSpPr>
@@ -1246,7 +1247,7 @@
   <p:cSld>
     <p:spTree>
       <p:nvGrpSpPr>
-        <p:cNvPr id="1" name="Shape 206"/>
+        <p:cNvPr id="1" name="Shape 205"/>
         <p:cNvGrpSpPr/>
         <p:nvPr/>
       </p:nvGrpSpPr>
@@ -1260,7 +1261,7 @@
       </p:grpSpPr>
       <p:sp>
         <p:nvSpPr>
-          <p:cNvPr id="207" name="Google Shape;207;g2a9ffc56a77_0_5:notes"/>
+          <p:cNvPr id="206" name="Google Shape;206;g1ee892301e7_0_0:notes"/>
           <p:cNvSpPr>
             <a:spLocks noGrp="1" noRot="1" noChangeAspect="1"/>
           </p:cNvSpPr>
@@ -1301,7 +1302,7 @@
       </p:sp>
       <p:sp>
         <p:nvSpPr>
-          <p:cNvPr id="208" name="Google Shape;208;g2a9ffc56a77_0_5:notes"/>
+          <p:cNvPr id="207" name="Google Shape;207;g1ee892301e7_0_0:notes"/>
           <p:cNvSpPr txBox="1">
             <a:spLocks noGrp="1"/>
           </p:cNvSpPr>
@@ -1350,7 +1351,7 @@
   <p:cSld>
     <p:spTree>
       <p:nvGrpSpPr>
-        <p:cNvPr id="1" name="Shape 226"/>
+        <p:cNvPr id="1" name="Shape 214"/>
         <p:cNvGrpSpPr/>
         <p:nvPr/>
       </p:nvGrpSpPr>
@@ -1364,7 +1365,7 @@
       </p:grpSpPr>
       <p:sp>
         <p:nvSpPr>
-          <p:cNvPr id="227" name="Google Shape;227;g2a9ffc56a77_0_22:notes"/>
+          <p:cNvPr id="215" name="Google Shape;215;g2a9ffc56a77_0_5:notes"/>
           <p:cNvSpPr>
             <a:spLocks noGrp="1" noRot="1" noChangeAspect="1"/>
           </p:cNvSpPr>
@@ -1405,7 +1406,7 @@
       </p:sp>
       <p:sp>
         <p:nvSpPr>
-          <p:cNvPr id="228" name="Google Shape;228;g2a9ffc56a77_0_22:notes"/>
+          <p:cNvPr id="216" name="Google Shape;216;g2a9ffc56a77_0_5:notes"/>
           <p:cNvSpPr txBox="1">
             <a:spLocks noGrp="1"/>
           </p:cNvSpPr>
@@ -1454,7 +1455,7 @@
   <p:cSld>
     <p:spTree>
       <p:nvGrpSpPr>
-        <p:cNvPr id="1" name="Shape 253"/>
+        <p:cNvPr id="1" name="Shape 234"/>
         <p:cNvGrpSpPr/>
         <p:nvPr/>
       </p:nvGrpSpPr>
@@ -1468,7 +1469,7 @@
       </p:grpSpPr>
       <p:sp>
         <p:nvSpPr>
-          <p:cNvPr id="254" name="Google Shape;254;g265aba99801_0_78:notes"/>
+          <p:cNvPr id="235" name="Google Shape;235;g2a9ffc56a77_0_22:notes"/>
           <p:cNvSpPr>
             <a:spLocks noGrp="1" noRot="1" noChangeAspect="1"/>
           </p:cNvSpPr>
@@ -1509,7 +1510,7 @@
       </p:sp>
       <p:sp>
         <p:nvSpPr>
-          <p:cNvPr id="255" name="Google Shape;255;g265aba99801_0_78:notes"/>
+          <p:cNvPr id="236" name="Google Shape;236;g2a9ffc56a77_0_22:notes"/>
           <p:cNvSpPr txBox="1">
             <a:spLocks noGrp="1"/>
           </p:cNvSpPr>
@@ -1558,7 +1559,7 @@
   <p:cSld>
     <p:spTree>
       <p:nvGrpSpPr>
-        <p:cNvPr id="1" name="Shape 260"/>
+        <p:cNvPr id="1" name="Shape 261"/>
         <p:cNvGrpSpPr/>
         <p:nvPr/>
       </p:nvGrpSpPr>
@@ -1572,7 +1573,7 @@
       </p:grpSpPr>
       <p:sp>
         <p:nvSpPr>
-          <p:cNvPr id="261" name="Google Shape;261;g265aba99801_0_0:notes"/>
+          <p:cNvPr id="262" name="Google Shape;262;g265aba99801_0_78:notes"/>
           <p:cNvSpPr>
             <a:spLocks noGrp="1" noRot="1" noChangeAspect="1"/>
           </p:cNvSpPr>
@@ -1613,7 +1614,7 @@
       </p:sp>
       <p:sp>
         <p:nvSpPr>
-          <p:cNvPr id="262" name="Google Shape;262;g265aba99801_0_0:notes"/>
+          <p:cNvPr id="263" name="Google Shape;263;g265aba99801_0_78:notes"/>
           <p:cNvSpPr txBox="1">
             <a:spLocks noGrp="1"/>
           </p:cNvSpPr>
@@ -1662,7 +1663,7 @@
   <p:cSld>
     <p:spTree>
       <p:nvGrpSpPr>
-        <p:cNvPr id="1" name="Shape 267"/>
+        <p:cNvPr id="1" name="Shape 268"/>
         <p:cNvGrpSpPr/>
         <p:nvPr/>
       </p:nvGrpSpPr>
@@ -1676,7 +1677,7 @@
       </p:grpSpPr>
       <p:sp>
         <p:nvSpPr>
-          <p:cNvPr id="268" name="Google Shape;268;g1ee3445068b_0_4:notes"/>
+          <p:cNvPr id="269" name="Google Shape;269;g265aba99801_0_0:notes"/>
           <p:cNvSpPr>
             <a:spLocks noGrp="1" noRot="1" noChangeAspect="1"/>
           </p:cNvSpPr>
@@ -1717,7 +1718,7 @@
       </p:sp>
       <p:sp>
         <p:nvSpPr>
-          <p:cNvPr id="269" name="Google Shape;269;g1ee3445068b_0_4:notes"/>
+          <p:cNvPr id="270" name="Google Shape;270;g265aba99801_0_0:notes"/>
           <p:cNvSpPr txBox="1">
             <a:spLocks noGrp="1"/>
           </p:cNvSpPr>
@@ -1766,7 +1767,7 @@
   <p:cSld>
     <p:spTree>
       <p:nvGrpSpPr>
-        <p:cNvPr id="1" name="Shape 286"/>
+        <p:cNvPr id="1" name="Shape 275"/>
         <p:cNvGrpSpPr/>
         <p:nvPr/>
       </p:nvGrpSpPr>
@@ -1780,7 +1781,7 @@
       </p:grpSpPr>
       <p:sp>
         <p:nvSpPr>
-          <p:cNvPr id="287" name="Google Shape;287;g2adadf45363_0_0:notes"/>
+          <p:cNvPr id="276" name="Google Shape;276;g1ee3445068b_0_4:notes"/>
           <p:cNvSpPr>
             <a:spLocks noGrp="1" noRot="1" noChangeAspect="1"/>
           </p:cNvSpPr>
@@ -1821,7 +1822,7 @@
       </p:sp>
       <p:sp>
         <p:nvSpPr>
-          <p:cNvPr id="288" name="Google Shape;288;g2adadf45363_0_0:notes"/>
+          <p:cNvPr id="277" name="Google Shape;277;g1ee3445068b_0_4:notes"/>
           <p:cNvSpPr txBox="1">
             <a:spLocks noGrp="1"/>
           </p:cNvSpPr>
@@ -1974,7 +1975,7 @@
   <p:cSld>
     <p:spTree>
       <p:nvGrpSpPr>
-        <p:cNvPr id="1" name="Shape 296"/>
+        <p:cNvPr id="1" name="Shape 294"/>
         <p:cNvGrpSpPr/>
         <p:nvPr/>
       </p:nvGrpSpPr>
@@ -1988,7 +1989,7 @@
       </p:grpSpPr>
       <p:sp>
         <p:nvSpPr>
-          <p:cNvPr id="297" name="Google Shape;297;g1ee8a65aefa_0_3:notes"/>
+          <p:cNvPr id="295" name="Google Shape;295;g2adadf45363_0_0:notes"/>
           <p:cNvSpPr>
             <a:spLocks noGrp="1" noRot="1" noChangeAspect="1"/>
           </p:cNvSpPr>
@@ -2029,7 +2030,7 @@
       </p:sp>
       <p:sp>
         <p:nvSpPr>
-          <p:cNvPr id="298" name="Google Shape;298;g1ee8a65aefa_0_3:notes"/>
+          <p:cNvPr id="296" name="Google Shape;296;g2adadf45363_0_0:notes"/>
           <p:cNvSpPr txBox="1">
             <a:spLocks noGrp="1"/>
           </p:cNvSpPr>
@@ -2078,7 +2079,7 @@
   <p:cSld>
     <p:spTree>
       <p:nvGrpSpPr>
-        <p:cNvPr id="1" name="Shape 303"/>
+        <p:cNvPr id="1" name="Shape 304"/>
         <p:cNvGrpSpPr/>
         <p:nvPr/>
       </p:nvGrpSpPr>
@@ -2092,7 +2093,111 @@
       </p:grpSpPr>
       <p:sp>
         <p:nvSpPr>
-          <p:cNvPr id="304" name="Google Shape;304;g1ef1c5a9d92_0_26:notes"/>
+          <p:cNvPr id="305" name="Google Shape;305;g1ee8a65aefa_0_3:notes"/>
+          <p:cNvSpPr>
+            <a:spLocks noGrp="1" noRot="1" noChangeAspect="1"/>
+          </p:cNvSpPr>
+          <p:nvPr>
+            <p:ph type="sldImg" idx="2"/>
+          </p:nvPr>
+        </p:nvSpPr>
+        <p:spPr>
+          <a:xfrm>
+            <a:off x="381300" y="685800"/>
+            <a:ext cx="6096000" cy="3429000"/>
+          </a:xfrm>
+          <a:custGeom>
+            <a:avLst/>
+            <a:gdLst/>
+            <a:ahLst/>
+            <a:cxnLst/>
+            <a:rect l="l" t="t" r="r" b="b"/>
+            <a:pathLst>
+              <a:path w="120000" h="120000" extrusionOk="0">
+                <a:moveTo>
+                  <a:pt x="0" y="0"/>
+                </a:moveTo>
+                <a:lnTo>
+                  <a:pt x="120000" y="0"/>
+                </a:lnTo>
+                <a:lnTo>
+                  <a:pt x="120000" y="120000"/>
+                </a:lnTo>
+                <a:lnTo>
+                  <a:pt x="0" y="120000"/>
+                </a:lnTo>
+                <a:close/>
+              </a:path>
+            </a:pathLst>
+          </a:custGeom>
+        </p:spPr>
+      </p:sp>
+      <p:sp>
+        <p:nvSpPr>
+          <p:cNvPr id="306" name="Google Shape;306;g1ee8a65aefa_0_3:notes"/>
+          <p:cNvSpPr txBox="1">
+            <a:spLocks noGrp="1"/>
+          </p:cNvSpPr>
+          <p:nvPr>
+            <p:ph type="body" idx="1"/>
+          </p:nvPr>
+        </p:nvSpPr>
+        <p:spPr>
+          <a:xfrm>
+            <a:off x="685800" y="4343400"/>
+            <a:ext cx="5486400" cy="4114800"/>
+          </a:xfrm>
+          <a:prstGeom prst="rect">
+            <a:avLst/>
+          </a:prstGeom>
+        </p:spPr>
+        <p:txBody>
+          <a:bodyPr spcFirstLastPara="1" wrap="square" lIns="91425" tIns="91425" rIns="91425" bIns="91425" anchor="t" anchorCtr="0">
+            <a:noAutofit/>
+          </a:bodyPr>
+          <a:lstStyle/>
+          <a:p>
+            <a:pPr marL="0" lvl="0" indent="0" algn="l" rtl="0">
+              <a:spcBef>
+                <a:spcPts val="0"/>
+              </a:spcBef>
+              <a:spcAft>
+                <a:spcPts val="0"/>
+              </a:spcAft>
+              <a:buNone/>
+            </a:pPr>
+            <a:endParaRPr/>
+          </a:p>
+        </p:txBody>
+      </p:sp>
+    </p:spTree>
+  </p:cSld>
+  <p:clrMapOvr>
+    <a:masterClrMapping/>
+  </p:clrMapOvr>
+</p:notes>
+</file>
+
+<file path=ppt/notesSlides/notesSlide22.xml><?xml version="1.0" encoding="utf-8"?>
+<p:notes xmlns:a="http://schemas.openxmlformats.org/drawingml/2006/main" xmlns:r="http://schemas.openxmlformats.org/officeDocument/2006/relationships" xmlns:p="http://schemas.openxmlformats.org/presentationml/2006/main" showMasterSp="0" showMasterPhAnim="0">
+  <p:cSld>
+    <p:spTree>
+      <p:nvGrpSpPr>
+        <p:cNvPr id="1" name="Shape 311"/>
+        <p:cNvGrpSpPr/>
+        <p:nvPr/>
+      </p:nvGrpSpPr>
+      <p:grpSpPr>
+        <a:xfrm>
+          <a:off x="0" y="0"/>
+          <a:ext cx="0" cy="0"/>
+          <a:chOff x="0" y="0"/>
+          <a:chExt cx="0" cy="0"/>
+        </a:xfrm>
+      </p:grpSpPr>
+      <p:sp>
+        <p:nvSpPr>
+          <p:cNvPr id="312" name="Google Shape;312;g1ef1c5a9d92_0_26:notes"/>
           <p:cNvSpPr txBox="1">
             <a:spLocks noGrp="1"/>
           </p:cNvSpPr>
@@ -2130,7 +2235,7 @@
       </p:sp>
       <p:sp>
         <p:nvSpPr>
-          <p:cNvPr id="305" name="Google Shape;305;g1ef1c5a9d92_0_26:notes"/>
+          <p:cNvPr id="313" name="Google Shape;313;g1ef1c5a9d92_0_26:notes"/>
           <p:cNvSpPr>
             <a:spLocks noGrp="1" noRot="1" noChangeAspect="1"/>
           </p:cNvSpPr>
@@ -2177,12 +2282,12 @@
 </p:notes>
 </file>
 
-<file path=ppt/notesSlides/notesSlide22.xml><?xml version="1.0" encoding="utf-8"?>
+<file path=ppt/notesSlides/notesSlide23.xml><?xml version="1.0" encoding="utf-8"?>
 <p:notes xmlns:a="http://schemas.openxmlformats.org/drawingml/2006/main" xmlns:r="http://schemas.openxmlformats.org/officeDocument/2006/relationships" xmlns:p="http://schemas.openxmlformats.org/presentationml/2006/main" showMasterSp="0" showMasterPhAnim="0">
   <p:cSld>
     <p:spTree>
       <p:nvGrpSpPr>
-        <p:cNvPr id="1" name="Shape 315"/>
+        <p:cNvPr id="1" name="Shape 323"/>
         <p:cNvGrpSpPr/>
         <p:nvPr/>
       </p:nvGrpSpPr>
@@ -2196,7 +2301,7 @@
       </p:grpSpPr>
       <p:sp>
         <p:nvSpPr>
-          <p:cNvPr id="316" name="Google Shape;316;g1ef1e78aae7_0_15:notes"/>
+          <p:cNvPr id="324" name="Google Shape;324;g1ef1e78aae7_0_15:notes"/>
           <p:cNvSpPr>
             <a:spLocks noGrp="1" noRot="1" noChangeAspect="1"/>
           </p:cNvSpPr>
@@ -2237,7 +2342,7 @@
       </p:sp>
       <p:sp>
         <p:nvSpPr>
-          <p:cNvPr id="317" name="Google Shape;317;g1ef1e78aae7_0_15:notes"/>
+          <p:cNvPr id="325" name="Google Shape;325;g1ef1e78aae7_0_15:notes"/>
           <p:cNvSpPr txBox="1">
             <a:spLocks noGrp="1"/>
           </p:cNvSpPr>
@@ -2281,12 +2386,12 @@
 </p:notes>
 </file>
 
-<file path=ppt/notesSlides/notesSlide23.xml><?xml version="1.0" encoding="utf-8"?>
+<file path=ppt/notesSlides/notesSlide24.xml><?xml version="1.0" encoding="utf-8"?>
 <p:notes xmlns:a="http://schemas.openxmlformats.org/drawingml/2006/main" xmlns:r="http://schemas.openxmlformats.org/officeDocument/2006/relationships" xmlns:p="http://schemas.openxmlformats.org/presentationml/2006/main" showMasterSp="0" showMasterPhAnim="0">
   <p:cSld>
     <p:spTree>
       <p:nvGrpSpPr>
-        <p:cNvPr id="1" name="Shape 321"/>
+        <p:cNvPr id="1" name="Shape 329"/>
         <p:cNvGrpSpPr/>
         <p:nvPr/>
       </p:nvGrpSpPr>
@@ -2300,7 +2405,7 @@
       </p:grpSpPr>
       <p:sp>
         <p:nvSpPr>
-          <p:cNvPr id="322" name="Google Shape;322;g2ae4487d2b3_0_8:notes"/>
+          <p:cNvPr id="330" name="Google Shape;330;g2ae4487d2b3_0_8:notes"/>
           <p:cNvSpPr>
             <a:spLocks noGrp="1" noRot="1" noChangeAspect="1"/>
           </p:cNvSpPr>
@@ -2341,7 +2446,7 @@
       </p:sp>
       <p:sp>
         <p:nvSpPr>
-          <p:cNvPr id="323" name="Google Shape;323;g2ae4487d2b3_0_8:notes"/>
+          <p:cNvPr id="331" name="Google Shape;331;g2ae4487d2b3_0_8:notes"/>
           <p:cNvSpPr txBox="1">
             <a:spLocks noGrp="1"/>
           </p:cNvSpPr>
@@ -2385,12 +2490,12 @@
 </p:notes>
 </file>
 
-<file path=ppt/notesSlides/notesSlide24.xml><?xml version="1.0" encoding="utf-8"?>
+<file path=ppt/notesSlides/notesSlide25.xml><?xml version="1.0" encoding="utf-8"?>
 <p:notes xmlns:a="http://schemas.openxmlformats.org/drawingml/2006/main" xmlns:r="http://schemas.openxmlformats.org/officeDocument/2006/relationships" xmlns:p="http://schemas.openxmlformats.org/presentationml/2006/main" showMasterSp="0" showMasterPhAnim="0">
   <p:cSld>
     <p:spTree>
       <p:nvGrpSpPr>
-        <p:cNvPr id="1" name="Shape 330"/>
+        <p:cNvPr id="1" name="Shape 338"/>
         <p:cNvGrpSpPr/>
         <p:nvPr/>
       </p:nvGrpSpPr>
@@ -2404,7 +2509,7 @@
       </p:grpSpPr>
       <p:sp>
         <p:nvSpPr>
-          <p:cNvPr id="331" name="Google Shape;331;g1ef1e78aae7_2_0:notes"/>
+          <p:cNvPr id="339" name="Google Shape;339;g1ef1e78aae7_2_0:notes"/>
           <p:cNvSpPr>
             <a:spLocks noGrp="1" noRot="1" noChangeAspect="1"/>
           </p:cNvSpPr>
@@ -2445,7 +2550,7 @@
       </p:sp>
       <p:sp>
         <p:nvSpPr>
-          <p:cNvPr id="332" name="Google Shape;332;g1ef1e78aae7_2_0:notes"/>
+          <p:cNvPr id="340" name="Google Shape;340;g1ef1e78aae7_2_0:notes"/>
           <p:cNvSpPr txBox="1">
             <a:spLocks noGrp="1"/>
           </p:cNvSpPr>
@@ -2489,12 +2594,12 @@
 </p:notes>
 </file>
 
-<file path=ppt/notesSlides/notesSlide25.xml><?xml version="1.0" encoding="utf-8"?>
+<file path=ppt/notesSlides/notesSlide26.xml><?xml version="1.0" encoding="utf-8"?>
 <p:notes xmlns:a="http://schemas.openxmlformats.org/drawingml/2006/main" xmlns:r="http://schemas.openxmlformats.org/officeDocument/2006/relationships" xmlns:p="http://schemas.openxmlformats.org/presentationml/2006/main" showMasterSp="0" showMasterPhAnim="0">
   <p:cSld>
     <p:spTree>
       <p:nvGrpSpPr>
-        <p:cNvPr id="1" name="Shape 337"/>
+        <p:cNvPr id="1" name="Shape 345"/>
         <p:cNvGrpSpPr/>
         <p:nvPr/>
       </p:nvGrpSpPr>
@@ -2508,7 +2613,7 @@
       </p:grpSpPr>
       <p:sp>
         <p:nvSpPr>
-          <p:cNvPr id="338" name="Google Shape;338;g2ae8d5fd33c_0_0:notes"/>
+          <p:cNvPr id="346" name="Google Shape;346;g2ae8d5fd33c_0_0:notes"/>
           <p:cNvSpPr>
             <a:spLocks noGrp="1" noRot="1" noChangeAspect="1"/>
           </p:cNvSpPr>
@@ -2549,7 +2654,7 @@
       </p:sp>
       <p:sp>
         <p:nvSpPr>
-          <p:cNvPr id="339" name="Google Shape;339;g2ae8d5fd33c_0_0:notes"/>
+          <p:cNvPr id="347" name="Google Shape;347;g2ae8d5fd33c_0_0:notes"/>
           <p:cNvSpPr txBox="1">
             <a:spLocks noGrp="1"/>
           </p:cNvSpPr>
@@ -2593,12 +2698,12 @@
 </p:notes>
 </file>
 
-<file path=ppt/notesSlides/notesSlide26.xml><?xml version="1.0" encoding="utf-8"?>
+<file path=ppt/notesSlides/notesSlide27.xml><?xml version="1.0" encoding="utf-8"?>
 <p:notes xmlns:a="http://schemas.openxmlformats.org/drawingml/2006/main" xmlns:r="http://schemas.openxmlformats.org/officeDocument/2006/relationships" xmlns:p="http://schemas.openxmlformats.org/presentationml/2006/main" showMasterSp="0" showMasterPhAnim="0">
   <p:cSld>
     <p:spTree>
       <p:nvGrpSpPr>
-        <p:cNvPr id="1" name="Shape 344"/>
+        <p:cNvPr id="1" name="Shape 352"/>
         <p:cNvGrpSpPr/>
         <p:nvPr/>
       </p:nvGrpSpPr>
@@ -2612,7 +2717,7 @@
       </p:grpSpPr>
       <p:sp>
         <p:nvSpPr>
-          <p:cNvPr id="345" name="Google Shape;345;g265aba99801_0_45:notes"/>
+          <p:cNvPr id="353" name="Google Shape;353;g265aba99801_0_45:notes"/>
           <p:cNvSpPr>
             <a:spLocks noGrp="1" noRot="1" noChangeAspect="1"/>
           </p:cNvSpPr>
@@ -2653,7 +2758,7 @@
       </p:sp>
       <p:sp>
         <p:nvSpPr>
-          <p:cNvPr id="346" name="Google Shape;346;g265aba99801_0_45:notes"/>
+          <p:cNvPr id="354" name="Google Shape;354;g265aba99801_0_45:notes"/>
           <p:cNvSpPr txBox="1">
             <a:spLocks noGrp="1"/>
           </p:cNvSpPr>
@@ -2697,12 +2802,12 @@
 </p:notes>
 </file>
 
-<file path=ppt/notesSlides/notesSlide27.xml><?xml version="1.0" encoding="utf-8"?>
+<file path=ppt/notesSlides/notesSlide28.xml><?xml version="1.0" encoding="utf-8"?>
 <p:notes xmlns:a="http://schemas.openxmlformats.org/drawingml/2006/main" xmlns:r="http://schemas.openxmlformats.org/officeDocument/2006/relationships" xmlns:p="http://schemas.openxmlformats.org/presentationml/2006/main" showMasterSp="0" showMasterPhAnim="0">
   <p:cSld>
     <p:spTree>
       <p:nvGrpSpPr>
-        <p:cNvPr id="1" name="Shape 353"/>
+        <p:cNvPr id="1" name="Shape 361"/>
         <p:cNvGrpSpPr/>
         <p:nvPr/>
       </p:nvGrpSpPr>
@@ -2716,7 +2821,7 @@
       </p:grpSpPr>
       <p:sp>
         <p:nvSpPr>
-          <p:cNvPr id="354" name="Google Shape;354;g25d3c59165e_0_15:notes"/>
+          <p:cNvPr id="362" name="Google Shape;362;g25d3c59165e_0_15:notes"/>
           <p:cNvSpPr>
             <a:spLocks noGrp="1" noRot="1" noChangeAspect="1"/>
           </p:cNvSpPr>
@@ -2757,7 +2862,7 @@
       </p:sp>
       <p:sp>
         <p:nvSpPr>
-          <p:cNvPr id="355" name="Google Shape;355;g25d3c59165e_0_15:notes"/>
+          <p:cNvPr id="363" name="Google Shape;363;g25d3c59165e_0_15:notes"/>
           <p:cNvSpPr txBox="1">
             <a:spLocks noGrp="1"/>
           </p:cNvSpPr>
@@ -2801,12 +2906,12 @@
 </p:notes>
 </file>
 
-<file path=ppt/notesSlides/notesSlide28.xml><?xml version="1.0" encoding="utf-8"?>
+<file path=ppt/notesSlides/notesSlide29.xml><?xml version="1.0" encoding="utf-8"?>
 <p:notes xmlns:a="http://schemas.openxmlformats.org/drawingml/2006/main" xmlns:r="http://schemas.openxmlformats.org/officeDocument/2006/relationships" xmlns:p="http://schemas.openxmlformats.org/presentationml/2006/main" showMasterSp="0" showMasterPhAnim="0">
   <p:cSld>
     <p:spTree>
       <p:nvGrpSpPr>
-        <p:cNvPr id="1" name="Shape 358"/>
+        <p:cNvPr id="1" name="Shape 366"/>
         <p:cNvGrpSpPr/>
         <p:nvPr/>
       </p:nvGrpSpPr>
@@ -2820,7 +2925,7 @@
       </p:grpSpPr>
       <p:sp>
         <p:nvSpPr>
-          <p:cNvPr id="359" name="Google Shape;359;g2aabfee0e51_0_0:notes"/>
+          <p:cNvPr id="367" name="Google Shape;367;g2aabfee0e51_0_0:notes"/>
           <p:cNvSpPr>
             <a:spLocks noGrp="1" noRot="1" noChangeAspect="1"/>
           </p:cNvSpPr>
@@ -2861,7 +2966,7 @@
       </p:sp>
       <p:sp>
         <p:nvSpPr>
-          <p:cNvPr id="360" name="Google Shape;360;g2aabfee0e51_0_0:notes"/>
+          <p:cNvPr id="368" name="Google Shape;368;g2aabfee0e51_0_0:notes"/>
           <p:cNvSpPr txBox="1">
             <a:spLocks noGrp="1"/>
           </p:cNvSpPr>
@@ -3444,7 +3549,7 @@
       </p:grpSpPr>
       <p:sp>
         <p:nvSpPr>
-          <p:cNvPr id="131" name="Google Shape;131;g1ef1c5a9d92_0_13:notes"/>
+          <p:cNvPr id="131" name="Google Shape;131;g265b2b8bfaa_1_0:notes"/>
           <p:cNvSpPr>
             <a:spLocks noGrp="1" noRot="1" noChangeAspect="1"/>
           </p:cNvSpPr>
@@ -3485,7 +3590,7 @@
       </p:sp>
       <p:sp>
         <p:nvSpPr>
-          <p:cNvPr id="132" name="Google Shape;132;g1ef1c5a9d92_0_13:notes"/>
+          <p:cNvPr id="132" name="Google Shape;132;g265b2b8bfaa_1_0:notes"/>
           <p:cNvSpPr txBox="1">
             <a:spLocks noGrp="1"/>
           </p:cNvSpPr>
@@ -3534,7 +3639,7 @@
   <p:cSld>
     <p:spTree>
       <p:nvGrpSpPr>
-        <p:cNvPr id="1" name="Shape 141"/>
+        <p:cNvPr id="1" name="Shape 138"/>
         <p:cNvGrpSpPr/>
         <p:nvPr/>
       </p:nvGrpSpPr>
@@ -3548,7 +3653,7 @@
       </p:grpSpPr>
       <p:sp>
         <p:nvSpPr>
-          <p:cNvPr id="142" name="Google Shape;142;g2ad2c197c5e_0_0:notes"/>
+          <p:cNvPr id="139" name="Google Shape;139;g1ef1c5a9d92_0_13:notes"/>
           <p:cNvSpPr>
             <a:spLocks noGrp="1" noRot="1" noChangeAspect="1"/>
           </p:cNvSpPr>
@@ -3589,7 +3694,7 @@
       </p:sp>
       <p:sp>
         <p:nvSpPr>
-          <p:cNvPr id="143" name="Google Shape;143;g2ad2c197c5e_0_0:notes"/>
+          <p:cNvPr id="140" name="Google Shape;140;g1ef1c5a9d92_0_13:notes"/>
           <p:cNvSpPr txBox="1">
             <a:spLocks noGrp="1"/>
           </p:cNvSpPr>
@@ -10903,7 +11008,487 @@
         </p:nvSpPr>
         <p:spPr>
           <a:xfrm>
-            <a:off x="291275" y="1048653"/>
+            <a:off x="291275" y="972453"/>
+            <a:ext cx="4342500" cy="4125000"/>
+          </a:xfrm>
+          <a:prstGeom prst="rect">
+            <a:avLst/>
+          </a:prstGeom>
+          <a:noFill/>
+          <a:ln w="9525" cap="flat" cmpd="sng">
+            <a:solidFill>
+              <a:srgbClr val="FF0000"/>
+            </a:solidFill>
+            <a:prstDash val="solid"/>
+            <a:round/>
+            <a:headEnd type="none" w="sm" len="sm"/>
+            <a:tailEnd type="none" w="sm" len="sm"/>
+          </a:ln>
+        </p:spPr>
+        <p:txBody>
+          <a:bodyPr spcFirstLastPara="1" wrap="square" lIns="91425" tIns="91425" rIns="91425" bIns="91425" anchor="t" anchorCtr="0">
+            <a:spAutoFit/>
+          </a:bodyPr>
+          <a:lstStyle/>
+          <a:p>
+            <a:pPr marL="228600" lvl="0" indent="-215900" algn="l" rtl="0">
+              <a:spcBef>
+                <a:spcPts val="0"/>
+              </a:spcBef>
+              <a:spcAft>
+                <a:spcPts val="0"/>
+              </a:spcAft>
+              <a:buClr>
+                <a:srgbClr val="3C78D8"/>
+              </a:buClr>
+              <a:buSzPts val="1600"/>
+              <a:buChar char="●"/>
+            </a:pPr>
+            <a:r>
+              <a:rPr lang="en" sz="1600" b="1">
+                <a:solidFill>
+                  <a:srgbClr val="3C78D8"/>
+                </a:solidFill>
+              </a:rPr>
+              <a:t>Mamba Outperforms Transformers</a:t>
+            </a:r>
+            <a:endParaRPr sz="1600" b="1">
+              <a:solidFill>
+                <a:srgbClr val="3C78D8"/>
+              </a:solidFill>
+            </a:endParaRPr>
+          </a:p>
+          <a:p>
+            <a:pPr marL="228600" lvl="0" indent="-215900" algn="l" rtl="0">
+              <a:spcBef>
+                <a:spcPts val="0"/>
+              </a:spcBef>
+              <a:spcAft>
+                <a:spcPts val="0"/>
+              </a:spcAft>
+              <a:buClr>
+                <a:srgbClr val="3C78D8"/>
+              </a:buClr>
+              <a:buSzPts val="1600"/>
+              <a:buChar char="●"/>
+            </a:pPr>
+            <a:r>
+              <a:rPr lang="en" sz="1600" b="1">
+                <a:solidFill>
+                  <a:srgbClr val="3C78D8"/>
+                </a:solidFill>
+              </a:rPr>
+              <a:t>Mixtral-8x7B on a laptop</a:t>
+            </a:r>
+            <a:endParaRPr sz="1600" b="1">
+              <a:solidFill>
+                <a:srgbClr val="3C78D8"/>
+              </a:solidFill>
+            </a:endParaRPr>
+          </a:p>
+          <a:p>
+            <a:pPr marL="228600" lvl="0" indent="-215900" algn="l" rtl="0">
+              <a:spcBef>
+                <a:spcPts val="0"/>
+              </a:spcBef>
+              <a:spcAft>
+                <a:spcPts val="0"/>
+              </a:spcAft>
+              <a:buClr>
+                <a:srgbClr val="3C78D8"/>
+              </a:buClr>
+              <a:buSzPts val="1600"/>
+              <a:buChar char="●"/>
+            </a:pPr>
+            <a:r>
+              <a:rPr lang="en" sz="1600" b="1">
+                <a:solidFill>
+                  <a:srgbClr val="3C78D8"/>
+                </a:solidFill>
+              </a:rPr>
+              <a:t>deepinfra.com - Mixtral at 54 c/Mtokens </a:t>
+            </a:r>
+            <a:endParaRPr sz="1600" b="1">
+              <a:solidFill>
+                <a:srgbClr val="3C78D8"/>
+              </a:solidFill>
+            </a:endParaRPr>
+          </a:p>
+          <a:p>
+            <a:pPr marL="228600" lvl="0" indent="-215900" algn="l" rtl="0">
+              <a:spcBef>
+                <a:spcPts val="0"/>
+              </a:spcBef>
+              <a:spcAft>
+                <a:spcPts val="0"/>
+              </a:spcAft>
+              <a:buClr>
+                <a:srgbClr val="3C78D8"/>
+              </a:buClr>
+              <a:buSzPts val="1600"/>
+              <a:buChar char="●"/>
+            </a:pPr>
+            <a:r>
+              <a:rPr lang="en" sz="1600" b="1">
+                <a:solidFill>
+                  <a:srgbClr val="3C78D8"/>
+                </a:solidFill>
+              </a:rPr>
+              <a:t>Latent.Space - Four Wars of the AI Stack</a:t>
+            </a:r>
+            <a:endParaRPr sz="1600" b="1">
+              <a:solidFill>
+                <a:srgbClr val="3C78D8"/>
+              </a:solidFill>
+            </a:endParaRPr>
+          </a:p>
+          <a:p>
+            <a:pPr marL="228600" lvl="0" indent="-215900" algn="l" rtl="0">
+              <a:spcBef>
+                <a:spcPts val="0"/>
+              </a:spcBef>
+              <a:spcAft>
+                <a:spcPts val="0"/>
+              </a:spcAft>
+              <a:buClr>
+                <a:srgbClr val="3C78D8"/>
+              </a:buClr>
+              <a:buSzPts val="1600"/>
+              <a:buChar char="●"/>
+            </a:pPr>
+            <a:r>
+              <a:rPr lang="en" sz="1600" b="1">
+                <a:solidFill>
+                  <a:srgbClr val="3C78D8"/>
+                </a:solidFill>
+              </a:rPr>
+              <a:t>Open Interpreter - use Local LLM</a:t>
+            </a:r>
+            <a:endParaRPr sz="1600" b="1">
+              <a:solidFill>
+                <a:srgbClr val="3C78D8"/>
+              </a:solidFill>
+            </a:endParaRPr>
+          </a:p>
+          <a:p>
+            <a:pPr marL="228600" lvl="0" indent="-215900" algn="l" rtl="0">
+              <a:spcBef>
+                <a:spcPts val="0"/>
+              </a:spcBef>
+              <a:spcAft>
+                <a:spcPts val="0"/>
+              </a:spcAft>
+              <a:buClr>
+                <a:srgbClr val="3C78D8"/>
+              </a:buClr>
+              <a:buSzPts val="1600"/>
+              <a:buChar char="●"/>
+            </a:pPr>
+            <a:r>
+              <a:rPr lang="en" sz="1600" b="1">
+                <a:solidFill>
+                  <a:srgbClr val="3C78D8"/>
+                </a:solidFill>
+              </a:rPr>
+              <a:t>GPTStore.AI - 12K GPTs</a:t>
+            </a:r>
+            <a:endParaRPr sz="1600" b="1">
+              <a:solidFill>
+                <a:srgbClr val="3C78D8"/>
+              </a:solidFill>
+            </a:endParaRPr>
+          </a:p>
+          <a:p>
+            <a:pPr marL="228600" lvl="0" indent="-215900" algn="l" rtl="0">
+              <a:spcBef>
+                <a:spcPts val="0"/>
+              </a:spcBef>
+              <a:spcAft>
+                <a:spcPts val="0"/>
+              </a:spcAft>
+              <a:buClr>
+                <a:srgbClr val="3C78D8"/>
+              </a:buClr>
+              <a:buSzPts val="1600"/>
+              <a:buChar char="●"/>
+            </a:pPr>
+            <a:r>
+              <a:rPr lang="en" sz="1600" b="1">
+                <a:solidFill>
+                  <a:srgbClr val="3C78D8"/>
+                </a:solidFill>
+              </a:rPr>
+              <a:t>Mixtral paper</a:t>
+            </a:r>
+            <a:endParaRPr sz="1600" b="1">
+              <a:solidFill>
+                <a:srgbClr val="3C78D8"/>
+              </a:solidFill>
+            </a:endParaRPr>
+          </a:p>
+          <a:p>
+            <a:pPr marL="228600" lvl="0" indent="-215900" algn="l" rtl="0">
+              <a:spcBef>
+                <a:spcPts val="0"/>
+              </a:spcBef>
+              <a:spcAft>
+                <a:spcPts val="0"/>
+              </a:spcAft>
+              <a:buClr>
+                <a:srgbClr val="3C78D8"/>
+              </a:buClr>
+              <a:buSzPts val="1600"/>
+              <a:buChar char="●"/>
+            </a:pPr>
+            <a:r>
+              <a:rPr lang="en" sz="1600" b="1">
+                <a:solidFill>
+                  <a:srgbClr val="3C78D8"/>
+                </a:solidFill>
+              </a:rPr>
+              <a:t>AI at Deloitte</a:t>
+            </a:r>
+            <a:endParaRPr sz="1600" b="1">
+              <a:solidFill>
+                <a:srgbClr val="3C78D8"/>
+              </a:solidFill>
+            </a:endParaRPr>
+          </a:p>
+          <a:p>
+            <a:pPr marL="228600" lvl="0" indent="-215900" algn="l" rtl="0">
+              <a:spcBef>
+                <a:spcPts val="0"/>
+              </a:spcBef>
+              <a:spcAft>
+                <a:spcPts val="0"/>
+              </a:spcAft>
+              <a:buClr>
+                <a:srgbClr val="3C78D8"/>
+              </a:buClr>
+              <a:buSzPts val="1600"/>
+              <a:buChar char="●"/>
+            </a:pPr>
+            <a:r>
+              <a:rPr lang="en" sz="1600" b="1">
+                <a:solidFill>
+                  <a:srgbClr val="3C78D8"/>
+                </a:solidFill>
+              </a:rPr>
+              <a:t>OpenAI response to New York Times</a:t>
+            </a:r>
+            <a:endParaRPr sz="1600" b="1">
+              <a:solidFill>
+                <a:srgbClr val="3C78D8"/>
+              </a:solidFill>
+            </a:endParaRPr>
+          </a:p>
+          <a:p>
+            <a:pPr marL="228600" lvl="0" indent="-215900" algn="l" rtl="0">
+              <a:spcBef>
+                <a:spcPts val="0"/>
+              </a:spcBef>
+              <a:spcAft>
+                <a:spcPts val="0"/>
+              </a:spcAft>
+              <a:buClr>
+                <a:srgbClr val="3C78D8"/>
+              </a:buClr>
+              <a:buSzPts val="1600"/>
+              <a:buChar char="●"/>
+            </a:pPr>
+            <a:r>
+              <a:rPr lang="en" sz="1600" b="1">
+                <a:solidFill>
+                  <a:srgbClr val="3C78D8"/>
+                </a:solidFill>
+              </a:rPr>
+              <a:t>AutoGen Studio</a:t>
+            </a:r>
+            <a:endParaRPr sz="1600" b="1">
+              <a:solidFill>
+                <a:srgbClr val="3C78D8"/>
+              </a:solidFill>
+            </a:endParaRPr>
+          </a:p>
+          <a:p>
+            <a:pPr marL="228600" lvl="0" indent="-215900" algn="l" rtl="0">
+              <a:spcBef>
+                <a:spcPts val="0"/>
+              </a:spcBef>
+              <a:spcAft>
+                <a:spcPts val="0"/>
+              </a:spcAft>
+              <a:buClr>
+                <a:srgbClr val="3C78D8"/>
+              </a:buClr>
+              <a:buSzPts val="1600"/>
+              <a:buChar char="●"/>
+            </a:pPr>
+            <a:r>
+              <a:rPr lang="en" sz="1600" b="1">
+                <a:solidFill>
+                  <a:srgbClr val="3C78D8"/>
+                </a:solidFill>
+              </a:rPr>
+              <a:t>TechGPT-2.0</a:t>
+            </a:r>
+            <a:endParaRPr sz="1600" b="1">
+              <a:solidFill>
+                <a:srgbClr val="3C78D8"/>
+              </a:solidFill>
+            </a:endParaRPr>
+          </a:p>
+          <a:p>
+            <a:pPr marL="228600" lvl="0" indent="-215900" algn="l" rtl="0">
+              <a:spcBef>
+                <a:spcPts val="0"/>
+              </a:spcBef>
+              <a:spcAft>
+                <a:spcPts val="0"/>
+              </a:spcAft>
+              <a:buClr>
+                <a:srgbClr val="3C78D8"/>
+              </a:buClr>
+              <a:buSzPts val="1600"/>
+              <a:buChar char="●"/>
+            </a:pPr>
+            <a:r>
+              <a:rPr lang="en" sz="1600" b="1">
+                <a:solidFill>
+                  <a:srgbClr val="3C78D8"/>
+                </a:solidFill>
+              </a:rPr>
+              <a:t>Pennsylvania State to use OpenAI</a:t>
+            </a:r>
+            <a:endParaRPr sz="1600" b="1">
+              <a:solidFill>
+                <a:srgbClr val="3C78D8"/>
+              </a:solidFill>
+            </a:endParaRPr>
+          </a:p>
+          <a:p>
+            <a:pPr marL="228600" lvl="0" indent="-215900" algn="l" rtl="0">
+              <a:spcBef>
+                <a:spcPts val="0"/>
+              </a:spcBef>
+              <a:spcAft>
+                <a:spcPts val="0"/>
+              </a:spcAft>
+              <a:buClr>
+                <a:srgbClr val="3C78D8"/>
+              </a:buClr>
+              <a:buSzPts val="1600"/>
+              <a:buChar char="●"/>
+            </a:pPr>
+            <a:r>
+              <a:rPr lang="en" sz="1600" b="1">
+                <a:solidFill>
+                  <a:srgbClr val="3C78D8"/>
+                </a:solidFill>
+              </a:rPr>
+              <a:t>Jensen Tung - making money with AI</a:t>
+            </a:r>
+            <a:endParaRPr sz="1600" b="1">
+              <a:solidFill>
+                <a:srgbClr val="3C78D8"/>
+              </a:solidFill>
+            </a:endParaRPr>
+          </a:p>
+          <a:p>
+            <a:pPr marL="228600" lvl="0" indent="-215900" algn="l" rtl="0">
+              <a:spcBef>
+                <a:spcPts val="0"/>
+              </a:spcBef>
+              <a:spcAft>
+                <a:spcPts val="0"/>
+              </a:spcAft>
+              <a:buClr>
+                <a:srgbClr val="3C78D8"/>
+              </a:buClr>
+              <a:buSzPts val="1600"/>
+              <a:buChar char="●"/>
+            </a:pPr>
+            <a:r>
+              <a:rPr lang="en" sz="1600" b="1">
+                <a:solidFill>
+                  <a:srgbClr val="3C78D8"/>
+                </a:solidFill>
+              </a:rPr>
+              <a:t>Google open-sourced 1.6T MoE model</a:t>
+            </a:r>
+            <a:endParaRPr sz="1600" b="1">
+              <a:solidFill>
+                <a:srgbClr val="3C78D8"/>
+              </a:solidFill>
+            </a:endParaRPr>
+          </a:p>
+          <a:p>
+            <a:pPr marL="228600" lvl="0" indent="-215900" algn="l" rtl="0">
+              <a:spcBef>
+                <a:spcPts val="0"/>
+              </a:spcBef>
+              <a:spcAft>
+                <a:spcPts val="0"/>
+              </a:spcAft>
+              <a:buClr>
+                <a:srgbClr val="3C78D8"/>
+              </a:buClr>
+              <a:buSzPts val="1600"/>
+              <a:buChar char="●"/>
+            </a:pPr>
+            <a:r>
+              <a:rPr lang="en" sz="1600" b="1">
+                <a:solidFill>
+                  <a:srgbClr val="3C78D8"/>
+                </a:solidFill>
+              </a:rPr>
+              <a:t>"guidde" - generate video docs</a:t>
+            </a:r>
+            <a:endParaRPr sz="1600" b="1">
+              <a:solidFill>
+                <a:srgbClr val="3C78D8"/>
+              </a:solidFill>
+            </a:endParaRPr>
+          </a:p>
+          <a:p>
+            <a:pPr marL="228600" lvl="0" indent="-215900" algn="l" rtl="0">
+              <a:spcBef>
+                <a:spcPts val="0"/>
+              </a:spcBef>
+              <a:spcAft>
+                <a:spcPts val="0"/>
+              </a:spcAft>
+              <a:buClr>
+                <a:srgbClr val="3C78D8"/>
+              </a:buClr>
+              <a:buSzPts val="1600"/>
+              <a:buChar char="●"/>
+            </a:pPr>
+            <a:r>
+              <a:rPr lang="en" sz="1600" b="1">
+                <a:solidFill>
+                  <a:srgbClr val="3C78D8"/>
+                </a:solidFill>
+              </a:rPr>
+              <a:t>1x.tech raises 100M</a:t>
+            </a:r>
+            <a:endParaRPr sz="1600" b="1">
+              <a:solidFill>
+                <a:srgbClr val="3C78D8"/>
+              </a:solidFill>
+            </a:endParaRPr>
+          </a:p>
+        </p:txBody>
+      </p:sp>
+      <p:sp>
+        <p:nvSpPr>
+          <p:cNvPr id="68" name="Google Shape;68;p15"/>
+          <p:cNvSpPr txBox="1"/>
+          <p:nvPr/>
+        </p:nvSpPr>
+        <p:spPr>
+          <a:xfrm>
+            <a:off x="4763550" y="972453"/>
             <a:ext cx="4342500" cy="3879000"/>
           </a:xfrm>
           <a:prstGeom prst="rect">
@@ -10945,458 +11530,6 @@
                   <a:srgbClr val="3C78D8"/>
                 </a:solidFill>
               </a:rPr>
-              <a:t>Mamba Outperforms Transformers</a:t>
-            </a:r>
-            <a:endParaRPr sz="1600" b="1">
-              <a:solidFill>
-                <a:srgbClr val="3C78D8"/>
-              </a:solidFill>
-            </a:endParaRPr>
-          </a:p>
-          <a:p>
-            <a:pPr marL="228600" lvl="0" indent="-215900" algn="l" rtl="0">
-              <a:spcBef>
-                <a:spcPts val="0"/>
-              </a:spcBef>
-              <a:spcAft>
-                <a:spcPts val="0"/>
-              </a:spcAft>
-              <a:buClr>
-                <a:srgbClr val="3C78D8"/>
-              </a:buClr>
-              <a:buSzPts val="1600"/>
-              <a:buChar char="●"/>
-            </a:pPr>
-            <a:r>
-              <a:rPr lang="en" sz="1600" b="1">
-                <a:solidFill>
-                  <a:srgbClr val="3C78D8"/>
-                </a:solidFill>
-              </a:rPr>
-              <a:t>Mixtral-8x7B on a laptop</a:t>
-            </a:r>
-            <a:endParaRPr sz="1600" b="1">
-              <a:solidFill>
-                <a:srgbClr val="3C78D8"/>
-              </a:solidFill>
-            </a:endParaRPr>
-          </a:p>
-          <a:p>
-            <a:pPr marL="228600" lvl="0" indent="-215900" algn="l" rtl="0">
-              <a:spcBef>
-                <a:spcPts val="0"/>
-              </a:spcBef>
-              <a:spcAft>
-                <a:spcPts val="0"/>
-              </a:spcAft>
-              <a:buClr>
-                <a:srgbClr val="3C78D8"/>
-              </a:buClr>
-              <a:buSzPts val="1600"/>
-              <a:buChar char="●"/>
-            </a:pPr>
-            <a:r>
-              <a:rPr lang="en" sz="1600" b="1">
-                <a:solidFill>
-                  <a:srgbClr val="3C78D8"/>
-                </a:solidFill>
-              </a:rPr>
-              <a:t>deepinfra.com - Mixtral at 54 c/Mtokens </a:t>
-            </a:r>
-            <a:endParaRPr sz="1600" b="1">
-              <a:solidFill>
-                <a:srgbClr val="3C78D8"/>
-              </a:solidFill>
-            </a:endParaRPr>
-          </a:p>
-          <a:p>
-            <a:pPr marL="228600" lvl="0" indent="-215900" algn="l" rtl="0">
-              <a:spcBef>
-                <a:spcPts val="0"/>
-              </a:spcBef>
-              <a:spcAft>
-                <a:spcPts val="0"/>
-              </a:spcAft>
-              <a:buClr>
-                <a:srgbClr val="3C78D8"/>
-              </a:buClr>
-              <a:buSzPts val="1600"/>
-              <a:buChar char="●"/>
-            </a:pPr>
-            <a:r>
-              <a:rPr lang="en" sz="1600" b="1">
-                <a:solidFill>
-                  <a:srgbClr val="3C78D8"/>
-                </a:solidFill>
-              </a:rPr>
-              <a:t>Latent.Space - Four Wars of the AI Stack</a:t>
-            </a:r>
-            <a:endParaRPr sz="1600" b="1">
-              <a:solidFill>
-                <a:srgbClr val="3C78D8"/>
-              </a:solidFill>
-            </a:endParaRPr>
-          </a:p>
-          <a:p>
-            <a:pPr marL="228600" lvl="0" indent="-215900" algn="l" rtl="0">
-              <a:spcBef>
-                <a:spcPts val="0"/>
-              </a:spcBef>
-              <a:spcAft>
-                <a:spcPts val="0"/>
-              </a:spcAft>
-              <a:buClr>
-                <a:srgbClr val="3C78D8"/>
-              </a:buClr>
-              <a:buSzPts val="1600"/>
-              <a:buChar char="●"/>
-            </a:pPr>
-            <a:r>
-              <a:rPr lang="en" sz="1600" b="1">
-                <a:solidFill>
-                  <a:srgbClr val="3C78D8"/>
-                </a:solidFill>
-              </a:rPr>
-              <a:t>GPTStore.AI - 12K GPTs</a:t>
-            </a:r>
-            <a:endParaRPr sz="1600" b="1">
-              <a:solidFill>
-                <a:srgbClr val="3C78D8"/>
-              </a:solidFill>
-            </a:endParaRPr>
-          </a:p>
-          <a:p>
-            <a:pPr marL="228600" lvl="0" indent="-215900" algn="l" rtl="0">
-              <a:spcBef>
-                <a:spcPts val="0"/>
-              </a:spcBef>
-              <a:spcAft>
-                <a:spcPts val="0"/>
-              </a:spcAft>
-              <a:buClr>
-                <a:srgbClr val="3C78D8"/>
-              </a:buClr>
-              <a:buSzPts val="1600"/>
-              <a:buChar char="●"/>
-            </a:pPr>
-            <a:r>
-              <a:rPr lang="en" sz="1600" b="1">
-                <a:solidFill>
-                  <a:srgbClr val="3C78D8"/>
-                </a:solidFill>
-              </a:rPr>
-              <a:t>Mixtral paper</a:t>
-            </a:r>
-            <a:endParaRPr sz="1600" b="1">
-              <a:solidFill>
-                <a:srgbClr val="3C78D8"/>
-              </a:solidFill>
-            </a:endParaRPr>
-          </a:p>
-          <a:p>
-            <a:pPr marL="228600" lvl="0" indent="-215900" algn="l" rtl="0">
-              <a:spcBef>
-                <a:spcPts val="0"/>
-              </a:spcBef>
-              <a:spcAft>
-                <a:spcPts val="0"/>
-              </a:spcAft>
-              <a:buClr>
-                <a:srgbClr val="3C78D8"/>
-              </a:buClr>
-              <a:buSzPts val="1600"/>
-              <a:buChar char="●"/>
-            </a:pPr>
-            <a:r>
-              <a:rPr lang="en" sz="1600" b="1">
-                <a:solidFill>
-                  <a:srgbClr val="3C78D8"/>
-                </a:solidFill>
-              </a:rPr>
-              <a:t>AI at Deloitte</a:t>
-            </a:r>
-            <a:endParaRPr sz="1600" b="1">
-              <a:solidFill>
-                <a:srgbClr val="3C78D8"/>
-              </a:solidFill>
-            </a:endParaRPr>
-          </a:p>
-          <a:p>
-            <a:pPr marL="228600" lvl="0" indent="-215900" algn="l" rtl="0">
-              <a:spcBef>
-                <a:spcPts val="0"/>
-              </a:spcBef>
-              <a:spcAft>
-                <a:spcPts val="0"/>
-              </a:spcAft>
-              <a:buClr>
-                <a:srgbClr val="3C78D8"/>
-              </a:buClr>
-              <a:buSzPts val="1600"/>
-              <a:buChar char="●"/>
-            </a:pPr>
-            <a:r>
-              <a:rPr lang="en" sz="1600" b="1">
-                <a:solidFill>
-                  <a:srgbClr val="3C78D8"/>
-                </a:solidFill>
-              </a:rPr>
-              <a:t>OpenAI response to New York Times</a:t>
-            </a:r>
-            <a:endParaRPr sz="1600" b="1">
-              <a:solidFill>
-                <a:srgbClr val="3C78D8"/>
-              </a:solidFill>
-            </a:endParaRPr>
-          </a:p>
-          <a:p>
-            <a:pPr marL="228600" lvl="0" indent="-215900" algn="l" rtl="0">
-              <a:spcBef>
-                <a:spcPts val="0"/>
-              </a:spcBef>
-              <a:spcAft>
-                <a:spcPts val="0"/>
-              </a:spcAft>
-              <a:buClr>
-                <a:srgbClr val="3C78D8"/>
-              </a:buClr>
-              <a:buSzPts val="1600"/>
-              <a:buChar char="●"/>
-            </a:pPr>
-            <a:r>
-              <a:rPr lang="en" sz="1600" b="1">
-                <a:solidFill>
-                  <a:srgbClr val="3C78D8"/>
-                </a:solidFill>
-              </a:rPr>
-              <a:t>AutoGen Studio</a:t>
-            </a:r>
-            <a:endParaRPr sz="1600" b="1">
-              <a:solidFill>
-                <a:srgbClr val="3C78D8"/>
-              </a:solidFill>
-            </a:endParaRPr>
-          </a:p>
-          <a:p>
-            <a:pPr marL="228600" lvl="0" indent="-215900" algn="l" rtl="0">
-              <a:spcBef>
-                <a:spcPts val="0"/>
-              </a:spcBef>
-              <a:spcAft>
-                <a:spcPts val="0"/>
-              </a:spcAft>
-              <a:buClr>
-                <a:srgbClr val="3C78D8"/>
-              </a:buClr>
-              <a:buSzPts val="1600"/>
-              <a:buChar char="●"/>
-            </a:pPr>
-            <a:r>
-              <a:rPr lang="en" sz="1600" b="1">
-                <a:solidFill>
-                  <a:srgbClr val="3C78D8"/>
-                </a:solidFill>
-              </a:rPr>
-              <a:t>TechGPT-2.0</a:t>
-            </a:r>
-            <a:endParaRPr sz="1600" b="1">
-              <a:solidFill>
-                <a:srgbClr val="3C78D8"/>
-              </a:solidFill>
-            </a:endParaRPr>
-          </a:p>
-          <a:p>
-            <a:pPr marL="228600" lvl="0" indent="-215900" algn="l" rtl="0">
-              <a:spcBef>
-                <a:spcPts val="0"/>
-              </a:spcBef>
-              <a:spcAft>
-                <a:spcPts val="0"/>
-              </a:spcAft>
-              <a:buClr>
-                <a:srgbClr val="3C78D8"/>
-              </a:buClr>
-              <a:buSzPts val="1600"/>
-              <a:buChar char="●"/>
-            </a:pPr>
-            <a:r>
-              <a:rPr lang="en" sz="1600" b="1">
-                <a:solidFill>
-                  <a:srgbClr val="3C78D8"/>
-                </a:solidFill>
-              </a:rPr>
-              <a:t>Pennsylvania State to use OpenAI</a:t>
-            </a:r>
-            <a:endParaRPr sz="1600" b="1">
-              <a:solidFill>
-                <a:srgbClr val="3C78D8"/>
-              </a:solidFill>
-            </a:endParaRPr>
-          </a:p>
-          <a:p>
-            <a:pPr marL="228600" lvl="0" indent="-215900" algn="l" rtl="0">
-              <a:spcBef>
-                <a:spcPts val="0"/>
-              </a:spcBef>
-              <a:spcAft>
-                <a:spcPts val="0"/>
-              </a:spcAft>
-              <a:buClr>
-                <a:srgbClr val="3C78D8"/>
-              </a:buClr>
-              <a:buSzPts val="1600"/>
-              <a:buChar char="●"/>
-            </a:pPr>
-            <a:r>
-              <a:rPr lang="en" sz="1600" b="1">
-                <a:solidFill>
-                  <a:srgbClr val="3C78D8"/>
-                </a:solidFill>
-              </a:rPr>
-              <a:t>Jensen Tung - making money with AI</a:t>
-            </a:r>
-            <a:endParaRPr sz="1600" b="1">
-              <a:solidFill>
-                <a:srgbClr val="3C78D8"/>
-              </a:solidFill>
-            </a:endParaRPr>
-          </a:p>
-          <a:p>
-            <a:pPr marL="228600" lvl="0" indent="-215900" algn="l" rtl="0">
-              <a:spcBef>
-                <a:spcPts val="0"/>
-              </a:spcBef>
-              <a:spcAft>
-                <a:spcPts val="0"/>
-              </a:spcAft>
-              <a:buClr>
-                <a:srgbClr val="3C78D8"/>
-              </a:buClr>
-              <a:buSzPts val="1600"/>
-              <a:buChar char="●"/>
-            </a:pPr>
-            <a:r>
-              <a:rPr lang="en" sz="1600" b="1">
-                <a:solidFill>
-                  <a:srgbClr val="3C78D8"/>
-                </a:solidFill>
-              </a:rPr>
-              <a:t>Google open-sourced 1.6T MoE model</a:t>
-            </a:r>
-            <a:endParaRPr sz="1600" b="1">
-              <a:solidFill>
-                <a:srgbClr val="3C78D8"/>
-              </a:solidFill>
-            </a:endParaRPr>
-          </a:p>
-          <a:p>
-            <a:pPr marL="228600" lvl="0" indent="-215900" algn="l" rtl="0">
-              <a:spcBef>
-                <a:spcPts val="0"/>
-              </a:spcBef>
-              <a:spcAft>
-                <a:spcPts val="0"/>
-              </a:spcAft>
-              <a:buClr>
-                <a:srgbClr val="3C78D8"/>
-              </a:buClr>
-              <a:buSzPts val="1600"/>
-              <a:buChar char="●"/>
-            </a:pPr>
-            <a:r>
-              <a:rPr lang="en" sz="1600" b="1">
-                <a:solidFill>
-                  <a:srgbClr val="3C78D8"/>
-                </a:solidFill>
-              </a:rPr>
-              <a:t>"guidde" - generate video docs</a:t>
-            </a:r>
-            <a:endParaRPr sz="1600" b="1">
-              <a:solidFill>
-                <a:srgbClr val="3C78D8"/>
-              </a:solidFill>
-            </a:endParaRPr>
-          </a:p>
-          <a:p>
-            <a:pPr marL="228600" lvl="0" indent="-215900" algn="l" rtl="0">
-              <a:spcBef>
-                <a:spcPts val="0"/>
-              </a:spcBef>
-              <a:spcAft>
-                <a:spcPts val="0"/>
-              </a:spcAft>
-              <a:buClr>
-                <a:srgbClr val="3C78D8"/>
-              </a:buClr>
-              <a:buSzPts val="1600"/>
-              <a:buChar char="●"/>
-            </a:pPr>
-            <a:r>
-              <a:rPr lang="en" sz="1600" b="1">
-                <a:solidFill>
-                  <a:srgbClr val="3C78D8"/>
-                </a:solidFill>
-              </a:rPr>
-              <a:t>1x.tech raises 100M</a:t>
-            </a:r>
-            <a:endParaRPr sz="1600" b="1">
-              <a:solidFill>
-                <a:srgbClr val="3C78D8"/>
-              </a:solidFill>
-            </a:endParaRPr>
-          </a:p>
-        </p:txBody>
-      </p:sp>
-      <p:sp>
-        <p:nvSpPr>
-          <p:cNvPr id="68" name="Google Shape;68;p15"/>
-          <p:cNvSpPr txBox="1"/>
-          <p:nvPr/>
-        </p:nvSpPr>
-        <p:spPr>
-          <a:xfrm>
-            <a:off x="4763550" y="1048653"/>
-            <a:ext cx="4342500" cy="3879000"/>
-          </a:xfrm>
-          <a:prstGeom prst="rect">
-            <a:avLst/>
-          </a:prstGeom>
-          <a:noFill/>
-          <a:ln w="9525" cap="flat" cmpd="sng">
-            <a:solidFill>
-              <a:srgbClr val="FF0000"/>
-            </a:solidFill>
-            <a:prstDash val="solid"/>
-            <a:round/>
-            <a:headEnd type="none" w="sm" len="sm"/>
-            <a:tailEnd type="none" w="sm" len="sm"/>
-          </a:ln>
-        </p:spPr>
-        <p:txBody>
-          <a:bodyPr spcFirstLastPara="1" wrap="square" lIns="91425" tIns="91425" rIns="91425" bIns="91425" anchor="t" anchorCtr="0">
-            <a:spAutoFit/>
-          </a:bodyPr>
-          <a:lstStyle/>
-          <a:p>
-            <a:pPr marL="228600" lvl="0" indent="-215900" algn="l" rtl="0">
-              <a:spcBef>
-                <a:spcPts val="0"/>
-              </a:spcBef>
-              <a:spcAft>
-                <a:spcPts val="0"/>
-              </a:spcAft>
-              <a:buClr>
-                <a:srgbClr val="3C78D8"/>
-              </a:buClr>
-              <a:buSzPts val="1600"/>
-              <a:buChar char="●"/>
-            </a:pPr>
-            <a:r>
-              <a:rPr lang="en" sz="1600" b="1">
-                <a:solidFill>
-                  <a:srgbClr val="3C78D8"/>
-                </a:solidFill>
-              </a:rPr>
               <a:t>Local PDF question answering</a:t>
             </a:r>
             <a:endParaRPr sz="1600" b="1">
@@ -11812,7 +11945,7 @@
   <p:cSld>
     <p:spTree>
       <p:nvGrpSpPr>
-        <p:cNvPr id="1" name="Shape 160"/>
+        <p:cNvPr id="1" name="Shape 152"/>
         <p:cNvGrpSpPr/>
         <p:nvPr/>
       </p:nvGrpSpPr>
@@ -11826,7 +11959,7 @@
       </p:grpSpPr>
       <p:sp>
         <p:nvSpPr>
-          <p:cNvPr id="161" name="Google Shape;161;p24"/>
+          <p:cNvPr id="153" name="Google Shape;153;p24"/>
           <p:cNvSpPr txBox="1"/>
           <p:nvPr/>
         </p:nvSpPr>
@@ -11868,7 +12001,7 @@
                 <a:cs typeface="Calibri"/>
                 <a:sym typeface="Calibri"/>
               </a:rPr>
-              <a:t>Misc - 3</a:t>
+              <a:t>Misc - 2</a:t>
             </a:r>
             <a:endParaRPr sz="2000" b="1">
               <a:latin typeface="Calibri"/>
@@ -11881,7 +12014,1057 @@
       </p:sp>
       <p:sp>
         <p:nvSpPr>
+          <p:cNvPr id="154" name="Google Shape;154;p24"/>
+          <p:cNvSpPr txBox="1"/>
+          <p:nvPr/>
+        </p:nvSpPr>
+        <p:spPr>
+          <a:xfrm>
+            <a:off x="165975" y="448225"/>
+            <a:ext cx="1935900" cy="661800"/>
+          </a:xfrm>
+          <a:prstGeom prst="rect">
+            <a:avLst/>
+          </a:prstGeom>
+          <a:solidFill>
+            <a:srgbClr val="FFF2CC"/>
+          </a:solidFill>
+          <a:ln w="9525" cap="flat" cmpd="sng">
+            <a:solidFill>
+              <a:srgbClr val="FF0000"/>
+            </a:solidFill>
+            <a:prstDash val="solid"/>
+            <a:round/>
+            <a:headEnd type="none" w="sm" len="sm"/>
+            <a:tailEnd type="none" w="sm" len="sm"/>
+          </a:ln>
+        </p:spPr>
+        <p:txBody>
+          <a:bodyPr spcFirstLastPara="1" wrap="square" lIns="91425" tIns="91425" rIns="91425" bIns="91425" anchor="t" anchorCtr="0">
+            <a:spAutoFit/>
+          </a:bodyPr>
+          <a:lstStyle/>
+          <a:p>
+            <a:pPr marL="0" lvl="0" indent="0" algn="l" rtl="0">
+              <a:spcBef>
+                <a:spcPts val="0"/>
+              </a:spcBef>
+              <a:spcAft>
+                <a:spcPts val="0"/>
+              </a:spcAft>
+              <a:buNone/>
+            </a:pPr>
+            <a:r>
+              <a:rPr lang="en" sz="1300">
+                <a:solidFill>
+                  <a:srgbClr val="0F0F0F"/>
+                </a:solidFill>
+                <a:latin typeface="Calibri"/>
+                <a:ea typeface="Calibri"/>
+                <a:cs typeface="Calibri"/>
+                <a:sym typeface="Calibri"/>
+              </a:rPr>
+              <a:t>AutoGen Studio</a:t>
+            </a:r>
+            <a:endParaRPr sz="1300">
+              <a:solidFill>
+                <a:srgbClr val="0F0F0F"/>
+              </a:solidFill>
+              <a:latin typeface="Calibri"/>
+              <a:ea typeface="Calibri"/>
+              <a:cs typeface="Calibri"/>
+              <a:sym typeface="Calibri"/>
+            </a:endParaRPr>
+          </a:p>
+          <a:p>
+            <a:pPr marL="0" lvl="0" indent="0" algn="l" rtl="0">
+              <a:spcBef>
+                <a:spcPts val="0"/>
+              </a:spcBef>
+              <a:spcAft>
+                <a:spcPts val="0"/>
+              </a:spcAft>
+              <a:buNone/>
+            </a:pPr>
+            <a:r>
+              <a:rPr lang="en" sz="900" u="sng">
+                <a:solidFill>
+                  <a:schemeClr val="hlink"/>
+                </a:solidFill>
+                <a:latin typeface="Calibri"/>
+                <a:ea typeface="Calibri"/>
+                <a:cs typeface="Calibri"/>
+                <a:sym typeface="Calibri"/>
+                <a:hlinkClick r:id="rId3"/>
+              </a:rPr>
+              <a:t>https://microsoft.github.io/autogen/blog/2023/12/01/AutoGenStudio/</a:t>
+            </a:r>
+            <a:endParaRPr sz="1200">
+              <a:solidFill>
+                <a:srgbClr val="0F0F0F"/>
+              </a:solidFill>
+              <a:latin typeface="Calibri"/>
+              <a:ea typeface="Calibri"/>
+              <a:cs typeface="Calibri"/>
+              <a:sym typeface="Calibri"/>
+            </a:endParaRPr>
+          </a:p>
+        </p:txBody>
+      </p:sp>
+      <p:sp>
+        <p:nvSpPr>
+          <p:cNvPr id="155" name="Google Shape;155;p24"/>
+          <p:cNvSpPr txBox="1"/>
+          <p:nvPr/>
+        </p:nvSpPr>
+        <p:spPr>
+          <a:xfrm>
+            <a:off x="6826100" y="59500"/>
+            <a:ext cx="2230500" cy="892800"/>
+          </a:xfrm>
+          <a:prstGeom prst="rect">
+            <a:avLst/>
+          </a:prstGeom>
+          <a:solidFill>
+            <a:srgbClr val="FFF2CC"/>
+          </a:solidFill>
+          <a:ln w="9525" cap="flat" cmpd="sng">
+            <a:solidFill>
+              <a:srgbClr val="FF0000"/>
+            </a:solidFill>
+            <a:prstDash val="solid"/>
+            <a:round/>
+            <a:headEnd type="none" w="sm" len="sm"/>
+            <a:tailEnd type="none" w="sm" len="sm"/>
+          </a:ln>
+        </p:spPr>
+        <p:txBody>
+          <a:bodyPr spcFirstLastPara="1" wrap="square" lIns="91425" tIns="91425" rIns="91425" bIns="91425" anchor="t" anchorCtr="0">
+            <a:spAutoFit/>
+          </a:bodyPr>
+          <a:lstStyle/>
+          <a:p>
+            <a:pPr marL="0" lvl="0" indent="0" algn="l" rtl="0">
+              <a:spcBef>
+                <a:spcPts val="0"/>
+              </a:spcBef>
+              <a:spcAft>
+                <a:spcPts val="0"/>
+              </a:spcAft>
+              <a:buNone/>
+            </a:pPr>
+            <a:r>
+              <a:rPr lang="en" sz="1300">
+                <a:solidFill>
+                  <a:srgbClr val="0F0F0F"/>
+                </a:solidFill>
+                <a:latin typeface="Calibri"/>
+                <a:ea typeface="Calibri"/>
+                <a:cs typeface="Calibri"/>
+                <a:sym typeface="Calibri"/>
+              </a:rPr>
+              <a:t>TechGPT-2.0: A LLM for knowledge graph construction</a:t>
+            </a:r>
+            <a:endParaRPr sz="1300">
+              <a:solidFill>
+                <a:srgbClr val="0F0F0F"/>
+              </a:solidFill>
+              <a:latin typeface="Calibri"/>
+              <a:ea typeface="Calibri"/>
+              <a:cs typeface="Calibri"/>
+              <a:sym typeface="Calibri"/>
+            </a:endParaRPr>
+          </a:p>
+          <a:p>
+            <a:pPr marL="0" lvl="0" indent="0" algn="l" rtl="0">
+              <a:spcBef>
+                <a:spcPts val="0"/>
+              </a:spcBef>
+              <a:spcAft>
+                <a:spcPts val="0"/>
+              </a:spcAft>
+              <a:buNone/>
+            </a:pPr>
+            <a:r>
+              <a:rPr lang="en" sz="1000" u="sng">
+                <a:solidFill>
+                  <a:schemeClr val="hlink"/>
+                </a:solidFill>
+                <a:latin typeface="Calibri"/>
+                <a:ea typeface="Calibri"/>
+                <a:cs typeface="Calibri"/>
+                <a:sym typeface="Calibri"/>
+                <a:hlinkClick r:id="rId4"/>
+              </a:rPr>
+              <a:t>https://arxiv.org/abs/2401.04507v1</a:t>
+            </a:r>
+            <a:r>
+              <a:rPr lang="en" sz="1000">
+                <a:solidFill>
+                  <a:srgbClr val="0F0F0F"/>
+                </a:solidFill>
+                <a:latin typeface="Calibri"/>
+                <a:ea typeface="Calibri"/>
+                <a:cs typeface="Calibri"/>
+                <a:sym typeface="Calibri"/>
+              </a:rPr>
+              <a:t> </a:t>
+            </a:r>
+            <a:endParaRPr sz="1000">
+              <a:solidFill>
+                <a:srgbClr val="0F0F0F"/>
+              </a:solidFill>
+              <a:latin typeface="Calibri"/>
+              <a:ea typeface="Calibri"/>
+              <a:cs typeface="Calibri"/>
+              <a:sym typeface="Calibri"/>
+            </a:endParaRPr>
+          </a:p>
+          <a:p>
+            <a:pPr marL="0" lvl="0" indent="0" algn="l" rtl="0">
+              <a:spcBef>
+                <a:spcPts val="0"/>
+              </a:spcBef>
+              <a:spcAft>
+                <a:spcPts val="0"/>
+              </a:spcAft>
+              <a:buNone/>
+            </a:pPr>
+            <a:r>
+              <a:rPr lang="en" sz="1000" u="sng">
+                <a:solidFill>
+                  <a:schemeClr val="hlink"/>
+                </a:solidFill>
+                <a:latin typeface="Calibri"/>
+                <a:ea typeface="Calibri"/>
+                <a:cs typeface="Calibri"/>
+                <a:sym typeface="Calibri"/>
+                <a:hlinkClick r:id="rId5"/>
+              </a:rPr>
+              <a:t>https://github.com/neukg/TechGPT-2.0</a:t>
+            </a:r>
+            <a:r>
+              <a:rPr lang="en" sz="1000">
+                <a:solidFill>
+                  <a:srgbClr val="0F0F0F"/>
+                </a:solidFill>
+                <a:latin typeface="Calibri"/>
+                <a:ea typeface="Calibri"/>
+                <a:cs typeface="Calibri"/>
+                <a:sym typeface="Calibri"/>
+              </a:rPr>
+              <a:t> </a:t>
+            </a:r>
+            <a:endParaRPr sz="1000">
+              <a:solidFill>
+                <a:srgbClr val="0F0F0F"/>
+              </a:solidFill>
+              <a:latin typeface="Calibri"/>
+              <a:ea typeface="Calibri"/>
+              <a:cs typeface="Calibri"/>
+              <a:sym typeface="Calibri"/>
+            </a:endParaRPr>
+          </a:p>
+        </p:txBody>
+      </p:sp>
+      <p:sp>
+        <p:nvSpPr>
+          <p:cNvPr id="156" name="Google Shape;156;p24"/>
+          <p:cNvSpPr txBox="1"/>
+          <p:nvPr/>
+        </p:nvSpPr>
+        <p:spPr>
+          <a:xfrm>
+            <a:off x="2468650" y="59500"/>
+            <a:ext cx="2443800" cy="1293000"/>
+          </a:xfrm>
+          <a:prstGeom prst="rect">
+            <a:avLst/>
+          </a:prstGeom>
+          <a:solidFill>
+            <a:srgbClr val="FFF2CC"/>
+          </a:solidFill>
+          <a:ln w="9525" cap="flat" cmpd="sng">
+            <a:solidFill>
+              <a:srgbClr val="FF0000"/>
+            </a:solidFill>
+            <a:prstDash val="solid"/>
+            <a:round/>
+            <a:headEnd type="none" w="sm" len="sm"/>
+            <a:tailEnd type="none" w="sm" len="sm"/>
+          </a:ln>
+        </p:spPr>
+        <p:txBody>
+          <a:bodyPr spcFirstLastPara="1" wrap="square" lIns="91425" tIns="91425" rIns="91425" bIns="91425" anchor="t" anchorCtr="0">
+            <a:spAutoFit/>
+          </a:bodyPr>
+          <a:lstStyle/>
+          <a:p>
+            <a:pPr marL="0" lvl="0" indent="0" algn="l" rtl="0">
+              <a:spcBef>
+                <a:spcPts val="0"/>
+              </a:spcBef>
+              <a:spcAft>
+                <a:spcPts val="0"/>
+              </a:spcAft>
+              <a:buNone/>
+            </a:pPr>
+            <a:r>
+              <a:rPr lang="en" sz="1300">
+                <a:solidFill>
+                  <a:srgbClr val="0F0F0F"/>
+                </a:solidFill>
+                <a:latin typeface="Calibri"/>
+                <a:ea typeface="Calibri"/>
+                <a:cs typeface="Calibri"/>
+                <a:sym typeface="Calibri"/>
+              </a:rPr>
+              <a:t>Not a single commercial LLM can sort the list of ~100 references according to the last name of the first author</a:t>
+            </a:r>
+            <a:endParaRPr sz="1300">
+              <a:solidFill>
+                <a:srgbClr val="0F0F0F"/>
+              </a:solidFill>
+              <a:latin typeface="Calibri"/>
+              <a:ea typeface="Calibri"/>
+              <a:cs typeface="Calibri"/>
+              <a:sym typeface="Calibri"/>
+            </a:endParaRPr>
+          </a:p>
+          <a:p>
+            <a:pPr marL="0" lvl="0" indent="0" algn="l" rtl="0">
+              <a:spcBef>
+                <a:spcPts val="0"/>
+              </a:spcBef>
+              <a:spcAft>
+                <a:spcPts val="0"/>
+              </a:spcAft>
+              <a:buNone/>
+            </a:pPr>
+            <a:r>
+              <a:rPr lang="en" sz="1000" u="sng">
+                <a:solidFill>
+                  <a:schemeClr val="hlink"/>
+                </a:solidFill>
+                <a:latin typeface="Calibri"/>
+                <a:ea typeface="Calibri"/>
+                <a:cs typeface="Calibri"/>
+                <a:sym typeface="Calibri"/>
+                <a:hlinkClick r:id="rId6"/>
+              </a:rPr>
+              <a:t>https://twitter.com/kchonyc/status/1745151497258872989</a:t>
+            </a:r>
+            <a:r>
+              <a:rPr lang="en" sz="1000">
+                <a:solidFill>
+                  <a:srgbClr val="0F0F0F"/>
+                </a:solidFill>
+                <a:latin typeface="Calibri"/>
+                <a:ea typeface="Calibri"/>
+                <a:cs typeface="Calibri"/>
+                <a:sym typeface="Calibri"/>
+              </a:rPr>
+              <a:t> </a:t>
+            </a:r>
+            <a:endParaRPr sz="1000">
+              <a:solidFill>
+                <a:srgbClr val="0F0F0F"/>
+              </a:solidFill>
+              <a:latin typeface="Calibri"/>
+              <a:ea typeface="Calibri"/>
+              <a:cs typeface="Calibri"/>
+              <a:sym typeface="Calibri"/>
+            </a:endParaRPr>
+          </a:p>
+        </p:txBody>
+      </p:sp>
+      <p:sp>
+        <p:nvSpPr>
+          <p:cNvPr id="157" name="Google Shape;157;p24"/>
+          <p:cNvSpPr txBox="1"/>
+          <p:nvPr/>
+        </p:nvSpPr>
+        <p:spPr>
+          <a:xfrm>
+            <a:off x="5472800" y="1775925"/>
+            <a:ext cx="3583800" cy="1493100"/>
+          </a:xfrm>
+          <a:prstGeom prst="rect">
+            <a:avLst/>
+          </a:prstGeom>
+          <a:solidFill>
+            <a:srgbClr val="FFF2CC"/>
+          </a:solidFill>
+          <a:ln w="9525" cap="flat" cmpd="sng">
+            <a:solidFill>
+              <a:srgbClr val="FF0000"/>
+            </a:solidFill>
+            <a:prstDash val="solid"/>
+            <a:round/>
+            <a:headEnd type="none" w="sm" len="sm"/>
+            <a:tailEnd type="none" w="sm" len="sm"/>
+          </a:ln>
+        </p:spPr>
+        <p:txBody>
+          <a:bodyPr spcFirstLastPara="1" wrap="square" lIns="91425" tIns="91425" rIns="91425" bIns="91425" anchor="t" anchorCtr="0">
+            <a:spAutoFit/>
+          </a:bodyPr>
+          <a:lstStyle/>
+          <a:p>
+            <a:pPr marL="0" lvl="0" indent="0" algn="l" rtl="0">
+              <a:spcBef>
+                <a:spcPts val="0"/>
+              </a:spcBef>
+              <a:spcAft>
+                <a:spcPts val="0"/>
+              </a:spcAft>
+              <a:buNone/>
+            </a:pPr>
+            <a:r>
+              <a:rPr lang="en" sz="1300">
+                <a:solidFill>
+                  <a:srgbClr val="0F0F0F"/>
+                </a:solidFill>
+                <a:latin typeface="Calibri"/>
+                <a:ea typeface="Calibri"/>
+                <a:cs typeface="Calibri"/>
+                <a:sym typeface="Calibri"/>
+              </a:rPr>
+              <a:t>Importance of proper prompting: Depending on the format used in few-shot prompting, you may get accuracies:</a:t>
+            </a:r>
+            <a:endParaRPr sz="1300">
+              <a:solidFill>
+                <a:srgbClr val="0F0F0F"/>
+              </a:solidFill>
+              <a:latin typeface="Calibri"/>
+              <a:ea typeface="Calibri"/>
+              <a:cs typeface="Calibri"/>
+              <a:sym typeface="Calibri"/>
+            </a:endParaRPr>
+          </a:p>
+          <a:p>
+            <a:pPr marL="228600" lvl="0" indent="-196850" algn="l" rtl="0">
+              <a:spcBef>
+                <a:spcPts val="0"/>
+              </a:spcBef>
+              <a:spcAft>
+                <a:spcPts val="0"/>
+              </a:spcAft>
+              <a:buSzPts val="1300"/>
+              <a:buFont typeface="Calibri"/>
+              <a:buChar char="●"/>
+            </a:pPr>
+            <a:r>
+              <a:rPr lang="en" sz="1300">
+                <a:solidFill>
+                  <a:srgbClr val="FF0000"/>
+                </a:solidFill>
+                <a:latin typeface="Calibri"/>
+                <a:ea typeface="Calibri"/>
+                <a:cs typeface="Calibri"/>
+                <a:sym typeface="Calibri"/>
+              </a:rPr>
+              <a:t>4%-88%</a:t>
+            </a:r>
+            <a:r>
+              <a:rPr lang="en" sz="1300">
+                <a:solidFill>
+                  <a:srgbClr val="0F0F0F"/>
+                </a:solidFill>
+                <a:latin typeface="Calibri"/>
+                <a:ea typeface="Calibri"/>
+                <a:cs typeface="Calibri"/>
+                <a:sym typeface="Calibri"/>
+              </a:rPr>
+              <a:t> with LLaMA-2-70B 5-shot</a:t>
+            </a:r>
+            <a:endParaRPr sz="1300">
+              <a:solidFill>
+                <a:srgbClr val="0F0F0F"/>
+              </a:solidFill>
+              <a:latin typeface="Calibri"/>
+              <a:ea typeface="Calibri"/>
+              <a:cs typeface="Calibri"/>
+              <a:sym typeface="Calibri"/>
+            </a:endParaRPr>
+          </a:p>
+          <a:p>
+            <a:pPr marL="228600" lvl="0" indent="-196850" algn="l" rtl="0">
+              <a:spcBef>
+                <a:spcPts val="0"/>
+              </a:spcBef>
+              <a:spcAft>
+                <a:spcPts val="0"/>
+              </a:spcAft>
+              <a:buSzPts val="1300"/>
+              <a:buFont typeface="Calibri"/>
+              <a:buChar char="●"/>
+            </a:pPr>
+            <a:r>
+              <a:rPr lang="en" sz="1300">
+                <a:solidFill>
+                  <a:srgbClr val="FF0000"/>
+                </a:solidFill>
+                <a:latin typeface="Calibri"/>
+                <a:ea typeface="Calibri"/>
+                <a:cs typeface="Calibri"/>
+                <a:sym typeface="Calibri"/>
+              </a:rPr>
+              <a:t>47%-85%</a:t>
+            </a:r>
+            <a:r>
+              <a:rPr lang="en" sz="1300">
+                <a:solidFill>
+                  <a:srgbClr val="0F0F0F"/>
+                </a:solidFill>
+                <a:latin typeface="Calibri"/>
+                <a:ea typeface="Calibri"/>
+                <a:cs typeface="Calibri"/>
+                <a:sym typeface="Calibri"/>
+              </a:rPr>
+              <a:t> w/GPT3.5</a:t>
+            </a:r>
+            <a:endParaRPr sz="1300">
+              <a:solidFill>
+                <a:srgbClr val="0F0F0F"/>
+              </a:solidFill>
+              <a:latin typeface="Calibri"/>
+              <a:ea typeface="Calibri"/>
+              <a:cs typeface="Calibri"/>
+              <a:sym typeface="Calibri"/>
+            </a:endParaRPr>
+          </a:p>
+          <a:p>
+            <a:pPr marL="0" lvl="0" indent="0" algn="l" rtl="0">
+              <a:spcBef>
+                <a:spcPts val="0"/>
+              </a:spcBef>
+              <a:spcAft>
+                <a:spcPts val="0"/>
+              </a:spcAft>
+              <a:buNone/>
+            </a:pPr>
+            <a:r>
+              <a:rPr lang="en" sz="1000" u="sng">
+                <a:solidFill>
+                  <a:schemeClr val="hlink"/>
+                </a:solidFill>
+                <a:latin typeface="Calibri"/>
+                <a:ea typeface="Calibri"/>
+                <a:cs typeface="Calibri"/>
+                <a:sym typeface="Calibri"/>
+                <a:hlinkClick r:id="rId7"/>
+              </a:rPr>
+              <a:t>https://twitter.com/melaniesclar/status/1745557109419458695</a:t>
+            </a:r>
+            <a:r>
+              <a:rPr lang="en" sz="1000">
+                <a:solidFill>
+                  <a:srgbClr val="0F0F0F"/>
+                </a:solidFill>
+                <a:latin typeface="Calibri"/>
+                <a:ea typeface="Calibri"/>
+                <a:cs typeface="Calibri"/>
+                <a:sym typeface="Calibri"/>
+              </a:rPr>
+              <a:t> </a:t>
+            </a:r>
+            <a:endParaRPr sz="1000">
+              <a:solidFill>
+                <a:srgbClr val="0F0F0F"/>
+              </a:solidFill>
+              <a:latin typeface="Calibri"/>
+              <a:ea typeface="Calibri"/>
+              <a:cs typeface="Calibri"/>
+              <a:sym typeface="Calibri"/>
+            </a:endParaRPr>
+          </a:p>
+          <a:p>
+            <a:pPr marL="0" lvl="0" indent="0" algn="l" rtl="0">
+              <a:spcBef>
+                <a:spcPts val="0"/>
+              </a:spcBef>
+              <a:spcAft>
+                <a:spcPts val="0"/>
+              </a:spcAft>
+              <a:buNone/>
+            </a:pPr>
+            <a:r>
+              <a:rPr lang="en" sz="1000" u="sng">
+                <a:solidFill>
+                  <a:schemeClr val="hlink"/>
+                </a:solidFill>
+                <a:latin typeface="Calibri"/>
+                <a:ea typeface="Calibri"/>
+                <a:cs typeface="Calibri"/>
+                <a:sym typeface="Calibri"/>
+                <a:hlinkClick r:id="rId8"/>
+              </a:rPr>
+              <a:t>https://arxiv.org/abs/2310.11324</a:t>
+            </a:r>
+            <a:r>
+              <a:rPr lang="en" sz="1000">
+                <a:solidFill>
+                  <a:srgbClr val="0F0F0F"/>
+                </a:solidFill>
+                <a:latin typeface="Calibri"/>
+                <a:ea typeface="Calibri"/>
+                <a:cs typeface="Calibri"/>
+                <a:sym typeface="Calibri"/>
+              </a:rPr>
+              <a:t> </a:t>
+            </a:r>
+            <a:endParaRPr sz="1000">
+              <a:solidFill>
+                <a:srgbClr val="0F0F0F"/>
+              </a:solidFill>
+              <a:latin typeface="Calibri"/>
+              <a:ea typeface="Calibri"/>
+              <a:cs typeface="Calibri"/>
+              <a:sym typeface="Calibri"/>
+            </a:endParaRPr>
+          </a:p>
+        </p:txBody>
+      </p:sp>
+      <p:sp>
+        <p:nvSpPr>
+          <p:cNvPr id="158" name="Google Shape;158;p24"/>
+          <p:cNvSpPr txBox="1"/>
+          <p:nvPr/>
+        </p:nvSpPr>
+        <p:spPr>
+          <a:xfrm>
+            <a:off x="165975" y="2666325"/>
+            <a:ext cx="4321500" cy="1293000"/>
+          </a:xfrm>
+          <a:prstGeom prst="rect">
+            <a:avLst/>
+          </a:prstGeom>
+          <a:solidFill>
+            <a:srgbClr val="FFF2CC"/>
+          </a:solidFill>
+          <a:ln w="9525" cap="flat" cmpd="sng">
+            <a:solidFill>
+              <a:srgbClr val="FF0000"/>
+            </a:solidFill>
+            <a:prstDash val="solid"/>
+            <a:round/>
+            <a:headEnd type="none" w="sm" len="sm"/>
+            <a:tailEnd type="none" w="sm" len="sm"/>
+          </a:ln>
+        </p:spPr>
+        <p:txBody>
+          <a:bodyPr spcFirstLastPara="1" wrap="square" lIns="91425" tIns="91425" rIns="91425" bIns="91425" anchor="t" anchorCtr="0">
+            <a:spAutoFit/>
+          </a:bodyPr>
+          <a:lstStyle/>
+          <a:p>
+            <a:pPr marL="0" lvl="0" indent="0" algn="l" rtl="0">
+              <a:spcBef>
+                <a:spcPts val="0"/>
+              </a:spcBef>
+              <a:spcAft>
+                <a:spcPts val="0"/>
+              </a:spcAft>
+              <a:buNone/>
+            </a:pPr>
+            <a:r>
+              <a:rPr lang="en" sz="1300">
+                <a:solidFill>
+                  <a:srgbClr val="0F0F0F"/>
+                </a:solidFill>
+                <a:latin typeface="Calibri"/>
+                <a:ea typeface="Calibri"/>
+                <a:cs typeface="Calibri"/>
+                <a:sym typeface="Calibri"/>
+              </a:rPr>
+              <a:t>Pennsylvania State started a collaboration with OpenAI. State employees will use </a:t>
+            </a:r>
+            <a:r>
+              <a:rPr lang="en" sz="1300" b="1">
+                <a:solidFill>
+                  <a:srgbClr val="FF0000"/>
+                </a:solidFill>
+                <a:latin typeface="Calibri"/>
+                <a:ea typeface="Calibri"/>
+                <a:cs typeface="Calibri"/>
+                <a:sym typeface="Calibri"/>
+              </a:rPr>
+              <a:t>ChatGPT Enterprise</a:t>
+            </a:r>
+            <a:r>
+              <a:rPr lang="en" sz="1300">
+                <a:solidFill>
+                  <a:srgbClr val="0F0F0F"/>
+                </a:solidFill>
+                <a:latin typeface="Calibri"/>
+                <a:ea typeface="Calibri"/>
+                <a:cs typeface="Calibri"/>
+                <a:sym typeface="Calibri"/>
+              </a:rPr>
+              <a:t> to assist in various tasks such as creating and editing copy, updating policy language, drafting job descriptions, and generating code. </a:t>
+            </a:r>
+            <a:endParaRPr sz="1300">
+              <a:solidFill>
+                <a:srgbClr val="0F0F0F"/>
+              </a:solidFill>
+              <a:latin typeface="Calibri"/>
+              <a:ea typeface="Calibri"/>
+              <a:cs typeface="Calibri"/>
+              <a:sym typeface="Calibri"/>
+            </a:endParaRPr>
+          </a:p>
+          <a:p>
+            <a:pPr marL="0" lvl="0" indent="0" algn="l" rtl="0">
+              <a:spcBef>
+                <a:spcPts val="0"/>
+              </a:spcBef>
+              <a:spcAft>
+                <a:spcPts val="0"/>
+              </a:spcAft>
+              <a:buNone/>
+            </a:pPr>
+            <a:r>
+              <a:rPr lang="en" sz="1000" u="sng">
+                <a:solidFill>
+                  <a:schemeClr val="hlink"/>
+                </a:solidFill>
+                <a:latin typeface="Calibri"/>
+                <a:ea typeface="Calibri"/>
+                <a:cs typeface="Calibri"/>
+                <a:sym typeface="Calibri"/>
+                <a:hlinkClick r:id="rId9"/>
+              </a:rPr>
+              <a:t>https://www.governor.pa.gov/newsroom/shapiro-administration-and-openai-launch-first-in-the-nation-generative-ai-pilot-for-commonwealth-employees/</a:t>
+            </a:r>
+            <a:r>
+              <a:rPr lang="en" sz="1000">
+                <a:solidFill>
+                  <a:srgbClr val="0F0F0F"/>
+                </a:solidFill>
+                <a:latin typeface="Calibri"/>
+                <a:ea typeface="Calibri"/>
+                <a:cs typeface="Calibri"/>
+                <a:sym typeface="Calibri"/>
+              </a:rPr>
+              <a:t> </a:t>
+            </a:r>
+            <a:endParaRPr sz="1000">
+              <a:solidFill>
+                <a:srgbClr val="0F0F0F"/>
+              </a:solidFill>
+              <a:latin typeface="Calibri"/>
+              <a:ea typeface="Calibri"/>
+              <a:cs typeface="Calibri"/>
+              <a:sym typeface="Calibri"/>
+            </a:endParaRPr>
+          </a:p>
+        </p:txBody>
+      </p:sp>
+      <p:pic>
+        <p:nvPicPr>
+          <p:cNvPr id="159" name="Google Shape;159;p24"/>
+          <p:cNvPicPr preferRelativeResize="0"/>
+          <p:nvPr/>
+        </p:nvPicPr>
+        <p:blipFill>
+          <a:blip r:embed="rId10" cstate="email">
+            <a:alphaModFix/>
+            <a:extLst>
+              <a:ext uri="{28A0092B-C50C-407E-A947-70E740481C1C}">
+                <a14:useLocalDpi xmlns:a14="http://schemas.microsoft.com/office/drawing/2010/main"/>
+              </a:ext>
+            </a:extLst>
+          </a:blip>
+          <a:stretch>
+            <a:fillRect/>
+          </a:stretch>
+        </p:blipFill>
+        <p:spPr>
+          <a:xfrm>
+            <a:off x="165976" y="1195788"/>
+            <a:ext cx="1935777" cy="1384751"/>
+          </a:xfrm>
+          <a:prstGeom prst="rect">
+            <a:avLst/>
+          </a:prstGeom>
+          <a:noFill/>
+          <a:ln w="9525" cap="flat" cmpd="sng">
+            <a:solidFill>
+              <a:srgbClr val="FF0000"/>
+            </a:solidFill>
+            <a:prstDash val="solid"/>
+            <a:round/>
+            <a:headEnd type="none" w="sm" len="sm"/>
+            <a:tailEnd type="none" w="sm" len="sm"/>
+          </a:ln>
+        </p:spPr>
+      </p:pic>
+      <p:pic>
+        <p:nvPicPr>
+          <p:cNvPr id="160" name="Google Shape;160;p24"/>
+          <p:cNvPicPr preferRelativeResize="0"/>
+          <p:nvPr/>
+        </p:nvPicPr>
+        <p:blipFill>
+          <a:blip r:embed="rId11" cstate="email">
+            <a:alphaModFix/>
+            <a:extLst>
+              <a:ext uri="{28A0092B-C50C-407E-A947-70E740481C1C}">
+                <a14:useLocalDpi xmlns:a14="http://schemas.microsoft.com/office/drawing/2010/main"/>
+              </a:ext>
+            </a:extLst>
+          </a:blip>
+          <a:stretch>
+            <a:fillRect/>
+          </a:stretch>
+        </p:blipFill>
+        <p:spPr>
+          <a:xfrm>
+            <a:off x="6826100" y="987025"/>
+            <a:ext cx="2230500" cy="596850"/>
+          </a:xfrm>
+          <a:prstGeom prst="rect">
+            <a:avLst/>
+          </a:prstGeom>
+          <a:noFill/>
+          <a:ln w="9525" cap="flat" cmpd="sng">
+            <a:solidFill>
+              <a:srgbClr val="FF0000"/>
+            </a:solidFill>
+            <a:prstDash val="solid"/>
+            <a:round/>
+            <a:headEnd type="none" w="sm" len="sm"/>
+            <a:tailEnd type="none" w="sm" len="sm"/>
+          </a:ln>
+        </p:spPr>
+      </p:pic>
+      <p:pic>
+        <p:nvPicPr>
+          <p:cNvPr id="161" name="Google Shape;161;p24"/>
+          <p:cNvPicPr preferRelativeResize="0"/>
+          <p:nvPr/>
+        </p:nvPicPr>
+        <p:blipFill>
+          <a:blip r:embed="rId12" cstate="email">
+            <a:alphaModFix/>
+            <a:extLst>
+              <a:ext uri="{28A0092B-C50C-407E-A947-70E740481C1C}">
+                <a14:useLocalDpi xmlns:a14="http://schemas.microsoft.com/office/drawing/2010/main"/>
+              </a:ext>
+            </a:extLst>
+          </a:blip>
+          <a:stretch>
+            <a:fillRect/>
+          </a:stretch>
+        </p:blipFill>
+        <p:spPr>
+          <a:xfrm>
+            <a:off x="4961262" y="59500"/>
+            <a:ext cx="1318188" cy="1293000"/>
+          </a:xfrm>
+          <a:prstGeom prst="rect">
+            <a:avLst/>
+          </a:prstGeom>
+          <a:noFill/>
+          <a:ln w="9525" cap="flat" cmpd="sng">
+            <a:solidFill>
+              <a:srgbClr val="FF0000"/>
+            </a:solidFill>
+            <a:prstDash val="solid"/>
+            <a:round/>
+            <a:headEnd type="none" w="sm" len="sm"/>
+            <a:tailEnd type="none" w="sm" len="sm"/>
+          </a:ln>
+        </p:spPr>
+      </p:pic>
+      <p:pic>
+        <p:nvPicPr>
           <p:cNvPr id="162" name="Google Shape;162;p24"/>
+          <p:cNvPicPr preferRelativeResize="0"/>
+          <p:nvPr/>
+        </p:nvPicPr>
+        <p:blipFill>
+          <a:blip r:embed="rId13" cstate="email">
+            <a:alphaModFix/>
+            <a:extLst>
+              <a:ext uri="{28A0092B-C50C-407E-A947-70E740481C1C}">
+                <a14:useLocalDpi xmlns:a14="http://schemas.microsoft.com/office/drawing/2010/main"/>
+              </a:ext>
+            </a:extLst>
+          </a:blip>
+          <a:stretch>
+            <a:fillRect/>
+          </a:stretch>
+        </p:blipFill>
+        <p:spPr>
+          <a:xfrm>
+            <a:off x="699377" y="4045100"/>
+            <a:ext cx="1472875" cy="980125"/>
+          </a:xfrm>
+          <a:prstGeom prst="rect">
+            <a:avLst/>
+          </a:prstGeom>
+          <a:noFill/>
+          <a:ln>
+            <a:noFill/>
+          </a:ln>
+        </p:spPr>
+      </p:pic>
+      <p:pic>
+        <p:nvPicPr>
+          <p:cNvPr id="163" name="Google Shape;163;p24"/>
+          <p:cNvPicPr preferRelativeResize="0"/>
+          <p:nvPr/>
+        </p:nvPicPr>
+        <p:blipFill rotWithShape="1">
+          <a:blip r:embed="rId14" cstate="email">
+            <a:alphaModFix/>
+            <a:extLst>
+              <a:ext uri="{28A0092B-C50C-407E-A947-70E740481C1C}">
+                <a14:useLocalDpi xmlns:a14="http://schemas.microsoft.com/office/drawing/2010/main"/>
+              </a:ext>
+            </a:extLst>
+          </a:blip>
+          <a:srcRect/>
+          <a:stretch/>
+        </p:blipFill>
+        <p:spPr>
+          <a:xfrm>
+            <a:off x="2308200" y="4045100"/>
+            <a:ext cx="1505188" cy="980125"/>
+          </a:xfrm>
+          <a:prstGeom prst="rect">
+            <a:avLst/>
+          </a:prstGeom>
+          <a:noFill/>
+          <a:ln>
+            <a:noFill/>
+          </a:ln>
+        </p:spPr>
+      </p:pic>
+      <p:pic>
+        <p:nvPicPr>
+          <p:cNvPr id="164" name="Google Shape;164;p24"/>
+          <p:cNvPicPr preferRelativeResize="0"/>
+          <p:nvPr/>
+        </p:nvPicPr>
+        <p:blipFill>
+          <a:blip r:embed="rId15" cstate="email">
+            <a:alphaModFix/>
+            <a:extLst>
+              <a:ext uri="{28A0092B-C50C-407E-A947-70E740481C1C}">
+                <a14:useLocalDpi xmlns:a14="http://schemas.microsoft.com/office/drawing/2010/main"/>
+              </a:ext>
+            </a:extLst>
+          </a:blip>
+          <a:stretch>
+            <a:fillRect/>
+          </a:stretch>
+        </p:blipFill>
+        <p:spPr>
+          <a:xfrm>
+            <a:off x="6445321" y="3329882"/>
+            <a:ext cx="1638751" cy="1771626"/>
+          </a:xfrm>
+          <a:prstGeom prst="rect">
+            <a:avLst/>
+          </a:prstGeom>
+          <a:noFill/>
+          <a:ln w="9525" cap="flat" cmpd="sng">
+            <a:solidFill>
+              <a:srgbClr val="FF0000"/>
+            </a:solidFill>
+            <a:prstDash val="solid"/>
+            <a:round/>
+            <a:headEnd type="none" w="sm" len="sm"/>
+            <a:tailEnd type="none" w="sm" len="sm"/>
+          </a:ln>
+        </p:spPr>
+      </p:pic>
+    </p:spTree>
+  </p:cSld>
+  <p:clrMapOvr>
+    <a:masterClrMapping/>
+  </p:clrMapOvr>
+</p:sld>
+</file>
+
+<file path=ppt/slides/slide11.xml><?xml version="1.0" encoding="utf-8"?>
+<p:sld xmlns:a="http://schemas.openxmlformats.org/drawingml/2006/main" xmlns:r="http://schemas.openxmlformats.org/officeDocument/2006/relationships" xmlns:p="http://schemas.openxmlformats.org/presentationml/2006/main">
+  <p:cSld>
+    <p:spTree>
+      <p:nvGrpSpPr>
+        <p:cNvPr id="1" name="Shape 168"/>
+        <p:cNvGrpSpPr/>
+        <p:nvPr/>
+      </p:nvGrpSpPr>
+      <p:grpSpPr>
+        <a:xfrm>
+          <a:off x="0" y="0"/>
+          <a:ext cx="0" cy="0"/>
+          <a:chOff x="0" y="0"/>
+          <a:chExt cx="0" cy="0"/>
+        </a:xfrm>
+      </p:grpSpPr>
+      <p:sp>
+        <p:nvSpPr>
+          <p:cNvPr id="169" name="Google Shape;169;p25"/>
+          <p:cNvSpPr txBox="1"/>
+          <p:nvPr/>
+        </p:nvSpPr>
+        <p:spPr>
+          <a:xfrm>
+            <a:off x="72300" y="0"/>
+            <a:ext cx="4131300" cy="326400"/>
+          </a:xfrm>
+          <a:prstGeom prst="rect">
+            <a:avLst/>
+          </a:prstGeom>
+          <a:noFill/>
+          <a:ln>
+            <a:noFill/>
+          </a:ln>
+        </p:spPr>
+        <p:txBody>
+          <a:bodyPr spcFirstLastPara="1" wrap="square" lIns="9125" tIns="9125" rIns="9125" bIns="9125" anchor="t" anchorCtr="0">
+            <a:spAutoFit/>
+          </a:bodyPr>
+          <a:lstStyle/>
+          <a:p>
+            <a:pPr marL="0" lvl="0" indent="0" algn="l" rtl="0">
+              <a:spcBef>
+                <a:spcPts val="0"/>
+              </a:spcBef>
+              <a:spcAft>
+                <a:spcPts val="0"/>
+              </a:spcAft>
+              <a:buNone/>
+            </a:pPr>
+            <a:r>
+              <a:rPr lang="en" sz="2000" b="1">
+                <a:solidFill>
+                  <a:schemeClr val="dk1"/>
+                </a:solidFill>
+                <a:latin typeface="Calibri"/>
+                <a:ea typeface="Calibri"/>
+                <a:cs typeface="Calibri"/>
+                <a:sym typeface="Calibri"/>
+              </a:rPr>
+              <a:t>Misc - 3</a:t>
+            </a:r>
+            <a:endParaRPr sz="2000" b="1">
+              <a:latin typeface="Calibri"/>
+              <a:ea typeface="Calibri"/>
+              <a:cs typeface="Calibri"/>
+              <a:sym typeface="Calibri"/>
+            </a:endParaRPr>
+          </a:p>
+        </p:txBody>
+      </p:sp>
+      <p:sp>
+        <p:nvSpPr>
+          <p:cNvPr id="170" name="Google Shape;170;p25"/>
           <p:cNvSpPr txBox="1"/>
           <p:nvPr/>
         </p:nvSpPr>
@@ -12004,7 +13187,7 @@
       </p:sp>
       <p:sp>
         <p:nvSpPr>
-          <p:cNvPr id="163" name="Google Shape;163;p24"/>
+          <p:cNvPr id="171" name="Google Shape;171;p25"/>
           <p:cNvSpPr txBox="1"/>
           <p:nvPr/>
         </p:nvSpPr>
@@ -12139,7 +13322,7 @@
       </p:sp>
       <p:sp>
         <p:nvSpPr>
-          <p:cNvPr id="164" name="Google Shape;164;p24"/>
+          <p:cNvPr id="172" name="Google Shape;172;p25"/>
           <p:cNvSpPr txBox="1"/>
           <p:nvPr/>
         </p:nvSpPr>
@@ -12295,7 +13478,7 @@
       </p:sp>
       <p:sp>
         <p:nvSpPr>
-          <p:cNvPr id="165" name="Google Shape;165;p24"/>
+          <p:cNvPr id="173" name="Google Shape;173;p25"/>
           <p:cNvSpPr txBox="1"/>
           <p:nvPr/>
         </p:nvSpPr>
@@ -12406,7 +13589,7 @@
       </p:sp>
       <p:sp>
         <p:nvSpPr>
-          <p:cNvPr id="166" name="Google Shape;166;p24"/>
+          <p:cNvPr id="174" name="Google Shape;174;p25"/>
           <p:cNvSpPr txBox="1"/>
           <p:nvPr/>
         </p:nvSpPr>
@@ -12497,7 +13680,7 @@
       </p:sp>
       <p:pic>
         <p:nvPicPr>
-          <p:cNvPr id="167" name="Google Shape;167;p24"/>
+          <p:cNvPr id="175" name="Google Shape;175;p25"/>
           <p:cNvPicPr preferRelativeResize="0"/>
           <p:nvPr/>
         </p:nvPicPr>
@@ -12536,7 +13719,7 @@
       </p:pic>
       <p:pic>
         <p:nvPicPr>
-          <p:cNvPr id="168" name="Google Shape;168;p24"/>
+          <p:cNvPr id="176" name="Google Shape;176;p25"/>
           <p:cNvPicPr preferRelativeResize="0"/>
           <p:nvPr/>
         </p:nvPicPr>
@@ -12575,7 +13758,7 @@
       </p:pic>
       <p:pic>
         <p:nvPicPr>
-          <p:cNvPr id="169" name="Google Shape;169;p24"/>
+          <p:cNvPr id="177" name="Google Shape;177;p25"/>
           <p:cNvPicPr preferRelativeResize="0"/>
           <p:nvPr/>
         </p:nvPicPr>
@@ -12614,7 +13797,7 @@
       </p:pic>
       <p:pic>
         <p:nvPicPr>
-          <p:cNvPr id="170" name="Google Shape;170;p24"/>
+          <p:cNvPr id="178" name="Google Shape;178;p25"/>
           <p:cNvPicPr preferRelativeResize="0"/>
           <p:nvPr/>
         </p:nvPicPr>
@@ -12653,7 +13836,7 @@
       </p:pic>
       <p:pic>
         <p:nvPicPr>
-          <p:cNvPr id="171" name="Google Shape;171;p24"/>
+          <p:cNvPr id="179" name="Google Shape;179;p25"/>
           <p:cNvPicPr preferRelativeResize="0"/>
           <p:nvPr/>
         </p:nvPicPr>
@@ -12692,7 +13875,7 @@
       </p:pic>
       <p:sp>
         <p:nvSpPr>
-          <p:cNvPr id="172" name="Google Shape;172;p24"/>
+          <p:cNvPr id="180" name="Google Shape;180;p25"/>
           <p:cNvSpPr txBox="1"/>
           <p:nvPr/>
         </p:nvSpPr>
@@ -12835,7 +14018,7 @@
       </p:sp>
       <p:pic>
         <p:nvPicPr>
-          <p:cNvPr id="173" name="Google Shape;173;p24"/>
+          <p:cNvPr id="181" name="Google Shape;181;p25"/>
           <p:cNvPicPr preferRelativeResize="0"/>
           <p:nvPr/>
         </p:nvPicPr>
@@ -12874,12 +14057,12 @@
 </p:sld>
 </file>
 
-<file path=ppt/slides/slide11.xml><?xml version="1.0" encoding="utf-8"?>
+<file path=ppt/slides/slide12.xml><?xml version="1.0" encoding="utf-8"?>
 <p:sld xmlns:a="http://schemas.openxmlformats.org/drawingml/2006/main" xmlns:r="http://schemas.openxmlformats.org/officeDocument/2006/relationships" xmlns:p="http://schemas.openxmlformats.org/presentationml/2006/main">
   <p:cSld>
     <p:spTree>
       <p:nvGrpSpPr>
-        <p:cNvPr id="1" name="Shape 177"/>
+        <p:cNvPr id="1" name="Shape 185"/>
         <p:cNvGrpSpPr/>
         <p:nvPr/>
       </p:nvGrpSpPr>
@@ -12893,7 +14076,7 @@
       </p:grpSpPr>
       <p:sp>
         <p:nvSpPr>
-          <p:cNvPr id="178" name="Google Shape;178;p25"/>
+          <p:cNvPr id="186" name="Google Shape;186;p26"/>
           <p:cNvSpPr txBox="1"/>
           <p:nvPr/>
         </p:nvSpPr>
@@ -12948,7 +14131,7 @@
       </p:sp>
       <p:sp>
         <p:nvSpPr>
-          <p:cNvPr id="179" name="Google Shape;179;p25"/>
+          <p:cNvPr id="187" name="Google Shape;187;p26"/>
           <p:cNvSpPr txBox="1"/>
           <p:nvPr/>
         </p:nvSpPr>
@@ -13276,7 +14459,7 @@
       </p:sp>
       <p:pic>
         <p:nvPicPr>
-          <p:cNvPr id="180" name="Google Shape;180;p25"/>
+          <p:cNvPr id="188" name="Google Shape;188;p26"/>
           <p:cNvPicPr preferRelativeResize="0"/>
           <p:nvPr/>
         </p:nvPicPr>
@@ -13315,7 +14498,7 @@
       </p:pic>
       <p:sp>
         <p:nvSpPr>
-          <p:cNvPr id="181" name="Google Shape;181;p25"/>
+          <p:cNvPr id="189" name="Google Shape;189;p26"/>
           <p:cNvSpPr txBox="1"/>
           <p:nvPr/>
         </p:nvSpPr>
@@ -13547,7 +14730,7 @@
       </p:sp>
       <p:pic>
         <p:nvPicPr>
-          <p:cNvPr id="182" name="Google Shape;182;p25"/>
+          <p:cNvPr id="190" name="Google Shape;190;p26"/>
           <p:cNvPicPr preferRelativeResize="0"/>
           <p:nvPr/>
         </p:nvPicPr>
@@ -13586,7 +14769,7 @@
       </p:pic>
       <p:sp>
         <p:nvSpPr>
-          <p:cNvPr id="183" name="Google Shape;183;p25"/>
+          <p:cNvPr id="191" name="Google Shape;191;p26"/>
           <p:cNvSpPr txBox="1"/>
           <p:nvPr/>
         </p:nvSpPr>
@@ -13842,7 +15025,7 @@
       </p:sp>
       <p:pic>
         <p:nvPicPr>
-          <p:cNvPr id="184" name="Google Shape;184;p25"/>
+          <p:cNvPr id="192" name="Google Shape;192;p26"/>
           <p:cNvPicPr preferRelativeResize="0"/>
           <p:nvPr/>
         </p:nvPicPr>
@@ -13881,7 +15064,7 @@
       </p:pic>
       <p:sp>
         <p:nvSpPr>
-          <p:cNvPr id="185" name="Google Shape;185;p25"/>
+          <p:cNvPr id="193" name="Google Shape;193;p26"/>
           <p:cNvSpPr txBox="1"/>
           <p:nvPr/>
         </p:nvSpPr>
@@ -14064,12 +15247,12 @@
 </p:sld>
 </file>
 
-<file path=ppt/slides/slide12.xml><?xml version="1.0" encoding="utf-8"?>
+<file path=ppt/slides/slide13.xml><?xml version="1.0" encoding="utf-8"?>
 <p:sld xmlns:a="http://schemas.openxmlformats.org/drawingml/2006/main" xmlns:r="http://schemas.openxmlformats.org/officeDocument/2006/relationships" xmlns:p="http://schemas.openxmlformats.org/presentationml/2006/main">
   <p:cSld>
     <p:spTree>
       <p:nvGrpSpPr>
-        <p:cNvPr id="1" name="Shape 189"/>
+        <p:cNvPr id="1" name="Shape 197"/>
         <p:cNvGrpSpPr/>
         <p:nvPr/>
       </p:nvGrpSpPr>
@@ -14083,7 +15266,7 @@
       </p:grpSpPr>
       <p:sp>
         <p:nvSpPr>
-          <p:cNvPr id="190" name="Google Shape;190;p26"/>
+          <p:cNvPr id="198" name="Google Shape;198;p27"/>
           <p:cNvSpPr txBox="1"/>
           <p:nvPr/>
         </p:nvSpPr>
@@ -14138,7 +15321,7 @@
       </p:sp>
       <p:sp>
         <p:nvSpPr>
-          <p:cNvPr id="191" name="Google Shape;191;p26"/>
+          <p:cNvPr id="199" name="Google Shape;199;p27"/>
           <p:cNvSpPr txBox="1"/>
           <p:nvPr/>
         </p:nvSpPr>
@@ -14866,7 +16049,7 @@
       </p:sp>
       <p:pic>
         <p:nvPicPr>
-          <p:cNvPr id="192" name="Google Shape;192;p26"/>
+          <p:cNvPr id="200" name="Google Shape;200;p27"/>
           <p:cNvPicPr preferRelativeResize="0"/>
           <p:nvPr/>
         </p:nvPicPr>
@@ -14899,7 +16082,7 @@
       </p:pic>
       <p:sp>
         <p:nvSpPr>
-          <p:cNvPr id="193" name="Google Shape;193;p26"/>
+          <p:cNvPr id="201" name="Google Shape;201;p27"/>
           <p:cNvSpPr txBox="1"/>
           <p:nvPr/>
         </p:nvSpPr>
@@ -15030,7 +16213,7 @@
       </p:sp>
       <p:pic>
         <p:nvPicPr>
-          <p:cNvPr id="194" name="Google Shape;194;p26"/>
+          <p:cNvPr id="202" name="Google Shape;202;p27"/>
           <p:cNvPicPr preferRelativeResize="0"/>
           <p:nvPr/>
         </p:nvPicPr>
@@ -15063,7 +16246,7 @@
       </p:pic>
       <p:pic>
         <p:nvPicPr>
-          <p:cNvPr id="195" name="Google Shape;195;p26"/>
+          <p:cNvPr id="203" name="Google Shape;203;p27"/>
           <p:cNvPicPr preferRelativeResize="0"/>
           <p:nvPr/>
         </p:nvPicPr>
@@ -15091,7 +16274,7 @@
       </p:pic>
       <p:sp>
         <p:nvSpPr>
-          <p:cNvPr id="196" name="Google Shape;196;p26"/>
+          <p:cNvPr id="204" name="Google Shape;204;p27"/>
           <p:cNvSpPr txBox="1"/>
           <p:nvPr/>
         </p:nvSpPr>
@@ -15304,12 +16487,12 @@
 </p:sld>
 </file>
 
-<file path=ppt/slides/slide13.xml><?xml version="1.0" encoding="utf-8"?>
+<file path=ppt/slides/slide14.xml><?xml version="1.0" encoding="utf-8"?>
 <p:sld xmlns:a="http://schemas.openxmlformats.org/drawingml/2006/main" xmlns:r="http://schemas.openxmlformats.org/officeDocument/2006/relationships" xmlns:p="http://schemas.openxmlformats.org/presentationml/2006/main">
   <p:cSld>
     <p:spTree>
       <p:nvGrpSpPr>
-        <p:cNvPr id="1" name="Shape 200"/>
+        <p:cNvPr id="1" name="Shape 208"/>
         <p:cNvGrpSpPr/>
         <p:nvPr/>
       </p:nvGrpSpPr>
@@ -15323,7 +16506,7 @@
       </p:grpSpPr>
       <p:sp>
         <p:nvSpPr>
-          <p:cNvPr id="201" name="Google Shape;201;p27"/>
+          <p:cNvPr id="209" name="Google Shape;209;p28"/>
           <p:cNvSpPr txBox="1"/>
           <p:nvPr/>
         </p:nvSpPr>
@@ -15378,7 +16561,7 @@
       </p:sp>
       <p:sp>
         <p:nvSpPr>
-          <p:cNvPr id="202" name="Google Shape;202;p27"/>
+          <p:cNvPr id="210" name="Google Shape;210;p28"/>
           <p:cNvSpPr txBox="1"/>
           <p:nvPr/>
         </p:nvSpPr>
@@ -15798,7 +16981,7 @@
       </p:sp>
       <p:pic>
         <p:nvPicPr>
-          <p:cNvPr id="203" name="Google Shape;203;p27"/>
+          <p:cNvPr id="211" name="Google Shape;211;p28"/>
           <p:cNvPicPr preferRelativeResize="0"/>
           <p:nvPr/>
         </p:nvPicPr>
@@ -15831,7 +17014,7 @@
       </p:pic>
       <p:pic>
         <p:nvPicPr>
-          <p:cNvPr id="204" name="Google Shape;204;p27"/>
+          <p:cNvPr id="212" name="Google Shape;212;p28"/>
           <p:cNvPicPr preferRelativeResize="0"/>
           <p:nvPr/>
         </p:nvPicPr>
@@ -15864,7 +17047,7 @@
       </p:pic>
       <p:pic>
         <p:nvPicPr>
-          <p:cNvPr id="205" name="Google Shape;205;p27"/>
+          <p:cNvPr id="213" name="Google Shape;213;p28"/>
           <p:cNvPicPr preferRelativeResize="0"/>
           <p:nvPr/>
         </p:nvPicPr>
@@ -15903,12 +17086,12 @@
 </p:sld>
 </file>
 
-<file path=ppt/slides/slide14.xml><?xml version="1.0" encoding="utf-8"?>
+<file path=ppt/slides/slide15.xml><?xml version="1.0" encoding="utf-8"?>
 <p:sld xmlns:a="http://schemas.openxmlformats.org/drawingml/2006/main" xmlns:r="http://schemas.openxmlformats.org/officeDocument/2006/relationships" xmlns:p="http://schemas.openxmlformats.org/presentationml/2006/main">
   <p:cSld>
     <p:spTree>
       <p:nvGrpSpPr>
-        <p:cNvPr id="1" name="Shape 209"/>
+        <p:cNvPr id="1" name="Shape 217"/>
         <p:cNvGrpSpPr/>
         <p:nvPr/>
       </p:nvGrpSpPr>
@@ -15922,7 +17105,7 @@
       </p:grpSpPr>
       <p:pic>
         <p:nvPicPr>
-          <p:cNvPr id="210" name="Google Shape;210;p28"/>
+          <p:cNvPr id="218" name="Google Shape;218;p29"/>
           <p:cNvPicPr preferRelativeResize="0"/>
           <p:nvPr/>
         </p:nvPicPr>
@@ -15961,7 +17144,7 @@
       </p:pic>
       <p:sp>
         <p:nvSpPr>
-          <p:cNvPr id="211" name="Google Shape;211;p28"/>
+          <p:cNvPr id="219" name="Google Shape;219;p29"/>
           <p:cNvSpPr txBox="1"/>
           <p:nvPr/>
         </p:nvSpPr>
@@ -16016,7 +17199,7 @@
       </p:sp>
       <p:sp>
         <p:nvSpPr>
-          <p:cNvPr id="212" name="Google Shape;212;p28"/>
+          <p:cNvPr id="220" name="Google Shape;220;p29"/>
           <p:cNvSpPr txBox="1"/>
           <p:nvPr/>
         </p:nvSpPr>
@@ -16276,7 +17459,7 @@
       </p:sp>
       <p:sp>
         <p:nvSpPr>
-          <p:cNvPr id="213" name="Google Shape;213;p28"/>
+          <p:cNvPr id="221" name="Google Shape;221;p29"/>
           <p:cNvSpPr txBox="1"/>
           <p:nvPr/>
         </p:nvSpPr>
@@ -16339,7 +17522,7 @@
       </p:sp>
       <p:sp>
         <p:nvSpPr>
-          <p:cNvPr id="214" name="Google Shape;214;p28"/>
+          <p:cNvPr id="222" name="Google Shape;222;p29"/>
           <p:cNvSpPr txBox="1"/>
           <p:nvPr/>
         </p:nvSpPr>
@@ -16405,7 +17588,7 @@
       </p:sp>
       <p:sp>
         <p:nvSpPr>
-          <p:cNvPr id="215" name="Google Shape;215;p28"/>
+          <p:cNvPr id="223" name="Google Shape;223;p29"/>
           <p:cNvSpPr txBox="1"/>
           <p:nvPr/>
         </p:nvSpPr>
@@ -16471,7 +17654,7 @@
       </p:sp>
       <p:sp>
         <p:nvSpPr>
-          <p:cNvPr id="216" name="Google Shape;216;p28"/>
+          <p:cNvPr id="224" name="Google Shape;224;p29"/>
           <p:cNvSpPr txBox="1"/>
           <p:nvPr/>
         </p:nvSpPr>
@@ -16537,7 +17720,7 @@
       </p:sp>
       <p:sp>
         <p:nvSpPr>
-          <p:cNvPr id="217" name="Google Shape;217;p28"/>
+          <p:cNvPr id="225" name="Google Shape;225;p29"/>
           <p:cNvSpPr txBox="1"/>
           <p:nvPr/>
         </p:nvSpPr>
@@ -16603,7 +17786,7 @@
       </p:sp>
       <p:sp>
         <p:nvSpPr>
-          <p:cNvPr id="218" name="Google Shape;218;p28"/>
+          <p:cNvPr id="226" name="Google Shape;226;p29"/>
           <p:cNvSpPr txBox="1"/>
           <p:nvPr/>
         </p:nvSpPr>
@@ -16669,7 +17852,7 @@
       </p:sp>
       <p:sp>
         <p:nvSpPr>
-          <p:cNvPr id="219" name="Google Shape;219;p28"/>
+          <p:cNvPr id="227" name="Google Shape;227;p29"/>
           <p:cNvSpPr txBox="1"/>
           <p:nvPr/>
         </p:nvSpPr>
@@ -16735,7 +17918,7 @@
       </p:sp>
       <p:sp>
         <p:nvSpPr>
-          <p:cNvPr id="220" name="Google Shape;220;p28"/>
+          <p:cNvPr id="228" name="Google Shape;228;p29"/>
           <p:cNvSpPr txBox="1"/>
           <p:nvPr/>
         </p:nvSpPr>
@@ -16801,7 +17984,7 @@
       </p:sp>
       <p:sp>
         <p:nvSpPr>
-          <p:cNvPr id="221" name="Google Shape;221;p28"/>
+          <p:cNvPr id="229" name="Google Shape;229;p29"/>
           <p:cNvSpPr txBox="1"/>
           <p:nvPr/>
         </p:nvSpPr>
@@ -16867,7 +18050,7 @@
       </p:sp>
       <p:sp>
         <p:nvSpPr>
-          <p:cNvPr id="222" name="Google Shape;222;p28"/>
+          <p:cNvPr id="230" name="Google Shape;230;p29"/>
           <p:cNvSpPr txBox="1"/>
           <p:nvPr/>
         </p:nvSpPr>
@@ -16933,7 +18116,7 @@
       </p:sp>
       <p:sp>
         <p:nvSpPr>
-          <p:cNvPr id="223" name="Google Shape;223;p28"/>
+          <p:cNvPr id="231" name="Google Shape;231;p29"/>
           <p:cNvSpPr txBox="1"/>
           <p:nvPr/>
         </p:nvSpPr>
@@ -16999,7 +18182,7 @@
       </p:sp>
       <p:sp>
         <p:nvSpPr>
-          <p:cNvPr id="224" name="Google Shape;224;p28"/>
+          <p:cNvPr id="232" name="Google Shape;232;p29"/>
           <p:cNvSpPr txBox="1"/>
           <p:nvPr/>
         </p:nvSpPr>
@@ -17065,7 +18248,7 @@
       </p:sp>
       <p:sp>
         <p:nvSpPr>
-          <p:cNvPr id="225" name="Google Shape;225;p28"/>
+          <p:cNvPr id="233" name="Google Shape;233;p29"/>
           <p:cNvSpPr txBox="1"/>
           <p:nvPr/>
         </p:nvSpPr>
@@ -17137,12 +18320,12 @@
 </p:sld>
 </file>
 
-<file path=ppt/slides/slide15.xml><?xml version="1.0" encoding="utf-8"?>
+<file path=ppt/slides/slide16.xml><?xml version="1.0" encoding="utf-8"?>
 <p:sld xmlns:a="http://schemas.openxmlformats.org/drawingml/2006/main" xmlns:r="http://schemas.openxmlformats.org/officeDocument/2006/relationships" xmlns:p="http://schemas.openxmlformats.org/presentationml/2006/main">
   <p:cSld>
     <p:spTree>
       <p:nvGrpSpPr>
-        <p:cNvPr id="1" name="Shape 229"/>
+        <p:cNvPr id="1" name="Shape 237"/>
         <p:cNvGrpSpPr/>
         <p:nvPr/>
       </p:nvGrpSpPr>
@@ -17156,7 +18339,7 @@
       </p:grpSpPr>
       <p:sp>
         <p:nvSpPr>
-          <p:cNvPr id="230" name="Google Shape;230;p29"/>
+          <p:cNvPr id="238" name="Google Shape;238;p30"/>
           <p:cNvSpPr txBox="1"/>
           <p:nvPr/>
         </p:nvSpPr>
@@ -17211,7 +18394,7 @@
       </p:sp>
       <p:sp>
         <p:nvSpPr>
-          <p:cNvPr id="231" name="Google Shape;231;p29"/>
+          <p:cNvPr id="239" name="Google Shape;239;p30"/>
           <p:cNvSpPr txBox="1"/>
           <p:nvPr/>
         </p:nvSpPr>
@@ -17293,7 +18476,7 @@
       </p:sp>
       <p:sp>
         <p:nvSpPr>
-          <p:cNvPr id="232" name="Google Shape;232;p29"/>
+          <p:cNvPr id="240" name="Google Shape;240;p30"/>
           <p:cNvSpPr txBox="1"/>
           <p:nvPr/>
         </p:nvSpPr>
@@ -17430,7 +18613,7 @@
       </p:sp>
       <p:sp>
         <p:nvSpPr>
-          <p:cNvPr id="233" name="Google Shape;233;p29"/>
+          <p:cNvPr id="241" name="Google Shape;241;p30"/>
           <p:cNvSpPr txBox="1"/>
           <p:nvPr/>
         </p:nvSpPr>
@@ -17600,7 +18783,7 @@
       </p:sp>
       <p:grpSp>
         <p:nvGrpSpPr>
-          <p:cNvPr id="234" name="Google Shape;234;p29"/>
+          <p:cNvPr id="242" name="Google Shape;242;p30"/>
           <p:cNvGrpSpPr/>
           <p:nvPr/>
         </p:nvGrpSpPr>
@@ -17614,7 +18797,7 @@
         </p:grpSpPr>
         <p:pic>
           <p:nvPicPr>
-            <p:cNvPr id="235" name="Google Shape;235;p29"/>
+            <p:cNvPr id="243" name="Google Shape;243;p30"/>
             <p:cNvPicPr preferRelativeResize="0"/>
             <p:nvPr/>
           </p:nvPicPr>
@@ -17652,7 +18835,7 @@
         </p:pic>
         <p:pic>
           <p:nvPicPr>
-            <p:cNvPr id="236" name="Google Shape;236;p29"/>
+            <p:cNvPr id="244" name="Google Shape;244;p30"/>
             <p:cNvPicPr preferRelativeResize="0"/>
             <p:nvPr/>
           </p:nvPicPr>
@@ -17691,7 +18874,7 @@
       </p:grpSp>
       <p:sp>
         <p:nvSpPr>
-          <p:cNvPr id="237" name="Google Shape;237;p29"/>
+          <p:cNvPr id="245" name="Google Shape;245;p30"/>
           <p:cNvSpPr/>
           <p:nvPr/>
         </p:nvSpPr>
@@ -17737,7 +18920,7 @@
       </p:sp>
       <p:sp>
         <p:nvSpPr>
-          <p:cNvPr id="238" name="Google Shape;238;p29"/>
+          <p:cNvPr id="246" name="Google Shape;246;p30"/>
           <p:cNvSpPr/>
           <p:nvPr/>
         </p:nvSpPr>
@@ -17783,7 +18966,7 @@
       </p:sp>
       <p:sp>
         <p:nvSpPr>
-          <p:cNvPr id="239" name="Google Shape;239;p29"/>
+          <p:cNvPr id="247" name="Google Shape;247;p30"/>
           <p:cNvSpPr/>
           <p:nvPr/>
         </p:nvSpPr>
@@ -17829,7 +19012,7 @@
       </p:sp>
       <p:sp>
         <p:nvSpPr>
-          <p:cNvPr id="240" name="Google Shape;240;p29"/>
+          <p:cNvPr id="248" name="Google Shape;248;p30"/>
           <p:cNvSpPr/>
           <p:nvPr/>
         </p:nvSpPr>
@@ -17875,7 +19058,7 @@
       </p:sp>
       <p:sp>
         <p:nvSpPr>
-          <p:cNvPr id="241" name="Google Shape;241;p29"/>
+          <p:cNvPr id="249" name="Google Shape;249;p30"/>
           <p:cNvSpPr/>
           <p:nvPr/>
         </p:nvSpPr>
@@ -17921,7 +19104,7 @@
       </p:sp>
       <p:sp>
         <p:nvSpPr>
-          <p:cNvPr id="242" name="Google Shape;242;p29"/>
+          <p:cNvPr id="250" name="Google Shape;250;p30"/>
           <p:cNvSpPr/>
           <p:nvPr/>
         </p:nvSpPr>
@@ -17967,7 +19150,7 @@
       </p:sp>
       <p:sp>
         <p:nvSpPr>
-          <p:cNvPr id="243" name="Google Shape;243;p29"/>
+          <p:cNvPr id="251" name="Google Shape;251;p30"/>
           <p:cNvSpPr/>
           <p:nvPr/>
         </p:nvSpPr>
@@ -18013,7 +19196,7 @@
       </p:sp>
       <p:sp>
         <p:nvSpPr>
-          <p:cNvPr id="244" name="Google Shape;244;p29"/>
+          <p:cNvPr id="252" name="Google Shape;252;p30"/>
           <p:cNvSpPr/>
           <p:nvPr/>
         </p:nvSpPr>
@@ -18059,7 +19242,7 @@
       </p:sp>
       <p:sp>
         <p:nvSpPr>
-          <p:cNvPr id="245" name="Google Shape;245;p29"/>
+          <p:cNvPr id="253" name="Google Shape;253;p30"/>
           <p:cNvSpPr/>
           <p:nvPr/>
         </p:nvSpPr>
@@ -18105,7 +19288,7 @@
       </p:sp>
       <p:sp>
         <p:nvSpPr>
-          <p:cNvPr id="246" name="Google Shape;246;p29"/>
+          <p:cNvPr id="254" name="Google Shape;254;p30"/>
           <p:cNvSpPr/>
           <p:nvPr/>
         </p:nvSpPr>
@@ -18151,7 +19334,7 @@
       </p:sp>
       <p:sp>
         <p:nvSpPr>
-          <p:cNvPr id="247" name="Google Shape;247;p29"/>
+          <p:cNvPr id="255" name="Google Shape;255;p30"/>
           <p:cNvSpPr/>
           <p:nvPr/>
         </p:nvSpPr>
@@ -18197,7 +19380,7 @@
       </p:sp>
       <p:sp>
         <p:nvSpPr>
-          <p:cNvPr id="248" name="Google Shape;248;p29"/>
+          <p:cNvPr id="256" name="Google Shape;256;p30"/>
           <p:cNvSpPr txBox="1"/>
           <p:nvPr/>
         </p:nvSpPr>
@@ -18268,7 +19451,7 @@
       </p:sp>
       <p:sp>
         <p:nvSpPr>
-          <p:cNvPr id="249" name="Google Shape;249;p29"/>
+          <p:cNvPr id="257" name="Google Shape;257;p30"/>
           <p:cNvSpPr txBox="1"/>
           <p:nvPr/>
         </p:nvSpPr>
@@ -18339,7 +19522,7 @@
       </p:sp>
       <p:sp>
         <p:nvSpPr>
-          <p:cNvPr id="250" name="Google Shape;250;p29"/>
+          <p:cNvPr id="258" name="Google Shape;258;p30"/>
           <p:cNvSpPr txBox="1"/>
           <p:nvPr/>
         </p:nvSpPr>
@@ -18410,7 +19593,7 @@
       </p:sp>
       <p:sp>
         <p:nvSpPr>
-          <p:cNvPr id="251" name="Google Shape;251;p29"/>
+          <p:cNvPr id="259" name="Google Shape;259;p30"/>
           <p:cNvSpPr txBox="1"/>
           <p:nvPr/>
         </p:nvSpPr>
@@ -18481,7 +19664,7 @@
       </p:sp>
       <p:sp>
         <p:nvSpPr>
-          <p:cNvPr id="252" name="Google Shape;252;p29"/>
+          <p:cNvPr id="260" name="Google Shape;260;p30"/>
           <p:cNvSpPr txBox="1"/>
           <p:nvPr/>
         </p:nvSpPr>
@@ -18719,12 +19902,12 @@
 </p:sld>
 </file>
 
-<file path=ppt/slides/slide16.xml><?xml version="1.0" encoding="utf-8"?>
+<file path=ppt/slides/slide17.xml><?xml version="1.0" encoding="utf-8"?>
 <p:sld xmlns:a="http://schemas.openxmlformats.org/drawingml/2006/main" xmlns:r="http://schemas.openxmlformats.org/officeDocument/2006/relationships" xmlns:p="http://schemas.openxmlformats.org/presentationml/2006/main">
   <p:cSld>
     <p:spTree>
       <p:nvGrpSpPr>
-        <p:cNvPr id="1" name="Shape 256"/>
+        <p:cNvPr id="1" name="Shape 264"/>
         <p:cNvGrpSpPr/>
         <p:nvPr/>
       </p:nvGrpSpPr>
@@ -18738,7 +19921,7 @@
       </p:grpSpPr>
       <p:sp>
         <p:nvSpPr>
-          <p:cNvPr id="257" name="Google Shape;257;p30"/>
+          <p:cNvPr id="265" name="Google Shape;265;p31"/>
           <p:cNvSpPr txBox="1"/>
           <p:nvPr/>
         </p:nvSpPr>
@@ -18793,7 +19976,7 @@
       </p:sp>
       <p:sp>
         <p:nvSpPr>
-          <p:cNvPr id="258" name="Google Shape;258;p30"/>
+          <p:cNvPr id="266" name="Google Shape;266;p31"/>
           <p:cNvSpPr txBox="1"/>
           <p:nvPr/>
         </p:nvSpPr>
@@ -18927,7 +20110,7 @@
       </p:sp>
       <p:pic>
         <p:nvPicPr>
-          <p:cNvPr id="259" name="Google Shape;259;p30"/>
+          <p:cNvPr id="267" name="Google Shape;267;p31"/>
           <p:cNvPicPr preferRelativeResize="0"/>
           <p:nvPr/>
         </p:nvPicPr>
@@ -18966,12 +20149,12 @@
 </p:sld>
 </file>
 
-<file path=ppt/slides/slide17.xml><?xml version="1.0" encoding="utf-8"?>
+<file path=ppt/slides/slide18.xml><?xml version="1.0" encoding="utf-8"?>
 <p:sld xmlns:a="http://schemas.openxmlformats.org/drawingml/2006/main" xmlns:r="http://schemas.openxmlformats.org/officeDocument/2006/relationships" xmlns:p="http://schemas.openxmlformats.org/presentationml/2006/main">
   <p:cSld>
     <p:spTree>
       <p:nvGrpSpPr>
-        <p:cNvPr id="1" name="Shape 263"/>
+        <p:cNvPr id="1" name="Shape 271"/>
         <p:cNvGrpSpPr/>
         <p:nvPr/>
       </p:nvGrpSpPr>
@@ -18985,7 +20168,7 @@
       </p:grpSpPr>
       <p:sp>
         <p:nvSpPr>
-          <p:cNvPr id="264" name="Google Shape;264;p31"/>
+          <p:cNvPr id="272" name="Google Shape;272;p32"/>
           <p:cNvSpPr txBox="1"/>
           <p:nvPr/>
         </p:nvSpPr>
@@ -19040,7 +20223,7 @@
       </p:sp>
       <p:sp>
         <p:nvSpPr>
-          <p:cNvPr id="265" name="Google Shape;265;p31"/>
+          <p:cNvPr id="273" name="Google Shape;273;p32"/>
           <p:cNvSpPr txBox="1"/>
           <p:nvPr/>
         </p:nvSpPr>
@@ -19592,7 +20775,7 @@
       </p:sp>
       <p:pic>
         <p:nvPicPr>
-          <p:cNvPr id="266" name="Google Shape;266;p31"/>
+          <p:cNvPr id="274" name="Google Shape;274;p32"/>
           <p:cNvPicPr preferRelativeResize="0"/>
           <p:nvPr/>
         </p:nvPicPr>
@@ -19631,12 +20814,12 @@
 </p:sld>
 </file>
 
-<file path=ppt/slides/slide18.xml><?xml version="1.0" encoding="utf-8"?>
+<file path=ppt/slides/slide19.xml><?xml version="1.0" encoding="utf-8"?>
 <p:sld xmlns:a="http://schemas.openxmlformats.org/drawingml/2006/main" xmlns:r="http://schemas.openxmlformats.org/officeDocument/2006/relationships" xmlns:p="http://schemas.openxmlformats.org/presentationml/2006/main">
   <p:cSld>
     <p:spTree>
       <p:nvGrpSpPr>
-        <p:cNvPr id="1" name="Shape 270"/>
+        <p:cNvPr id="1" name="Shape 278"/>
         <p:cNvGrpSpPr/>
         <p:nvPr/>
       </p:nvGrpSpPr>
@@ -19650,7 +20833,7 @@
       </p:grpSpPr>
       <p:sp>
         <p:nvSpPr>
-          <p:cNvPr id="271" name="Google Shape;271;p32"/>
+          <p:cNvPr id="279" name="Google Shape;279;p33"/>
           <p:cNvSpPr txBox="1"/>
           <p:nvPr/>
         </p:nvSpPr>
@@ -19708,7 +20891,7 @@
       </p:sp>
       <p:sp>
         <p:nvSpPr>
-          <p:cNvPr id="272" name="Google Shape;272;p32"/>
+          <p:cNvPr id="280" name="Google Shape;280;p33"/>
           <p:cNvSpPr txBox="1"/>
           <p:nvPr/>
         </p:nvSpPr>
@@ -19940,7 +21123,7 @@
       </p:sp>
       <p:sp>
         <p:nvSpPr>
-          <p:cNvPr id="273" name="Google Shape;273;p32"/>
+          <p:cNvPr id="281" name="Google Shape;281;p33"/>
           <p:cNvSpPr txBox="1"/>
           <p:nvPr/>
         </p:nvSpPr>
@@ -20427,7 +21610,7 @@
       </p:sp>
       <p:sp>
         <p:nvSpPr>
-          <p:cNvPr id="274" name="Google Shape;274;p32"/>
+          <p:cNvPr id="282" name="Google Shape;282;p33"/>
           <p:cNvSpPr txBox="1"/>
           <p:nvPr/>
         </p:nvSpPr>
@@ -20882,7 +22065,7 @@
       </p:sp>
       <p:sp>
         <p:nvSpPr>
-          <p:cNvPr id="275" name="Google Shape;275;p32"/>
+          <p:cNvPr id="283" name="Google Shape;283;p33"/>
           <p:cNvSpPr txBox="1"/>
           <p:nvPr/>
         </p:nvSpPr>
@@ -21168,7 +22351,7 @@
       </p:sp>
       <p:sp>
         <p:nvSpPr>
-          <p:cNvPr id="276" name="Google Shape;276;p32"/>
+          <p:cNvPr id="284" name="Google Shape;284;p33"/>
           <p:cNvSpPr txBox="1"/>
           <p:nvPr/>
         </p:nvSpPr>
@@ -21495,7 +22678,7 @@
       </p:sp>
       <p:sp>
         <p:nvSpPr>
-          <p:cNvPr id="277" name="Google Shape;277;p32"/>
+          <p:cNvPr id="285" name="Google Shape;285;p33"/>
           <p:cNvSpPr txBox="1"/>
           <p:nvPr/>
         </p:nvSpPr>
@@ -21831,7 +23014,7 @@
       </p:sp>
       <p:sp>
         <p:nvSpPr>
-          <p:cNvPr id="278" name="Google Shape;278;p32"/>
+          <p:cNvPr id="286" name="Google Shape;286;p33"/>
           <p:cNvSpPr txBox="1"/>
           <p:nvPr/>
         </p:nvSpPr>
@@ -22062,7 +23245,7 @@
       </p:sp>
       <p:sp>
         <p:nvSpPr>
-          <p:cNvPr id="279" name="Google Shape;279;p32"/>
+          <p:cNvPr id="287" name="Google Shape;287;p33"/>
           <p:cNvSpPr txBox="1"/>
           <p:nvPr/>
         </p:nvSpPr>
@@ -22185,7 +23368,7 @@
       </p:sp>
       <p:sp>
         <p:nvSpPr>
-          <p:cNvPr id="280" name="Google Shape;280;p32"/>
+          <p:cNvPr id="288" name="Google Shape;288;p33"/>
           <p:cNvSpPr txBox="1"/>
           <p:nvPr/>
         </p:nvSpPr>
@@ -22448,7 +23631,7 @@
       </p:sp>
       <p:sp>
         <p:nvSpPr>
-          <p:cNvPr id="281" name="Google Shape;281;p32"/>
+          <p:cNvPr id="289" name="Google Shape;289;p33"/>
           <p:cNvSpPr txBox="1"/>
           <p:nvPr/>
         </p:nvSpPr>
@@ -22748,7 +23931,7 @@
       </p:sp>
       <p:sp>
         <p:nvSpPr>
-          <p:cNvPr id="282" name="Google Shape;282;p32"/>
+          <p:cNvPr id="290" name="Google Shape;290;p33"/>
           <p:cNvSpPr txBox="1"/>
           <p:nvPr/>
         </p:nvSpPr>
@@ -23011,7 +24194,7 @@
       </p:sp>
       <p:sp>
         <p:nvSpPr>
-          <p:cNvPr id="283" name="Google Shape;283;p32"/>
+          <p:cNvPr id="291" name="Google Shape;291;p33"/>
           <p:cNvSpPr txBox="1"/>
           <p:nvPr/>
         </p:nvSpPr>
@@ -23210,7 +24393,7 @@
       </p:sp>
       <p:sp>
         <p:nvSpPr>
-          <p:cNvPr id="284" name="Google Shape;284;p32"/>
+          <p:cNvPr id="292" name="Google Shape;292;p33"/>
           <p:cNvSpPr txBox="1"/>
           <p:nvPr/>
         </p:nvSpPr>
@@ -23473,7 +24656,7 @@
       </p:sp>
       <p:sp>
         <p:nvSpPr>
-          <p:cNvPr id="285" name="Google Shape;285;p32"/>
+          <p:cNvPr id="293" name="Google Shape;293;p33"/>
           <p:cNvSpPr txBox="1"/>
           <p:nvPr/>
         </p:nvSpPr>
@@ -23661,801 +24844,6 @@
             <a:endParaRPr sz="1200">
               <a:solidFill>
                 <a:schemeClr val="dk1"/>
-              </a:solidFill>
-              <a:latin typeface="Calibri"/>
-              <a:ea typeface="Calibri"/>
-              <a:cs typeface="Calibri"/>
-              <a:sym typeface="Calibri"/>
-            </a:endParaRPr>
-          </a:p>
-        </p:txBody>
-      </p:sp>
-    </p:spTree>
-  </p:cSld>
-  <p:clrMapOvr>
-    <a:masterClrMapping/>
-  </p:clrMapOvr>
-</p:sld>
-</file>
-
-<file path=ppt/slides/slide19.xml><?xml version="1.0" encoding="utf-8"?>
-<p:sld xmlns:a="http://schemas.openxmlformats.org/drawingml/2006/main" xmlns:r="http://schemas.openxmlformats.org/officeDocument/2006/relationships" xmlns:p="http://schemas.openxmlformats.org/presentationml/2006/main">
-  <p:cSld>
-    <p:spTree>
-      <p:nvGrpSpPr>
-        <p:cNvPr id="1" name="Shape 289"/>
-        <p:cNvGrpSpPr/>
-        <p:nvPr/>
-      </p:nvGrpSpPr>
-      <p:grpSpPr>
-        <a:xfrm>
-          <a:off x="0" y="0"/>
-          <a:ext cx="0" cy="0"/>
-          <a:chOff x="0" y="0"/>
-          <a:chExt cx="0" cy="0"/>
-        </a:xfrm>
-      </p:grpSpPr>
-      <p:sp>
-        <p:nvSpPr>
-          <p:cNvPr id="290" name="Google Shape;290;p33"/>
-          <p:cNvSpPr txBox="1"/>
-          <p:nvPr/>
-        </p:nvSpPr>
-        <p:spPr>
-          <a:xfrm>
-            <a:off x="72300" y="76200"/>
-            <a:ext cx="3676200" cy="326400"/>
-          </a:xfrm>
-          <a:prstGeom prst="rect">
-            <a:avLst/>
-          </a:prstGeom>
-          <a:noFill/>
-          <a:ln>
-            <a:noFill/>
-          </a:ln>
-        </p:spPr>
-        <p:txBody>
-          <a:bodyPr spcFirstLastPara="1" wrap="square" lIns="9125" tIns="9125" rIns="9125" bIns="9125" anchor="t" anchorCtr="0">
-            <a:spAutoFit/>
-          </a:bodyPr>
-          <a:lstStyle/>
-          <a:p>
-            <a:pPr marL="0" lvl="0" indent="0" algn="l" rtl="0">
-              <a:spcBef>
-                <a:spcPts val="0"/>
-              </a:spcBef>
-              <a:spcAft>
-                <a:spcPts val="0"/>
-              </a:spcAft>
-              <a:buNone/>
-            </a:pPr>
-            <a:r>
-              <a:rPr lang="en" sz="2000" b="1">
-                <a:solidFill>
-                  <a:schemeClr val="dk1"/>
-                </a:solidFill>
-                <a:latin typeface="Calibri"/>
-                <a:ea typeface="Calibri"/>
-                <a:cs typeface="Calibri"/>
-                <a:sym typeface="Calibri"/>
-              </a:rPr>
-              <a:t>Are Mass Layoffs Coming Soon?</a:t>
-            </a:r>
-            <a:endParaRPr sz="2000" b="1">
-              <a:solidFill>
-                <a:schemeClr val="dk1"/>
-              </a:solidFill>
-              <a:latin typeface="Calibri"/>
-              <a:ea typeface="Calibri"/>
-              <a:cs typeface="Calibri"/>
-              <a:sym typeface="Calibri"/>
-            </a:endParaRPr>
-          </a:p>
-        </p:txBody>
-      </p:sp>
-      <p:sp>
-        <p:nvSpPr>
-          <p:cNvPr id="291" name="Google Shape;291;p33"/>
-          <p:cNvSpPr txBox="1"/>
-          <p:nvPr/>
-        </p:nvSpPr>
-        <p:spPr>
-          <a:xfrm>
-            <a:off x="72300" y="445500"/>
-            <a:ext cx="4321500" cy="1385400"/>
-          </a:xfrm>
-          <a:prstGeom prst="rect">
-            <a:avLst/>
-          </a:prstGeom>
-          <a:solidFill>
-            <a:srgbClr val="FFF2CC"/>
-          </a:solidFill>
-          <a:ln w="9525" cap="flat" cmpd="sng">
-            <a:solidFill>
-              <a:srgbClr val="FF0000"/>
-            </a:solidFill>
-            <a:prstDash val="solid"/>
-            <a:round/>
-            <a:headEnd type="none" w="sm" len="sm"/>
-            <a:tailEnd type="none" w="sm" len="sm"/>
-          </a:ln>
-        </p:spPr>
-        <p:txBody>
-          <a:bodyPr spcFirstLastPara="1" wrap="square" lIns="91425" tIns="91425" rIns="91425" bIns="91425" anchor="t" anchorCtr="0">
-            <a:spAutoFit/>
-          </a:bodyPr>
-          <a:lstStyle/>
-          <a:p>
-            <a:pPr marL="0" lvl="0" indent="0" algn="l" rtl="0">
-              <a:spcBef>
-                <a:spcPts val="0"/>
-              </a:spcBef>
-              <a:spcAft>
-                <a:spcPts val="0"/>
-              </a:spcAft>
-              <a:buNone/>
-            </a:pPr>
-            <a:r>
-              <a:rPr lang="en" sz="1300" b="1">
-                <a:solidFill>
-                  <a:srgbClr val="FF0000"/>
-                </a:solidFill>
-                <a:latin typeface="Calibri"/>
-                <a:ea typeface="Calibri"/>
-                <a:cs typeface="Calibri"/>
-                <a:sym typeface="Calibri"/>
-              </a:rPr>
-              <a:t>Are Mass Layoffs Coming Soon?</a:t>
-            </a:r>
-            <a:endParaRPr sz="1300" b="1">
-              <a:solidFill>
-                <a:srgbClr val="FF0000"/>
-              </a:solidFill>
-              <a:latin typeface="Calibri"/>
-              <a:ea typeface="Calibri"/>
-              <a:cs typeface="Calibri"/>
-              <a:sym typeface="Calibri"/>
-            </a:endParaRPr>
-          </a:p>
-          <a:p>
-            <a:pPr marL="0" lvl="0" indent="0" algn="l" rtl="0">
-              <a:spcBef>
-                <a:spcPts val="0"/>
-              </a:spcBef>
-              <a:spcAft>
-                <a:spcPts val="0"/>
-              </a:spcAft>
-              <a:buNone/>
-            </a:pPr>
-            <a:r>
-              <a:rPr lang="en" sz="1300" u="sng">
-                <a:solidFill>
-                  <a:schemeClr val="hlink"/>
-                </a:solidFill>
-                <a:latin typeface="Calibri"/>
-                <a:ea typeface="Calibri"/>
-                <a:cs typeface="Calibri"/>
-                <a:sym typeface="Calibri"/>
-                <a:hlinkClick r:id="rId3"/>
-              </a:rPr>
-              <a:t>https://www.youtube.com/watch?v=5w-9wpAR1NQ</a:t>
-            </a:r>
-            <a:r>
-              <a:rPr lang="en" sz="1300">
-                <a:solidFill>
-                  <a:srgbClr val="0F0F0F"/>
-                </a:solidFill>
-                <a:latin typeface="Calibri"/>
-                <a:ea typeface="Calibri"/>
-                <a:cs typeface="Calibri"/>
-                <a:sym typeface="Calibri"/>
-              </a:rPr>
-              <a:t> </a:t>
-            </a:r>
-            <a:endParaRPr sz="1300">
-              <a:solidFill>
-                <a:srgbClr val="0F0F0F"/>
-              </a:solidFill>
-              <a:latin typeface="Calibri"/>
-              <a:ea typeface="Calibri"/>
-              <a:cs typeface="Calibri"/>
-              <a:sym typeface="Calibri"/>
-            </a:endParaRPr>
-          </a:p>
-          <a:p>
-            <a:pPr marL="0" lvl="0" indent="0" algn="l" rtl="0">
-              <a:spcBef>
-                <a:spcPts val="0"/>
-              </a:spcBef>
-              <a:spcAft>
-                <a:spcPts val="0"/>
-              </a:spcAft>
-              <a:buNone/>
-            </a:pPr>
-            <a:r>
-              <a:rPr lang="en" sz="1300">
-                <a:solidFill>
-                  <a:srgbClr val="0F0F0F"/>
-                </a:solidFill>
-                <a:latin typeface="Calibri"/>
-                <a:ea typeface="Calibri"/>
-                <a:cs typeface="Calibri"/>
-                <a:sym typeface="Calibri"/>
-              </a:rPr>
-              <a:t>Mass Layoffs are likely because of:</a:t>
-            </a:r>
-            <a:endParaRPr sz="1300">
-              <a:solidFill>
-                <a:srgbClr val="0F0F0F"/>
-              </a:solidFill>
-              <a:latin typeface="Calibri"/>
-              <a:ea typeface="Calibri"/>
-              <a:cs typeface="Calibri"/>
-              <a:sym typeface="Calibri"/>
-            </a:endParaRPr>
-          </a:p>
-          <a:p>
-            <a:pPr marL="0" lvl="0" indent="0" algn="l" rtl="0">
-              <a:spcBef>
-                <a:spcPts val="0"/>
-              </a:spcBef>
-              <a:spcAft>
-                <a:spcPts val="0"/>
-              </a:spcAft>
-              <a:buNone/>
-            </a:pPr>
-            <a:r>
-              <a:rPr lang="en" sz="1300">
-                <a:solidFill>
-                  <a:srgbClr val="0F0F0F"/>
-                </a:solidFill>
-                <a:latin typeface="Calibri"/>
-                <a:ea typeface="Calibri"/>
-                <a:cs typeface="Calibri"/>
-                <a:sym typeface="Calibri"/>
-              </a:rPr>
-              <a:t>.. recession</a:t>
-            </a:r>
-            <a:endParaRPr sz="1300">
-              <a:solidFill>
-                <a:srgbClr val="0F0F0F"/>
-              </a:solidFill>
-              <a:latin typeface="Calibri"/>
-              <a:ea typeface="Calibri"/>
-              <a:cs typeface="Calibri"/>
-              <a:sym typeface="Calibri"/>
-            </a:endParaRPr>
-          </a:p>
-          <a:p>
-            <a:pPr marL="0" lvl="0" indent="0" algn="l" rtl="0">
-              <a:spcBef>
-                <a:spcPts val="0"/>
-              </a:spcBef>
-              <a:spcAft>
-                <a:spcPts val="0"/>
-              </a:spcAft>
-              <a:buNone/>
-            </a:pPr>
-            <a:r>
-              <a:rPr lang="en" sz="1300">
-                <a:solidFill>
-                  <a:srgbClr val="0F0F0F"/>
-                </a:solidFill>
-                <a:latin typeface="Calibri"/>
-                <a:ea typeface="Calibri"/>
-                <a:cs typeface="Calibri"/>
-                <a:sym typeface="Calibri"/>
-              </a:rPr>
-              <a:t>.. cutting cost via optimization (using AI) </a:t>
-            </a:r>
-            <a:endParaRPr sz="1300">
-              <a:solidFill>
-                <a:srgbClr val="0F0F0F"/>
-              </a:solidFill>
-              <a:latin typeface="Calibri"/>
-              <a:ea typeface="Calibri"/>
-              <a:cs typeface="Calibri"/>
-              <a:sym typeface="Calibri"/>
-            </a:endParaRPr>
-          </a:p>
-          <a:p>
-            <a:pPr marL="0" lvl="0" indent="0" algn="l" rtl="0">
-              <a:spcBef>
-                <a:spcPts val="0"/>
-              </a:spcBef>
-              <a:spcAft>
-                <a:spcPts val="0"/>
-              </a:spcAft>
-              <a:buNone/>
-            </a:pPr>
-            <a:r>
-              <a:rPr lang="en" sz="1300" u="sng">
-                <a:solidFill>
-                  <a:schemeClr val="hlink"/>
-                </a:solidFill>
-                <a:latin typeface="Calibri"/>
-                <a:ea typeface="Calibri"/>
-                <a:cs typeface="Calibri"/>
-                <a:sym typeface="Calibri"/>
-                <a:hlinkClick r:id="rId4"/>
-              </a:rPr>
-              <a:t>https://www.warntracker.com</a:t>
-            </a:r>
-            <a:r>
-              <a:rPr lang="en" sz="1300">
-                <a:solidFill>
-                  <a:srgbClr val="0F0F0F"/>
-                </a:solidFill>
-                <a:latin typeface="Calibri"/>
-                <a:ea typeface="Calibri"/>
-                <a:cs typeface="Calibri"/>
-                <a:sym typeface="Calibri"/>
-              </a:rPr>
-              <a:t> </a:t>
-            </a:r>
-            <a:endParaRPr sz="1300">
-              <a:solidFill>
-                <a:srgbClr val="0F0F0F"/>
-              </a:solidFill>
-              <a:latin typeface="Calibri"/>
-              <a:ea typeface="Calibri"/>
-              <a:cs typeface="Calibri"/>
-              <a:sym typeface="Calibri"/>
-            </a:endParaRPr>
-          </a:p>
-        </p:txBody>
-      </p:sp>
-      <p:pic>
-        <p:nvPicPr>
-          <p:cNvPr id="292" name="Google Shape;292;p33"/>
-          <p:cNvPicPr preferRelativeResize="0"/>
-          <p:nvPr/>
-        </p:nvPicPr>
-        <p:blipFill rotWithShape="1">
-          <a:blip r:embed="rId5" cstate="email">
-            <a:alphaModFix/>
-            <a:extLst>
-              <a:ext uri="{28A0092B-C50C-407E-A947-70E740481C1C}">
-                <a14:useLocalDpi xmlns:a14="http://schemas.microsoft.com/office/drawing/2010/main"/>
-              </a:ext>
-            </a:extLst>
-          </a:blip>
-          <a:srcRect/>
-          <a:stretch/>
-        </p:blipFill>
-        <p:spPr>
-          <a:xfrm>
-            <a:off x="4610550" y="140700"/>
-            <a:ext cx="3288436" cy="1785600"/>
-          </a:xfrm>
-          <a:prstGeom prst="rect">
-            <a:avLst/>
-          </a:prstGeom>
-          <a:noFill/>
-          <a:ln>
-            <a:noFill/>
-          </a:ln>
-        </p:spPr>
-      </p:pic>
-      <p:sp>
-        <p:nvSpPr>
-          <p:cNvPr id="293" name="Google Shape;293;p33"/>
-          <p:cNvSpPr txBox="1"/>
-          <p:nvPr/>
-        </p:nvSpPr>
-        <p:spPr>
-          <a:xfrm>
-            <a:off x="72300" y="1915125"/>
-            <a:ext cx="4321500" cy="2786100"/>
-          </a:xfrm>
-          <a:prstGeom prst="rect">
-            <a:avLst/>
-          </a:prstGeom>
-          <a:solidFill>
-            <a:srgbClr val="FFF2CC"/>
-          </a:solidFill>
-          <a:ln w="9525" cap="flat" cmpd="sng">
-            <a:solidFill>
-              <a:srgbClr val="FF0000"/>
-            </a:solidFill>
-            <a:prstDash val="solid"/>
-            <a:round/>
-            <a:headEnd type="none" w="sm" len="sm"/>
-            <a:tailEnd type="none" w="sm" len="sm"/>
-          </a:ln>
-        </p:spPr>
-        <p:txBody>
-          <a:bodyPr spcFirstLastPara="1" wrap="square" lIns="91425" tIns="91425" rIns="91425" bIns="91425" anchor="t" anchorCtr="0">
-            <a:spAutoFit/>
-          </a:bodyPr>
-          <a:lstStyle/>
-          <a:p>
-            <a:pPr marL="0" lvl="0" indent="0" algn="l" rtl="0">
-              <a:spcBef>
-                <a:spcPts val="0"/>
-              </a:spcBef>
-              <a:spcAft>
-                <a:spcPts val="0"/>
-              </a:spcAft>
-              <a:buNone/>
-            </a:pPr>
-            <a:r>
-              <a:rPr lang="en" sz="1300" b="1">
-                <a:solidFill>
-                  <a:srgbClr val="FF0000"/>
-                </a:solidFill>
-                <a:latin typeface="Calibri"/>
-                <a:ea typeface="Calibri"/>
-                <a:cs typeface="Calibri"/>
-                <a:sym typeface="Calibri"/>
-              </a:rPr>
-              <a:t>"I Lost My Job Thanks to This AI Tool"</a:t>
-            </a:r>
-            <a:endParaRPr sz="1300" b="1">
-              <a:solidFill>
-                <a:srgbClr val="FF0000"/>
-              </a:solidFill>
-              <a:latin typeface="Calibri"/>
-              <a:ea typeface="Calibri"/>
-              <a:cs typeface="Calibri"/>
-              <a:sym typeface="Calibri"/>
-            </a:endParaRPr>
-          </a:p>
-          <a:p>
-            <a:pPr marL="0" lvl="0" indent="0" algn="l" rtl="0">
-              <a:spcBef>
-                <a:spcPts val="0"/>
-              </a:spcBef>
-              <a:spcAft>
-                <a:spcPts val="0"/>
-              </a:spcAft>
-              <a:buNone/>
-            </a:pPr>
-            <a:r>
-              <a:rPr lang="en" sz="1300" u="sng">
-                <a:solidFill>
-                  <a:schemeClr val="hlink"/>
-                </a:solidFill>
-                <a:latin typeface="Calibri"/>
-                <a:ea typeface="Calibri"/>
-                <a:cs typeface="Calibri"/>
-                <a:sym typeface="Calibri"/>
-                <a:hlinkClick r:id="rId6"/>
-              </a:rPr>
-              <a:t>https://www.youtube.com/watch?v=0Q4UOdIQJZQ</a:t>
-            </a:r>
-            <a:r>
-              <a:rPr lang="en" sz="1300">
-                <a:solidFill>
-                  <a:srgbClr val="0F0F0F"/>
-                </a:solidFill>
-                <a:latin typeface="Calibri"/>
-                <a:ea typeface="Calibri"/>
-                <a:cs typeface="Calibri"/>
-                <a:sym typeface="Calibri"/>
-              </a:rPr>
-              <a:t> </a:t>
-            </a:r>
-            <a:endParaRPr sz="1300">
-              <a:solidFill>
-                <a:srgbClr val="0F0F0F"/>
-              </a:solidFill>
-              <a:latin typeface="Calibri"/>
-              <a:ea typeface="Calibri"/>
-              <a:cs typeface="Calibri"/>
-              <a:sym typeface="Calibri"/>
-            </a:endParaRPr>
-          </a:p>
-          <a:p>
-            <a:pPr marL="0" lvl="0" indent="0" algn="l" rtl="0">
-              <a:spcBef>
-                <a:spcPts val="0"/>
-              </a:spcBef>
-              <a:spcAft>
-                <a:spcPts val="0"/>
-              </a:spcAft>
-              <a:buNone/>
-            </a:pPr>
-            <a:r>
-              <a:rPr lang="en" sz="1300">
-                <a:solidFill>
-                  <a:srgbClr val="0F0F0F"/>
-                </a:solidFill>
-                <a:latin typeface="Calibri"/>
-                <a:ea typeface="Calibri"/>
-                <a:cs typeface="Calibri"/>
-                <a:sym typeface="Calibri"/>
-              </a:rPr>
-              <a:t>Examples of (massive) firings already happening:</a:t>
-            </a:r>
-            <a:endParaRPr sz="1300">
-              <a:solidFill>
-                <a:srgbClr val="0F0F0F"/>
-              </a:solidFill>
-              <a:latin typeface="Calibri"/>
-              <a:ea typeface="Calibri"/>
-              <a:cs typeface="Calibri"/>
-              <a:sym typeface="Calibri"/>
-            </a:endParaRPr>
-          </a:p>
-          <a:p>
-            <a:pPr marL="228600" lvl="0" indent="-196850" algn="l" rtl="0">
-              <a:spcBef>
-                <a:spcPts val="0"/>
-              </a:spcBef>
-              <a:spcAft>
-                <a:spcPts val="0"/>
-              </a:spcAft>
-              <a:buClr>
-                <a:srgbClr val="0F0F0F"/>
-              </a:buClr>
-              <a:buSzPts val="1300"/>
-              <a:buFont typeface="Calibri"/>
-              <a:buChar char="●"/>
-            </a:pPr>
-            <a:r>
-              <a:rPr lang="en" sz="1300">
-                <a:solidFill>
-                  <a:srgbClr val="0F0F0F"/>
-                </a:solidFill>
-                <a:latin typeface="Calibri"/>
-                <a:ea typeface="Calibri"/>
-                <a:cs typeface="Calibri"/>
-                <a:sym typeface="Calibri"/>
-              </a:rPr>
-              <a:t>translation , data entry, call center representatives, bank tellers, fraud detection specialists, meteorologists, manufacturing - assembly joba, defect detection, travel agents / assistants</a:t>
-            </a:r>
-            <a:endParaRPr sz="1300">
-              <a:solidFill>
-                <a:srgbClr val="0F0F0F"/>
-              </a:solidFill>
-              <a:latin typeface="Calibri"/>
-              <a:ea typeface="Calibri"/>
-              <a:cs typeface="Calibri"/>
-              <a:sym typeface="Calibri"/>
-            </a:endParaRPr>
-          </a:p>
-          <a:p>
-            <a:pPr marL="0" lvl="0" indent="0" algn="l" rtl="0">
-              <a:spcBef>
-                <a:spcPts val="0"/>
-              </a:spcBef>
-              <a:spcAft>
-                <a:spcPts val="0"/>
-              </a:spcAft>
-              <a:buNone/>
-            </a:pPr>
-            <a:endParaRPr sz="1300">
-              <a:solidFill>
-                <a:srgbClr val="0F0F0F"/>
-              </a:solidFill>
-              <a:latin typeface="Calibri"/>
-              <a:ea typeface="Calibri"/>
-              <a:cs typeface="Calibri"/>
-              <a:sym typeface="Calibri"/>
-            </a:endParaRPr>
-          </a:p>
-          <a:p>
-            <a:pPr marL="0" lvl="0" indent="0" algn="l" rtl="0">
-              <a:spcBef>
-                <a:spcPts val="0"/>
-              </a:spcBef>
-              <a:spcAft>
-                <a:spcPts val="0"/>
-              </a:spcAft>
-              <a:buNone/>
-            </a:pPr>
-            <a:r>
-              <a:rPr lang="en" sz="1300">
-                <a:solidFill>
-                  <a:srgbClr val="0F0F0F"/>
-                </a:solidFill>
-                <a:latin typeface="Calibri"/>
-                <a:ea typeface="Calibri"/>
-                <a:cs typeface="Calibri"/>
-                <a:sym typeface="Calibri"/>
-              </a:rPr>
-              <a:t>Amazon, Walmart - lots of human-free solutions (for example, picking, packing, shipping orders)</a:t>
-            </a:r>
-            <a:endParaRPr sz="1300">
-              <a:solidFill>
-                <a:srgbClr val="0F0F0F"/>
-              </a:solidFill>
-              <a:latin typeface="Calibri"/>
-              <a:ea typeface="Calibri"/>
-              <a:cs typeface="Calibri"/>
-              <a:sym typeface="Calibri"/>
-            </a:endParaRPr>
-          </a:p>
-          <a:p>
-            <a:pPr marL="0" lvl="0" indent="0" algn="l" rtl="0">
-              <a:spcBef>
-                <a:spcPts val="0"/>
-              </a:spcBef>
-              <a:spcAft>
-                <a:spcPts val="0"/>
-              </a:spcAft>
-              <a:buNone/>
-            </a:pPr>
-            <a:endParaRPr sz="1300">
-              <a:solidFill>
-                <a:srgbClr val="0F0F0F"/>
-              </a:solidFill>
-              <a:latin typeface="Calibri"/>
-              <a:ea typeface="Calibri"/>
-              <a:cs typeface="Calibri"/>
-              <a:sym typeface="Calibri"/>
-            </a:endParaRPr>
-          </a:p>
-          <a:p>
-            <a:pPr marL="0" lvl="0" indent="0" algn="l" rtl="0">
-              <a:spcBef>
-                <a:spcPts val="0"/>
-              </a:spcBef>
-              <a:spcAft>
-                <a:spcPts val="0"/>
-              </a:spcAft>
-              <a:buNone/>
-            </a:pPr>
-            <a:r>
-              <a:rPr lang="en" sz="1300">
-                <a:solidFill>
-                  <a:srgbClr val="0F0F0F"/>
-                </a:solidFill>
-                <a:latin typeface="Calibri"/>
-                <a:ea typeface="Calibri"/>
-                <a:cs typeface="Calibri"/>
-                <a:sym typeface="Calibri"/>
-              </a:rPr>
-              <a:t>At risk: truck drivers, librarians, entry-level programmers, legal assistants, writers, editors, proof-reading</a:t>
-            </a:r>
-            <a:endParaRPr sz="1300">
-              <a:solidFill>
-                <a:srgbClr val="0F0F0F"/>
-              </a:solidFill>
-              <a:latin typeface="Calibri"/>
-              <a:ea typeface="Calibri"/>
-              <a:cs typeface="Calibri"/>
-              <a:sym typeface="Calibri"/>
-            </a:endParaRPr>
-          </a:p>
-        </p:txBody>
-      </p:sp>
-      <p:pic>
-        <p:nvPicPr>
-          <p:cNvPr id="294" name="Google Shape;294;p33"/>
-          <p:cNvPicPr preferRelativeResize="0"/>
-          <p:nvPr/>
-        </p:nvPicPr>
-        <p:blipFill>
-          <a:blip r:embed="rId7" cstate="email">
-            <a:alphaModFix/>
-            <a:extLst>
-              <a:ext uri="{28A0092B-C50C-407E-A947-70E740481C1C}">
-                <a14:useLocalDpi xmlns:a14="http://schemas.microsoft.com/office/drawing/2010/main"/>
-              </a:ext>
-            </a:extLst>
-          </a:blip>
-          <a:stretch>
-            <a:fillRect/>
-          </a:stretch>
-        </p:blipFill>
-        <p:spPr>
-          <a:xfrm>
-            <a:off x="4610550" y="2020080"/>
-            <a:ext cx="3288427" cy="1801674"/>
-          </a:xfrm>
-          <a:prstGeom prst="rect">
-            <a:avLst/>
-          </a:prstGeom>
-          <a:noFill/>
-          <a:ln>
-            <a:noFill/>
-          </a:ln>
-        </p:spPr>
-      </p:pic>
-      <p:sp>
-        <p:nvSpPr>
-          <p:cNvPr id="295" name="Google Shape;295;p33"/>
-          <p:cNvSpPr txBox="1"/>
-          <p:nvPr/>
-        </p:nvSpPr>
-        <p:spPr>
-          <a:xfrm>
-            <a:off x="4610550" y="4203275"/>
-            <a:ext cx="4437900" cy="861900"/>
-          </a:xfrm>
-          <a:prstGeom prst="rect">
-            <a:avLst/>
-          </a:prstGeom>
-          <a:solidFill>
-            <a:srgbClr val="FFF2CC"/>
-          </a:solidFill>
-          <a:ln w="9525" cap="flat" cmpd="sng">
-            <a:solidFill>
-              <a:srgbClr val="FF0000"/>
-            </a:solidFill>
-            <a:prstDash val="solid"/>
-            <a:round/>
-            <a:headEnd type="none" w="sm" len="sm"/>
-            <a:tailEnd type="none" w="sm" len="sm"/>
-          </a:ln>
-        </p:spPr>
-        <p:txBody>
-          <a:bodyPr spcFirstLastPara="1" wrap="square" lIns="91425" tIns="91425" rIns="91425" bIns="91425" anchor="t" anchorCtr="0">
-            <a:spAutoFit/>
-          </a:bodyPr>
-          <a:lstStyle/>
-          <a:p>
-            <a:pPr marL="0" lvl="0" indent="0" algn="l" rtl="0">
-              <a:spcBef>
-                <a:spcPts val="0"/>
-              </a:spcBef>
-              <a:spcAft>
-                <a:spcPts val="0"/>
-              </a:spcAft>
-              <a:buNone/>
-            </a:pPr>
-            <a:r>
-              <a:rPr lang="en" sz="1300">
-                <a:solidFill>
-                  <a:srgbClr val="0F0F0F"/>
-                </a:solidFill>
-                <a:latin typeface="Calibri"/>
-                <a:ea typeface="Calibri"/>
-                <a:cs typeface="Calibri"/>
-                <a:sym typeface="Calibri"/>
-              </a:rPr>
-              <a:t>Google cuts over 1,000 jobs in its voice assistance, hardware teams as Fitbit founders leave</a:t>
-            </a:r>
-            <a:endParaRPr sz="1300">
-              <a:solidFill>
-                <a:srgbClr val="0F0F0F"/>
-              </a:solidFill>
-              <a:latin typeface="Calibri"/>
-              <a:ea typeface="Calibri"/>
-              <a:cs typeface="Calibri"/>
-              <a:sym typeface="Calibri"/>
-            </a:endParaRPr>
-          </a:p>
-          <a:p>
-            <a:pPr marL="0" lvl="0" indent="0" algn="l" rtl="0">
-              <a:spcBef>
-                <a:spcPts val="0"/>
-              </a:spcBef>
-              <a:spcAft>
-                <a:spcPts val="0"/>
-              </a:spcAft>
-              <a:buNone/>
-            </a:pPr>
-            <a:r>
-              <a:rPr lang="en" sz="900" u="sng">
-                <a:solidFill>
-                  <a:schemeClr val="hlink"/>
-                </a:solidFill>
-                <a:latin typeface="Calibri"/>
-                <a:ea typeface="Calibri"/>
-                <a:cs typeface="Calibri"/>
-                <a:sym typeface="Calibri"/>
-                <a:hlinkClick r:id="rId8"/>
-              </a:rPr>
-              <a:t>https://techcrunch.com/2024/01/10/google-cuts-hundreds-of-jobs-in-its-voice-assistance-hardware-teams-as-fitbit-founders-leave/</a:t>
-            </a:r>
-            <a:r>
-              <a:rPr lang="en" sz="900">
-                <a:solidFill>
-                  <a:srgbClr val="0F0F0F"/>
-                </a:solidFill>
-                <a:latin typeface="Calibri"/>
-                <a:ea typeface="Calibri"/>
-                <a:cs typeface="Calibri"/>
-                <a:sym typeface="Calibri"/>
-              </a:rPr>
-              <a:t> </a:t>
-            </a:r>
-            <a:endParaRPr sz="900">
-              <a:solidFill>
-                <a:srgbClr val="0F0F0F"/>
               </a:solidFill>
               <a:latin typeface="Calibri"/>
               <a:ea typeface="Calibri"/>
@@ -25020,7 +25408,7 @@
   <p:cSld>
     <p:spTree>
       <p:nvGrpSpPr>
-        <p:cNvPr id="1" name="Shape 299"/>
+        <p:cNvPr id="1" name="Shape 297"/>
         <p:cNvGrpSpPr/>
         <p:nvPr/>
       </p:nvGrpSpPr>
@@ -25034,7 +25422,7 @@
       </p:grpSpPr>
       <p:sp>
         <p:nvSpPr>
-          <p:cNvPr id="300" name="Google Shape;300;p34"/>
+          <p:cNvPr id="298" name="Google Shape;298;p34"/>
           <p:cNvSpPr txBox="1"/>
           <p:nvPr/>
         </p:nvSpPr>
@@ -25076,7 +25464,7 @@
                 <a:cs typeface="Calibri"/>
                 <a:sym typeface="Calibri"/>
               </a:rPr>
-              <a:t>New Jobs </a:t>
+              <a:t>Are Mass Layoffs Coming Soon?</a:t>
             </a:r>
             <a:endParaRPr sz="2000" b="1">
               <a:solidFill>
@@ -25092,7 +25480,802 @@
       </p:sp>
       <p:sp>
         <p:nvSpPr>
+          <p:cNvPr id="299" name="Google Shape;299;p34"/>
+          <p:cNvSpPr txBox="1"/>
+          <p:nvPr/>
+        </p:nvSpPr>
+        <p:spPr>
+          <a:xfrm>
+            <a:off x="72300" y="445500"/>
+            <a:ext cx="4321500" cy="1385400"/>
+          </a:xfrm>
+          <a:prstGeom prst="rect">
+            <a:avLst/>
+          </a:prstGeom>
+          <a:solidFill>
+            <a:srgbClr val="FFF2CC"/>
+          </a:solidFill>
+          <a:ln w="9525" cap="flat" cmpd="sng">
+            <a:solidFill>
+              <a:srgbClr val="FF0000"/>
+            </a:solidFill>
+            <a:prstDash val="solid"/>
+            <a:round/>
+            <a:headEnd type="none" w="sm" len="sm"/>
+            <a:tailEnd type="none" w="sm" len="sm"/>
+          </a:ln>
+        </p:spPr>
+        <p:txBody>
+          <a:bodyPr spcFirstLastPara="1" wrap="square" lIns="91425" tIns="91425" rIns="91425" bIns="91425" anchor="t" anchorCtr="0">
+            <a:spAutoFit/>
+          </a:bodyPr>
+          <a:lstStyle/>
+          <a:p>
+            <a:pPr marL="0" lvl="0" indent="0" algn="l" rtl="0">
+              <a:spcBef>
+                <a:spcPts val="0"/>
+              </a:spcBef>
+              <a:spcAft>
+                <a:spcPts val="0"/>
+              </a:spcAft>
+              <a:buNone/>
+            </a:pPr>
+            <a:r>
+              <a:rPr lang="en" sz="1300" b="1">
+                <a:solidFill>
+                  <a:srgbClr val="FF0000"/>
+                </a:solidFill>
+                <a:latin typeface="Calibri"/>
+                <a:ea typeface="Calibri"/>
+                <a:cs typeface="Calibri"/>
+                <a:sym typeface="Calibri"/>
+              </a:rPr>
+              <a:t>Are Mass Layoffs Coming Soon?</a:t>
+            </a:r>
+            <a:endParaRPr sz="1300" b="1">
+              <a:solidFill>
+                <a:srgbClr val="FF0000"/>
+              </a:solidFill>
+              <a:latin typeface="Calibri"/>
+              <a:ea typeface="Calibri"/>
+              <a:cs typeface="Calibri"/>
+              <a:sym typeface="Calibri"/>
+            </a:endParaRPr>
+          </a:p>
+          <a:p>
+            <a:pPr marL="0" lvl="0" indent="0" algn="l" rtl="0">
+              <a:spcBef>
+                <a:spcPts val="0"/>
+              </a:spcBef>
+              <a:spcAft>
+                <a:spcPts val="0"/>
+              </a:spcAft>
+              <a:buNone/>
+            </a:pPr>
+            <a:r>
+              <a:rPr lang="en" sz="1300" u="sng">
+                <a:solidFill>
+                  <a:schemeClr val="hlink"/>
+                </a:solidFill>
+                <a:latin typeface="Calibri"/>
+                <a:ea typeface="Calibri"/>
+                <a:cs typeface="Calibri"/>
+                <a:sym typeface="Calibri"/>
+                <a:hlinkClick r:id="rId3"/>
+              </a:rPr>
+              <a:t>https://www.youtube.com/watch?v=5w-9wpAR1NQ</a:t>
+            </a:r>
+            <a:r>
+              <a:rPr lang="en" sz="1300">
+                <a:solidFill>
+                  <a:srgbClr val="0F0F0F"/>
+                </a:solidFill>
+                <a:latin typeface="Calibri"/>
+                <a:ea typeface="Calibri"/>
+                <a:cs typeface="Calibri"/>
+                <a:sym typeface="Calibri"/>
+              </a:rPr>
+              <a:t> </a:t>
+            </a:r>
+            <a:endParaRPr sz="1300">
+              <a:solidFill>
+                <a:srgbClr val="0F0F0F"/>
+              </a:solidFill>
+              <a:latin typeface="Calibri"/>
+              <a:ea typeface="Calibri"/>
+              <a:cs typeface="Calibri"/>
+              <a:sym typeface="Calibri"/>
+            </a:endParaRPr>
+          </a:p>
+          <a:p>
+            <a:pPr marL="0" lvl="0" indent="0" algn="l" rtl="0">
+              <a:spcBef>
+                <a:spcPts val="0"/>
+              </a:spcBef>
+              <a:spcAft>
+                <a:spcPts val="0"/>
+              </a:spcAft>
+              <a:buNone/>
+            </a:pPr>
+            <a:r>
+              <a:rPr lang="en" sz="1300">
+                <a:solidFill>
+                  <a:srgbClr val="0F0F0F"/>
+                </a:solidFill>
+                <a:latin typeface="Calibri"/>
+                <a:ea typeface="Calibri"/>
+                <a:cs typeface="Calibri"/>
+                <a:sym typeface="Calibri"/>
+              </a:rPr>
+              <a:t>Mass Layoffs are likely because of:</a:t>
+            </a:r>
+            <a:endParaRPr sz="1300">
+              <a:solidFill>
+                <a:srgbClr val="0F0F0F"/>
+              </a:solidFill>
+              <a:latin typeface="Calibri"/>
+              <a:ea typeface="Calibri"/>
+              <a:cs typeface="Calibri"/>
+              <a:sym typeface="Calibri"/>
+            </a:endParaRPr>
+          </a:p>
+          <a:p>
+            <a:pPr marL="0" lvl="0" indent="0" algn="l" rtl="0">
+              <a:spcBef>
+                <a:spcPts val="0"/>
+              </a:spcBef>
+              <a:spcAft>
+                <a:spcPts val="0"/>
+              </a:spcAft>
+              <a:buNone/>
+            </a:pPr>
+            <a:r>
+              <a:rPr lang="en" sz="1300">
+                <a:solidFill>
+                  <a:srgbClr val="0F0F0F"/>
+                </a:solidFill>
+                <a:latin typeface="Calibri"/>
+                <a:ea typeface="Calibri"/>
+                <a:cs typeface="Calibri"/>
+                <a:sym typeface="Calibri"/>
+              </a:rPr>
+              <a:t>.. recession</a:t>
+            </a:r>
+            <a:endParaRPr sz="1300">
+              <a:solidFill>
+                <a:srgbClr val="0F0F0F"/>
+              </a:solidFill>
+              <a:latin typeface="Calibri"/>
+              <a:ea typeface="Calibri"/>
+              <a:cs typeface="Calibri"/>
+              <a:sym typeface="Calibri"/>
+            </a:endParaRPr>
+          </a:p>
+          <a:p>
+            <a:pPr marL="0" lvl="0" indent="0" algn="l" rtl="0">
+              <a:spcBef>
+                <a:spcPts val="0"/>
+              </a:spcBef>
+              <a:spcAft>
+                <a:spcPts val="0"/>
+              </a:spcAft>
+              <a:buNone/>
+            </a:pPr>
+            <a:r>
+              <a:rPr lang="en" sz="1300">
+                <a:solidFill>
+                  <a:srgbClr val="0F0F0F"/>
+                </a:solidFill>
+                <a:latin typeface="Calibri"/>
+                <a:ea typeface="Calibri"/>
+                <a:cs typeface="Calibri"/>
+                <a:sym typeface="Calibri"/>
+              </a:rPr>
+              <a:t>.. cutting cost via optimization (using AI) </a:t>
+            </a:r>
+            <a:endParaRPr sz="1300">
+              <a:solidFill>
+                <a:srgbClr val="0F0F0F"/>
+              </a:solidFill>
+              <a:latin typeface="Calibri"/>
+              <a:ea typeface="Calibri"/>
+              <a:cs typeface="Calibri"/>
+              <a:sym typeface="Calibri"/>
+            </a:endParaRPr>
+          </a:p>
+          <a:p>
+            <a:pPr marL="0" lvl="0" indent="0" algn="l" rtl="0">
+              <a:spcBef>
+                <a:spcPts val="0"/>
+              </a:spcBef>
+              <a:spcAft>
+                <a:spcPts val="0"/>
+              </a:spcAft>
+              <a:buNone/>
+            </a:pPr>
+            <a:r>
+              <a:rPr lang="en" sz="1300" u="sng">
+                <a:solidFill>
+                  <a:schemeClr val="hlink"/>
+                </a:solidFill>
+                <a:latin typeface="Calibri"/>
+                <a:ea typeface="Calibri"/>
+                <a:cs typeface="Calibri"/>
+                <a:sym typeface="Calibri"/>
+                <a:hlinkClick r:id="rId4"/>
+              </a:rPr>
+              <a:t>https://www.warntracker.com</a:t>
+            </a:r>
+            <a:r>
+              <a:rPr lang="en" sz="1300">
+                <a:solidFill>
+                  <a:srgbClr val="0F0F0F"/>
+                </a:solidFill>
+                <a:latin typeface="Calibri"/>
+                <a:ea typeface="Calibri"/>
+                <a:cs typeface="Calibri"/>
+                <a:sym typeface="Calibri"/>
+              </a:rPr>
+              <a:t> </a:t>
+            </a:r>
+            <a:endParaRPr sz="1300">
+              <a:solidFill>
+                <a:srgbClr val="0F0F0F"/>
+              </a:solidFill>
+              <a:latin typeface="Calibri"/>
+              <a:ea typeface="Calibri"/>
+              <a:cs typeface="Calibri"/>
+              <a:sym typeface="Calibri"/>
+            </a:endParaRPr>
+          </a:p>
+        </p:txBody>
+      </p:sp>
+      <p:pic>
+        <p:nvPicPr>
+          <p:cNvPr id="300" name="Google Shape;300;p34"/>
+          <p:cNvPicPr preferRelativeResize="0"/>
+          <p:nvPr/>
+        </p:nvPicPr>
+        <p:blipFill rotWithShape="1">
+          <a:blip r:embed="rId5" cstate="email">
+            <a:alphaModFix/>
+            <a:extLst>
+              <a:ext uri="{28A0092B-C50C-407E-A947-70E740481C1C}">
+                <a14:useLocalDpi xmlns:a14="http://schemas.microsoft.com/office/drawing/2010/main"/>
+              </a:ext>
+            </a:extLst>
+          </a:blip>
+          <a:srcRect/>
+          <a:stretch/>
+        </p:blipFill>
+        <p:spPr>
+          <a:xfrm>
+            <a:off x="4610550" y="140700"/>
+            <a:ext cx="3288436" cy="1785600"/>
+          </a:xfrm>
+          <a:prstGeom prst="rect">
+            <a:avLst/>
+          </a:prstGeom>
+          <a:noFill/>
+          <a:ln>
+            <a:noFill/>
+          </a:ln>
+        </p:spPr>
+      </p:pic>
+      <p:sp>
+        <p:nvSpPr>
           <p:cNvPr id="301" name="Google Shape;301;p34"/>
+          <p:cNvSpPr txBox="1"/>
+          <p:nvPr/>
+        </p:nvSpPr>
+        <p:spPr>
+          <a:xfrm>
+            <a:off x="72300" y="1915125"/>
+            <a:ext cx="4321500" cy="2786100"/>
+          </a:xfrm>
+          <a:prstGeom prst="rect">
+            <a:avLst/>
+          </a:prstGeom>
+          <a:solidFill>
+            <a:srgbClr val="FFF2CC"/>
+          </a:solidFill>
+          <a:ln w="9525" cap="flat" cmpd="sng">
+            <a:solidFill>
+              <a:srgbClr val="FF0000"/>
+            </a:solidFill>
+            <a:prstDash val="solid"/>
+            <a:round/>
+            <a:headEnd type="none" w="sm" len="sm"/>
+            <a:tailEnd type="none" w="sm" len="sm"/>
+          </a:ln>
+        </p:spPr>
+        <p:txBody>
+          <a:bodyPr spcFirstLastPara="1" wrap="square" lIns="91425" tIns="91425" rIns="91425" bIns="91425" anchor="t" anchorCtr="0">
+            <a:spAutoFit/>
+          </a:bodyPr>
+          <a:lstStyle/>
+          <a:p>
+            <a:pPr marL="0" lvl="0" indent="0" algn="l" rtl="0">
+              <a:spcBef>
+                <a:spcPts val="0"/>
+              </a:spcBef>
+              <a:spcAft>
+                <a:spcPts val="0"/>
+              </a:spcAft>
+              <a:buNone/>
+            </a:pPr>
+            <a:r>
+              <a:rPr lang="en" sz="1300" b="1">
+                <a:solidFill>
+                  <a:srgbClr val="FF0000"/>
+                </a:solidFill>
+                <a:latin typeface="Calibri"/>
+                <a:ea typeface="Calibri"/>
+                <a:cs typeface="Calibri"/>
+                <a:sym typeface="Calibri"/>
+              </a:rPr>
+              <a:t>"I Lost My Job Thanks to This AI Tool"</a:t>
+            </a:r>
+            <a:endParaRPr sz="1300" b="1">
+              <a:solidFill>
+                <a:srgbClr val="FF0000"/>
+              </a:solidFill>
+              <a:latin typeface="Calibri"/>
+              <a:ea typeface="Calibri"/>
+              <a:cs typeface="Calibri"/>
+              <a:sym typeface="Calibri"/>
+            </a:endParaRPr>
+          </a:p>
+          <a:p>
+            <a:pPr marL="0" lvl="0" indent="0" algn="l" rtl="0">
+              <a:spcBef>
+                <a:spcPts val="0"/>
+              </a:spcBef>
+              <a:spcAft>
+                <a:spcPts val="0"/>
+              </a:spcAft>
+              <a:buNone/>
+            </a:pPr>
+            <a:r>
+              <a:rPr lang="en" sz="1300" u="sng">
+                <a:solidFill>
+                  <a:schemeClr val="hlink"/>
+                </a:solidFill>
+                <a:latin typeface="Calibri"/>
+                <a:ea typeface="Calibri"/>
+                <a:cs typeface="Calibri"/>
+                <a:sym typeface="Calibri"/>
+                <a:hlinkClick r:id="rId6"/>
+              </a:rPr>
+              <a:t>https://www.youtube.com/watch?v=0Q4UOdIQJZQ</a:t>
+            </a:r>
+            <a:r>
+              <a:rPr lang="en" sz="1300">
+                <a:solidFill>
+                  <a:srgbClr val="0F0F0F"/>
+                </a:solidFill>
+                <a:latin typeface="Calibri"/>
+                <a:ea typeface="Calibri"/>
+                <a:cs typeface="Calibri"/>
+                <a:sym typeface="Calibri"/>
+              </a:rPr>
+              <a:t> </a:t>
+            </a:r>
+            <a:endParaRPr sz="1300">
+              <a:solidFill>
+                <a:srgbClr val="0F0F0F"/>
+              </a:solidFill>
+              <a:latin typeface="Calibri"/>
+              <a:ea typeface="Calibri"/>
+              <a:cs typeface="Calibri"/>
+              <a:sym typeface="Calibri"/>
+            </a:endParaRPr>
+          </a:p>
+          <a:p>
+            <a:pPr marL="0" lvl="0" indent="0" algn="l" rtl="0">
+              <a:spcBef>
+                <a:spcPts val="0"/>
+              </a:spcBef>
+              <a:spcAft>
+                <a:spcPts val="0"/>
+              </a:spcAft>
+              <a:buNone/>
+            </a:pPr>
+            <a:r>
+              <a:rPr lang="en" sz="1300">
+                <a:solidFill>
+                  <a:srgbClr val="0F0F0F"/>
+                </a:solidFill>
+                <a:latin typeface="Calibri"/>
+                <a:ea typeface="Calibri"/>
+                <a:cs typeface="Calibri"/>
+                <a:sym typeface="Calibri"/>
+              </a:rPr>
+              <a:t>Examples of (massive) firings already happening:</a:t>
+            </a:r>
+            <a:endParaRPr sz="1300">
+              <a:solidFill>
+                <a:srgbClr val="0F0F0F"/>
+              </a:solidFill>
+              <a:latin typeface="Calibri"/>
+              <a:ea typeface="Calibri"/>
+              <a:cs typeface="Calibri"/>
+              <a:sym typeface="Calibri"/>
+            </a:endParaRPr>
+          </a:p>
+          <a:p>
+            <a:pPr marL="228600" lvl="0" indent="-196850" algn="l" rtl="0">
+              <a:spcBef>
+                <a:spcPts val="0"/>
+              </a:spcBef>
+              <a:spcAft>
+                <a:spcPts val="0"/>
+              </a:spcAft>
+              <a:buClr>
+                <a:srgbClr val="0F0F0F"/>
+              </a:buClr>
+              <a:buSzPts val="1300"/>
+              <a:buFont typeface="Calibri"/>
+              <a:buChar char="●"/>
+            </a:pPr>
+            <a:r>
+              <a:rPr lang="en" sz="1300">
+                <a:solidFill>
+                  <a:srgbClr val="0F0F0F"/>
+                </a:solidFill>
+                <a:latin typeface="Calibri"/>
+                <a:ea typeface="Calibri"/>
+                <a:cs typeface="Calibri"/>
+                <a:sym typeface="Calibri"/>
+              </a:rPr>
+              <a:t>translation , data entry, call center representatives, bank tellers, fraud detection specialists, meteorologists, manufacturing - assembly joba, defect detection, travel agents / assistants</a:t>
+            </a:r>
+            <a:endParaRPr sz="1300">
+              <a:solidFill>
+                <a:srgbClr val="0F0F0F"/>
+              </a:solidFill>
+              <a:latin typeface="Calibri"/>
+              <a:ea typeface="Calibri"/>
+              <a:cs typeface="Calibri"/>
+              <a:sym typeface="Calibri"/>
+            </a:endParaRPr>
+          </a:p>
+          <a:p>
+            <a:pPr marL="0" lvl="0" indent="0" algn="l" rtl="0">
+              <a:spcBef>
+                <a:spcPts val="0"/>
+              </a:spcBef>
+              <a:spcAft>
+                <a:spcPts val="0"/>
+              </a:spcAft>
+              <a:buNone/>
+            </a:pPr>
+            <a:endParaRPr sz="1300">
+              <a:solidFill>
+                <a:srgbClr val="0F0F0F"/>
+              </a:solidFill>
+              <a:latin typeface="Calibri"/>
+              <a:ea typeface="Calibri"/>
+              <a:cs typeface="Calibri"/>
+              <a:sym typeface="Calibri"/>
+            </a:endParaRPr>
+          </a:p>
+          <a:p>
+            <a:pPr marL="0" lvl="0" indent="0" algn="l" rtl="0">
+              <a:spcBef>
+                <a:spcPts val="0"/>
+              </a:spcBef>
+              <a:spcAft>
+                <a:spcPts val="0"/>
+              </a:spcAft>
+              <a:buNone/>
+            </a:pPr>
+            <a:r>
+              <a:rPr lang="en" sz="1300">
+                <a:solidFill>
+                  <a:srgbClr val="0F0F0F"/>
+                </a:solidFill>
+                <a:latin typeface="Calibri"/>
+                <a:ea typeface="Calibri"/>
+                <a:cs typeface="Calibri"/>
+                <a:sym typeface="Calibri"/>
+              </a:rPr>
+              <a:t>Amazon, Walmart - lots of human-free solutions (for example, picking, packing, shipping orders)</a:t>
+            </a:r>
+            <a:endParaRPr sz="1300">
+              <a:solidFill>
+                <a:srgbClr val="0F0F0F"/>
+              </a:solidFill>
+              <a:latin typeface="Calibri"/>
+              <a:ea typeface="Calibri"/>
+              <a:cs typeface="Calibri"/>
+              <a:sym typeface="Calibri"/>
+            </a:endParaRPr>
+          </a:p>
+          <a:p>
+            <a:pPr marL="0" lvl="0" indent="0" algn="l" rtl="0">
+              <a:spcBef>
+                <a:spcPts val="0"/>
+              </a:spcBef>
+              <a:spcAft>
+                <a:spcPts val="0"/>
+              </a:spcAft>
+              <a:buNone/>
+            </a:pPr>
+            <a:endParaRPr sz="1300">
+              <a:solidFill>
+                <a:srgbClr val="0F0F0F"/>
+              </a:solidFill>
+              <a:latin typeface="Calibri"/>
+              <a:ea typeface="Calibri"/>
+              <a:cs typeface="Calibri"/>
+              <a:sym typeface="Calibri"/>
+            </a:endParaRPr>
+          </a:p>
+          <a:p>
+            <a:pPr marL="0" lvl="0" indent="0" algn="l" rtl="0">
+              <a:spcBef>
+                <a:spcPts val="0"/>
+              </a:spcBef>
+              <a:spcAft>
+                <a:spcPts val="0"/>
+              </a:spcAft>
+              <a:buNone/>
+            </a:pPr>
+            <a:r>
+              <a:rPr lang="en" sz="1300">
+                <a:solidFill>
+                  <a:srgbClr val="0F0F0F"/>
+                </a:solidFill>
+                <a:latin typeface="Calibri"/>
+                <a:ea typeface="Calibri"/>
+                <a:cs typeface="Calibri"/>
+                <a:sym typeface="Calibri"/>
+              </a:rPr>
+              <a:t>At risk: truck drivers, librarians, entry-level programmers, legal assistants, writers, editors, proof-reading</a:t>
+            </a:r>
+            <a:endParaRPr sz="1300">
+              <a:solidFill>
+                <a:srgbClr val="0F0F0F"/>
+              </a:solidFill>
+              <a:latin typeface="Calibri"/>
+              <a:ea typeface="Calibri"/>
+              <a:cs typeface="Calibri"/>
+              <a:sym typeface="Calibri"/>
+            </a:endParaRPr>
+          </a:p>
+        </p:txBody>
+      </p:sp>
+      <p:pic>
+        <p:nvPicPr>
+          <p:cNvPr id="302" name="Google Shape;302;p34"/>
+          <p:cNvPicPr preferRelativeResize="0"/>
+          <p:nvPr/>
+        </p:nvPicPr>
+        <p:blipFill>
+          <a:blip r:embed="rId7" cstate="email">
+            <a:alphaModFix/>
+            <a:extLst>
+              <a:ext uri="{28A0092B-C50C-407E-A947-70E740481C1C}">
+                <a14:useLocalDpi xmlns:a14="http://schemas.microsoft.com/office/drawing/2010/main"/>
+              </a:ext>
+            </a:extLst>
+          </a:blip>
+          <a:stretch>
+            <a:fillRect/>
+          </a:stretch>
+        </p:blipFill>
+        <p:spPr>
+          <a:xfrm>
+            <a:off x="4610550" y="2020080"/>
+            <a:ext cx="3288427" cy="1801674"/>
+          </a:xfrm>
+          <a:prstGeom prst="rect">
+            <a:avLst/>
+          </a:prstGeom>
+          <a:noFill/>
+          <a:ln>
+            <a:noFill/>
+          </a:ln>
+        </p:spPr>
+      </p:pic>
+      <p:sp>
+        <p:nvSpPr>
+          <p:cNvPr id="303" name="Google Shape;303;p34"/>
+          <p:cNvSpPr txBox="1"/>
+          <p:nvPr/>
+        </p:nvSpPr>
+        <p:spPr>
+          <a:xfrm>
+            <a:off x="4610550" y="4203275"/>
+            <a:ext cx="4437900" cy="861900"/>
+          </a:xfrm>
+          <a:prstGeom prst="rect">
+            <a:avLst/>
+          </a:prstGeom>
+          <a:solidFill>
+            <a:srgbClr val="FFF2CC"/>
+          </a:solidFill>
+          <a:ln w="9525" cap="flat" cmpd="sng">
+            <a:solidFill>
+              <a:srgbClr val="FF0000"/>
+            </a:solidFill>
+            <a:prstDash val="solid"/>
+            <a:round/>
+            <a:headEnd type="none" w="sm" len="sm"/>
+            <a:tailEnd type="none" w="sm" len="sm"/>
+          </a:ln>
+        </p:spPr>
+        <p:txBody>
+          <a:bodyPr spcFirstLastPara="1" wrap="square" lIns="91425" tIns="91425" rIns="91425" bIns="91425" anchor="t" anchorCtr="0">
+            <a:spAutoFit/>
+          </a:bodyPr>
+          <a:lstStyle/>
+          <a:p>
+            <a:pPr marL="0" lvl="0" indent="0" algn="l" rtl="0">
+              <a:spcBef>
+                <a:spcPts val="0"/>
+              </a:spcBef>
+              <a:spcAft>
+                <a:spcPts val="0"/>
+              </a:spcAft>
+              <a:buNone/>
+            </a:pPr>
+            <a:r>
+              <a:rPr lang="en" sz="1300">
+                <a:solidFill>
+                  <a:srgbClr val="0F0F0F"/>
+                </a:solidFill>
+                <a:latin typeface="Calibri"/>
+                <a:ea typeface="Calibri"/>
+                <a:cs typeface="Calibri"/>
+                <a:sym typeface="Calibri"/>
+              </a:rPr>
+              <a:t>Google cuts over 1,000 jobs in its voice assistance, hardware teams as Fitbit founders leave</a:t>
+            </a:r>
+            <a:endParaRPr sz="1300">
+              <a:solidFill>
+                <a:srgbClr val="0F0F0F"/>
+              </a:solidFill>
+              <a:latin typeface="Calibri"/>
+              <a:ea typeface="Calibri"/>
+              <a:cs typeface="Calibri"/>
+              <a:sym typeface="Calibri"/>
+            </a:endParaRPr>
+          </a:p>
+          <a:p>
+            <a:pPr marL="0" lvl="0" indent="0" algn="l" rtl="0">
+              <a:spcBef>
+                <a:spcPts val="0"/>
+              </a:spcBef>
+              <a:spcAft>
+                <a:spcPts val="0"/>
+              </a:spcAft>
+              <a:buNone/>
+            </a:pPr>
+            <a:r>
+              <a:rPr lang="en" sz="900" u="sng">
+                <a:solidFill>
+                  <a:schemeClr val="hlink"/>
+                </a:solidFill>
+                <a:latin typeface="Calibri"/>
+                <a:ea typeface="Calibri"/>
+                <a:cs typeface="Calibri"/>
+                <a:sym typeface="Calibri"/>
+                <a:hlinkClick r:id="rId8"/>
+              </a:rPr>
+              <a:t>https://techcrunch.com/2024/01/10/google-cuts-hundreds-of-jobs-in-its-voice-assistance-hardware-teams-as-fitbit-founders-leave/</a:t>
+            </a:r>
+            <a:r>
+              <a:rPr lang="en" sz="900">
+                <a:solidFill>
+                  <a:srgbClr val="0F0F0F"/>
+                </a:solidFill>
+                <a:latin typeface="Calibri"/>
+                <a:ea typeface="Calibri"/>
+                <a:cs typeface="Calibri"/>
+                <a:sym typeface="Calibri"/>
+              </a:rPr>
+              <a:t> </a:t>
+            </a:r>
+            <a:endParaRPr sz="900">
+              <a:solidFill>
+                <a:srgbClr val="0F0F0F"/>
+              </a:solidFill>
+              <a:latin typeface="Calibri"/>
+              <a:ea typeface="Calibri"/>
+              <a:cs typeface="Calibri"/>
+              <a:sym typeface="Calibri"/>
+            </a:endParaRPr>
+          </a:p>
+        </p:txBody>
+      </p:sp>
+    </p:spTree>
+  </p:cSld>
+  <p:clrMapOvr>
+    <a:masterClrMapping/>
+  </p:clrMapOvr>
+</p:sld>
+</file>
+
+<file path=ppt/slides/slide21.xml><?xml version="1.0" encoding="utf-8"?>
+<p:sld xmlns:a="http://schemas.openxmlformats.org/drawingml/2006/main" xmlns:r="http://schemas.openxmlformats.org/officeDocument/2006/relationships" xmlns:p="http://schemas.openxmlformats.org/presentationml/2006/main">
+  <p:cSld>
+    <p:spTree>
+      <p:nvGrpSpPr>
+        <p:cNvPr id="1" name="Shape 307"/>
+        <p:cNvGrpSpPr/>
+        <p:nvPr/>
+      </p:nvGrpSpPr>
+      <p:grpSpPr>
+        <a:xfrm>
+          <a:off x="0" y="0"/>
+          <a:ext cx="0" cy="0"/>
+          <a:chOff x="0" y="0"/>
+          <a:chExt cx="0" cy="0"/>
+        </a:xfrm>
+      </p:grpSpPr>
+      <p:sp>
+        <p:nvSpPr>
+          <p:cNvPr id="308" name="Google Shape;308;p35"/>
+          <p:cNvSpPr txBox="1"/>
+          <p:nvPr/>
+        </p:nvSpPr>
+        <p:spPr>
+          <a:xfrm>
+            <a:off x="72300" y="76200"/>
+            <a:ext cx="3676200" cy="326400"/>
+          </a:xfrm>
+          <a:prstGeom prst="rect">
+            <a:avLst/>
+          </a:prstGeom>
+          <a:noFill/>
+          <a:ln>
+            <a:noFill/>
+          </a:ln>
+        </p:spPr>
+        <p:txBody>
+          <a:bodyPr spcFirstLastPara="1" wrap="square" lIns="9125" tIns="9125" rIns="9125" bIns="9125" anchor="t" anchorCtr="0">
+            <a:spAutoFit/>
+          </a:bodyPr>
+          <a:lstStyle/>
+          <a:p>
+            <a:pPr marL="0" lvl="0" indent="0" algn="l" rtl="0">
+              <a:spcBef>
+                <a:spcPts val="0"/>
+              </a:spcBef>
+              <a:spcAft>
+                <a:spcPts val="0"/>
+              </a:spcAft>
+              <a:buNone/>
+            </a:pPr>
+            <a:r>
+              <a:rPr lang="en" sz="2000" b="1">
+                <a:solidFill>
+                  <a:schemeClr val="dk1"/>
+                </a:solidFill>
+                <a:latin typeface="Calibri"/>
+                <a:ea typeface="Calibri"/>
+                <a:cs typeface="Calibri"/>
+                <a:sym typeface="Calibri"/>
+              </a:rPr>
+              <a:t>New Jobs </a:t>
+            </a:r>
+            <a:endParaRPr sz="2000" b="1">
+              <a:solidFill>
+                <a:schemeClr val="dk1"/>
+              </a:solidFill>
+              <a:latin typeface="Calibri"/>
+              <a:ea typeface="Calibri"/>
+              <a:cs typeface="Calibri"/>
+              <a:sym typeface="Calibri"/>
+            </a:endParaRPr>
+          </a:p>
+        </p:txBody>
+      </p:sp>
+      <p:sp>
+        <p:nvSpPr>
+          <p:cNvPr id="309" name="Google Shape;309;p35"/>
           <p:cNvSpPr txBox="1"/>
           <p:nvPr/>
         </p:nvSpPr>
@@ -25726,7 +26909,7 @@
       </p:sp>
       <p:sp>
         <p:nvSpPr>
-          <p:cNvPr id="302" name="Google Shape;302;p34"/>
+          <p:cNvPr id="310" name="Google Shape;310;p35"/>
           <p:cNvSpPr txBox="1"/>
           <p:nvPr/>
         </p:nvSpPr>
@@ -26072,12 +27255,12 @@
 </p:sld>
 </file>
 
-<file path=ppt/slides/slide21.xml><?xml version="1.0" encoding="utf-8"?>
+<file path=ppt/slides/slide22.xml><?xml version="1.0" encoding="utf-8"?>
 <p:sld xmlns:a="http://schemas.openxmlformats.org/drawingml/2006/main" xmlns:r="http://schemas.openxmlformats.org/officeDocument/2006/relationships" xmlns:p="http://schemas.openxmlformats.org/presentationml/2006/main">
   <p:cSld>
     <p:spTree>
       <p:nvGrpSpPr>
-        <p:cNvPr id="1" name="Shape 306"/>
+        <p:cNvPr id="1" name="Shape 314"/>
         <p:cNvGrpSpPr/>
         <p:nvPr/>
       </p:nvGrpSpPr>
@@ -26091,7 +27274,7 @@
       </p:grpSpPr>
       <p:sp>
         <p:nvSpPr>
-          <p:cNvPr id="307" name="Google Shape;307;p35"/>
+          <p:cNvPr id="315" name="Google Shape;315;p36"/>
           <p:cNvSpPr txBox="1"/>
           <p:nvPr/>
         </p:nvSpPr>
@@ -26141,7 +27324,7 @@
       </p:sp>
       <p:sp>
         <p:nvSpPr>
-          <p:cNvPr id="308" name="Google Shape;308;p35"/>
+          <p:cNvPr id="316" name="Google Shape;316;p36"/>
           <p:cNvSpPr txBox="1"/>
           <p:nvPr/>
         </p:nvSpPr>
@@ -26308,7 +27491,7 @@
       </p:sp>
       <p:pic>
         <p:nvPicPr>
-          <p:cNvPr id="309" name="Google Shape;309;p35"/>
+          <p:cNvPr id="317" name="Google Shape;317;p36"/>
           <p:cNvPicPr preferRelativeResize="0"/>
           <p:nvPr/>
         </p:nvPicPr>
@@ -26340,7 +27523,7 @@
       </p:pic>
       <p:sp>
         <p:nvSpPr>
-          <p:cNvPr id="310" name="Google Shape;310;p35"/>
+          <p:cNvPr id="318" name="Google Shape;318;p36"/>
           <p:cNvSpPr txBox="1"/>
           <p:nvPr/>
         </p:nvSpPr>
@@ -26453,7 +27636,7 @@
       </p:sp>
       <p:sp>
         <p:nvSpPr>
-          <p:cNvPr id="311" name="Google Shape;311;p35"/>
+          <p:cNvPr id="319" name="Google Shape;319;p36"/>
           <p:cNvSpPr txBox="1"/>
           <p:nvPr/>
         </p:nvSpPr>
@@ -26723,7 +27906,7 @@
       </p:sp>
       <p:pic>
         <p:nvPicPr>
-          <p:cNvPr id="312" name="Google Shape;312;p35"/>
+          <p:cNvPr id="320" name="Google Shape;320;p36"/>
           <p:cNvPicPr preferRelativeResize="0"/>
           <p:nvPr/>
         </p:nvPicPr>
@@ -26756,7 +27939,7 @@
       </p:pic>
       <p:pic>
         <p:nvPicPr>
-          <p:cNvPr id="313" name="Google Shape;313;p35"/>
+          <p:cNvPr id="321" name="Google Shape;321;p36"/>
           <p:cNvPicPr preferRelativeResize="0"/>
           <p:nvPr/>
         </p:nvPicPr>
@@ -26789,7 +27972,7 @@
       </p:pic>
       <p:sp>
         <p:nvSpPr>
-          <p:cNvPr id="314" name="Google Shape;314;p35"/>
+          <p:cNvPr id="322" name="Google Shape;322;p36"/>
           <p:cNvSpPr txBox="1"/>
           <p:nvPr/>
         </p:nvSpPr>
@@ -26845,12 +28028,12 @@
 </p:sld>
 </file>
 
-<file path=ppt/slides/slide22.xml><?xml version="1.0" encoding="utf-8"?>
+<file path=ppt/slides/slide23.xml><?xml version="1.0" encoding="utf-8"?>
 <p:sld xmlns:a="http://schemas.openxmlformats.org/drawingml/2006/main" xmlns:r="http://schemas.openxmlformats.org/officeDocument/2006/relationships" xmlns:p="http://schemas.openxmlformats.org/presentationml/2006/main">
   <p:cSld>
     <p:spTree>
       <p:nvGrpSpPr>
-        <p:cNvPr id="1" name="Shape 318"/>
+        <p:cNvPr id="1" name="Shape 326"/>
         <p:cNvGrpSpPr/>
         <p:nvPr/>
       </p:nvGrpSpPr>
@@ -26864,7 +28047,7 @@
       </p:grpSpPr>
       <p:sp>
         <p:nvSpPr>
-          <p:cNvPr id="319" name="Google Shape;319;p36"/>
+          <p:cNvPr id="327" name="Google Shape;327;p37"/>
           <p:cNvSpPr txBox="1"/>
           <p:nvPr/>
         </p:nvSpPr>
@@ -27672,7 +28855,7 @@
       </p:sp>
       <p:sp>
         <p:nvSpPr>
-          <p:cNvPr id="320" name="Google Shape;320;p36"/>
+          <p:cNvPr id="328" name="Google Shape;328;p37"/>
           <p:cNvSpPr txBox="1"/>
           <p:nvPr/>
         </p:nvSpPr>
@@ -27728,12 +28911,12 @@
 </p:sld>
 </file>
 
-<file path=ppt/slides/slide23.xml><?xml version="1.0" encoding="utf-8"?>
+<file path=ppt/slides/slide24.xml><?xml version="1.0" encoding="utf-8"?>
 <p:sld xmlns:a="http://schemas.openxmlformats.org/drawingml/2006/main" xmlns:r="http://schemas.openxmlformats.org/officeDocument/2006/relationships" xmlns:p="http://schemas.openxmlformats.org/presentationml/2006/main">
   <p:cSld>
     <p:spTree>
       <p:nvGrpSpPr>
-        <p:cNvPr id="1" name="Shape 324"/>
+        <p:cNvPr id="1" name="Shape 332"/>
         <p:cNvGrpSpPr/>
         <p:nvPr/>
       </p:nvGrpSpPr>
@@ -27747,7 +28930,7 @@
       </p:grpSpPr>
       <p:sp>
         <p:nvSpPr>
-          <p:cNvPr id="325" name="Google Shape;325;p37"/>
+          <p:cNvPr id="333" name="Google Shape;333;p38"/>
           <p:cNvSpPr txBox="1"/>
           <p:nvPr/>
         </p:nvSpPr>
@@ -27802,7 +28985,7 @@
       </p:sp>
       <p:sp>
         <p:nvSpPr>
-          <p:cNvPr id="326" name="Google Shape;326;p37"/>
+          <p:cNvPr id="334" name="Google Shape;334;p38"/>
           <p:cNvSpPr txBox="1"/>
           <p:nvPr/>
         </p:nvSpPr>
@@ -28605,7 +29788,7 @@
       </p:sp>
       <p:sp>
         <p:nvSpPr>
-          <p:cNvPr id="327" name="Google Shape;327;p37"/>
+          <p:cNvPr id="335" name="Google Shape;335;p38"/>
           <p:cNvSpPr txBox="1"/>
           <p:nvPr/>
         </p:nvSpPr>
@@ -28789,7 +29972,7 @@
       </p:sp>
       <p:sp>
         <p:nvSpPr>
-          <p:cNvPr id="328" name="Google Shape;328;p37"/>
+          <p:cNvPr id="336" name="Google Shape;336;p38"/>
           <p:cNvSpPr txBox="1"/>
           <p:nvPr/>
         </p:nvSpPr>
@@ -29104,7 +30287,7 @@
       </p:sp>
       <p:sp>
         <p:nvSpPr>
-          <p:cNvPr id="329" name="Google Shape;329;p37"/>
+          <p:cNvPr id="337" name="Google Shape;337;p38"/>
           <p:cNvSpPr txBox="1"/>
           <p:nvPr/>
         </p:nvSpPr>
@@ -29398,12 +30581,12 @@
 </p:sld>
 </file>
 
-<file path=ppt/slides/slide24.xml><?xml version="1.0" encoding="utf-8"?>
+<file path=ppt/slides/slide25.xml><?xml version="1.0" encoding="utf-8"?>
 <p:sld xmlns:a="http://schemas.openxmlformats.org/drawingml/2006/main" xmlns:r="http://schemas.openxmlformats.org/officeDocument/2006/relationships" xmlns:p="http://schemas.openxmlformats.org/presentationml/2006/main">
   <p:cSld>
     <p:spTree>
       <p:nvGrpSpPr>
-        <p:cNvPr id="1" name="Shape 333"/>
+        <p:cNvPr id="1" name="Shape 341"/>
         <p:cNvGrpSpPr/>
         <p:nvPr/>
       </p:nvGrpSpPr>
@@ -29417,7 +30600,7 @@
       </p:grpSpPr>
       <p:sp>
         <p:nvSpPr>
-          <p:cNvPr id="334" name="Google Shape;334;p38"/>
+          <p:cNvPr id="342" name="Google Shape;342;p39"/>
           <p:cNvSpPr txBox="1"/>
           <p:nvPr/>
         </p:nvSpPr>
@@ -29472,7 +30655,7 @@
       </p:sp>
       <p:sp>
         <p:nvSpPr>
-          <p:cNvPr id="335" name="Google Shape;335;p38"/>
+          <p:cNvPr id="343" name="Google Shape;343;p39"/>
           <p:cNvSpPr txBox="1"/>
           <p:nvPr/>
         </p:nvSpPr>
@@ -29788,7 +30971,7 @@
       </p:sp>
       <p:pic>
         <p:nvPicPr>
-          <p:cNvPr id="336" name="Google Shape;336;p38"/>
+          <p:cNvPr id="344" name="Google Shape;344;p39"/>
           <p:cNvPicPr preferRelativeResize="0"/>
           <p:nvPr/>
         </p:nvPicPr>
@@ -29827,12 +31010,12 @@
 </p:sld>
 </file>
 
-<file path=ppt/slides/slide25.xml><?xml version="1.0" encoding="utf-8"?>
+<file path=ppt/slides/slide26.xml><?xml version="1.0" encoding="utf-8"?>
 <p:sld xmlns:a="http://schemas.openxmlformats.org/drawingml/2006/main" xmlns:r="http://schemas.openxmlformats.org/officeDocument/2006/relationships" xmlns:p="http://schemas.openxmlformats.org/presentationml/2006/main">
   <p:cSld>
     <p:spTree>
       <p:nvGrpSpPr>
-        <p:cNvPr id="1" name="Shape 340"/>
+        <p:cNvPr id="1" name="Shape 348"/>
         <p:cNvGrpSpPr/>
         <p:nvPr/>
       </p:nvGrpSpPr>
@@ -29846,7 +31029,7 @@
       </p:grpSpPr>
       <p:sp>
         <p:nvSpPr>
-          <p:cNvPr id="341" name="Google Shape;341;p39"/>
+          <p:cNvPr id="349" name="Google Shape;349;p40"/>
           <p:cNvSpPr txBox="1"/>
           <p:nvPr/>
         </p:nvSpPr>
@@ -29901,7 +31084,7 @@
       </p:sp>
       <p:sp>
         <p:nvSpPr>
-          <p:cNvPr id="342" name="Google Shape;342;p39"/>
+          <p:cNvPr id="350" name="Google Shape;350;p40"/>
           <p:cNvSpPr txBox="1"/>
           <p:nvPr/>
         </p:nvSpPr>
@@ -30273,7 +31456,7 @@
       </p:sp>
       <p:pic>
         <p:nvPicPr>
-          <p:cNvPr id="343" name="Google Shape;343;p39"/>
+          <p:cNvPr id="351" name="Google Shape;351;p40"/>
           <p:cNvPicPr preferRelativeResize="0"/>
           <p:nvPr/>
         </p:nvPicPr>
@@ -30312,12 +31495,12 @@
 </p:sld>
 </file>
 
-<file path=ppt/slides/slide26.xml><?xml version="1.0" encoding="utf-8"?>
+<file path=ppt/slides/slide27.xml><?xml version="1.0" encoding="utf-8"?>
 <p:sld xmlns:a="http://schemas.openxmlformats.org/drawingml/2006/main" xmlns:r="http://schemas.openxmlformats.org/officeDocument/2006/relationships" xmlns:p="http://schemas.openxmlformats.org/presentationml/2006/main">
   <p:cSld>
     <p:spTree>
       <p:nvGrpSpPr>
-        <p:cNvPr id="1" name="Shape 347"/>
+        <p:cNvPr id="1" name="Shape 355"/>
         <p:cNvGrpSpPr/>
         <p:nvPr/>
       </p:nvGrpSpPr>
@@ -30331,7 +31514,7 @@
       </p:grpSpPr>
       <p:sp>
         <p:nvSpPr>
-          <p:cNvPr id="348" name="Google Shape;348;p40"/>
+          <p:cNvPr id="356" name="Google Shape;356;p41"/>
           <p:cNvSpPr txBox="1"/>
           <p:nvPr/>
         </p:nvSpPr>
@@ -30386,7 +31569,7 @@
       </p:sp>
       <p:sp>
         <p:nvSpPr>
-          <p:cNvPr id="349" name="Google Shape;349;p40"/>
+          <p:cNvPr id="357" name="Google Shape;357;p41"/>
           <p:cNvSpPr txBox="1"/>
           <p:nvPr/>
         </p:nvSpPr>
@@ -30706,7 +31889,7 @@
       </p:sp>
       <p:pic>
         <p:nvPicPr>
-          <p:cNvPr id="350" name="Google Shape;350;p40"/>
+          <p:cNvPr id="358" name="Google Shape;358;p41"/>
           <p:cNvPicPr preferRelativeResize="0"/>
           <p:nvPr/>
         </p:nvPicPr>
@@ -30739,7 +31922,7 @@
       </p:pic>
       <p:sp>
         <p:nvSpPr>
-          <p:cNvPr id="351" name="Google Shape;351;p40"/>
+          <p:cNvPr id="359" name="Google Shape;359;p41"/>
           <p:cNvSpPr txBox="1"/>
           <p:nvPr/>
         </p:nvSpPr>
@@ -31043,7 +32226,7 @@
       </p:sp>
       <p:pic>
         <p:nvPicPr>
-          <p:cNvPr id="352" name="Google Shape;352;p40"/>
+          <p:cNvPr id="360" name="Google Shape;360;p41"/>
           <p:cNvPicPr preferRelativeResize="0"/>
           <p:nvPr/>
         </p:nvPicPr>
@@ -31088,12 +32271,12 @@
 </p:sld>
 </file>
 
-<file path=ppt/slides/slide27.xml><?xml version="1.0" encoding="utf-8"?>
+<file path=ppt/slides/slide28.xml><?xml version="1.0" encoding="utf-8"?>
 <p:sld xmlns:a="http://schemas.openxmlformats.org/drawingml/2006/main" xmlns:r="http://schemas.openxmlformats.org/officeDocument/2006/relationships" xmlns:p="http://schemas.openxmlformats.org/presentationml/2006/main">
   <p:cSld>
     <p:spTree>
       <p:nvGrpSpPr>
-        <p:cNvPr id="1" name="Shape 356"/>
+        <p:cNvPr id="1" name="Shape 364"/>
         <p:cNvGrpSpPr/>
         <p:nvPr/>
       </p:nvGrpSpPr>
@@ -31107,7 +32290,7 @@
       </p:grpSpPr>
       <p:sp>
         <p:nvSpPr>
-          <p:cNvPr id="357" name="Google Shape;357;p41"/>
+          <p:cNvPr id="365" name="Google Shape;365;p42"/>
           <p:cNvSpPr txBox="1"/>
           <p:nvPr/>
         </p:nvSpPr>
@@ -31171,12 +32354,12 @@
 </p:sld>
 </file>
 
-<file path=ppt/slides/slide28.xml><?xml version="1.0" encoding="utf-8"?>
+<file path=ppt/slides/slide29.xml><?xml version="1.0" encoding="utf-8"?>
 <p:sld xmlns:a="http://schemas.openxmlformats.org/drawingml/2006/main" xmlns:r="http://schemas.openxmlformats.org/officeDocument/2006/relationships" xmlns:p="http://schemas.openxmlformats.org/presentationml/2006/main">
   <p:cSld>
     <p:spTree>
       <p:nvGrpSpPr>
-        <p:cNvPr id="1" name="Shape 361"/>
+        <p:cNvPr id="1" name="Shape 369"/>
         <p:cNvGrpSpPr/>
         <p:nvPr/>
       </p:nvGrpSpPr>
@@ -31190,7 +32373,7 @@
       </p:grpSpPr>
       <p:sp>
         <p:nvSpPr>
-          <p:cNvPr id="362" name="Google Shape;362;p42"/>
+          <p:cNvPr id="370" name="Google Shape;370;p43"/>
           <p:cNvSpPr txBox="1"/>
           <p:nvPr/>
         </p:nvSpPr>
@@ -31245,7 +32428,7 @@
       </p:sp>
       <p:sp>
         <p:nvSpPr>
-          <p:cNvPr id="363" name="Google Shape;363;p42"/>
+          <p:cNvPr id="371" name="Google Shape;371;p43"/>
           <p:cNvSpPr txBox="1"/>
           <p:nvPr/>
         </p:nvSpPr>
@@ -31397,7 +32580,7 @@
         </p:nvSpPr>
         <p:spPr>
           <a:xfrm>
-            <a:off x="4748350" y="228600"/>
+            <a:off x="4748350" y="76200"/>
             <a:ext cx="4303500" cy="1647000"/>
           </a:xfrm>
           <a:prstGeom prst="rect">
@@ -31614,8 +32797,8 @@
         </p:nvSpPr>
         <p:spPr>
           <a:xfrm>
-            <a:off x="4748350" y="2628910"/>
-            <a:ext cx="4303500" cy="1385400"/>
+            <a:off x="4748350" y="2476510"/>
+            <a:ext cx="4303500" cy="1523700"/>
           </a:xfrm>
           <a:prstGeom prst="rect">
             <a:avLst/>
@@ -31706,6 +32889,45 @@
               <a:buNone/>
             </a:pPr>
             <a:r>
+              <a:rPr lang="en" sz="900">
+                <a:latin typeface="Calibri"/>
+                <a:ea typeface="Calibri"/>
+                <a:cs typeface="Calibri"/>
+                <a:sym typeface="Calibri"/>
+              </a:rPr>
+              <a:t> - </a:t>
+            </a:r>
+            <a:r>
+              <a:rPr lang="en" sz="900" u="sng">
+                <a:solidFill>
+                  <a:schemeClr val="hlink"/>
+                </a:solidFill>
+                <a:latin typeface="Calibri"/>
+                <a:ea typeface="Calibri"/>
+                <a:cs typeface="Calibri"/>
+                <a:sym typeface="Calibri"/>
+                <a:hlinkClick r:id="rId6"/>
+              </a:rPr>
+              <a:t>https://www.youtube.com/watch?v=tZD3-uO0RJ0</a:t>
+            </a:r>
+            <a:r>
+              <a:rPr lang="en" sz="900">
+                <a:latin typeface="Calibri"/>
+                <a:ea typeface="Calibri"/>
+                <a:cs typeface="Calibri"/>
+                <a:sym typeface="Calibri"/>
+              </a:rPr>
+              <a:t>  - video</a:t>
+            </a:r>
+            <a:br>
+              <a:rPr lang="en" sz="900">
+                <a:latin typeface="Calibri"/>
+                <a:ea typeface="Calibri"/>
+                <a:cs typeface="Calibri"/>
+                <a:sym typeface="Calibri"/>
+              </a:rPr>
+            </a:br>
+            <a:r>
               <a:rPr lang="en" sz="1300">
                 <a:latin typeface="Calibri"/>
                 <a:ea typeface="Calibri"/>
@@ -31752,7 +32974,7 @@
         </p:nvSpPr>
         <p:spPr>
           <a:xfrm>
-            <a:off x="4748350" y="1961325"/>
+            <a:off x="4748350" y="1808925"/>
             <a:ext cx="4303500" cy="585000"/>
           </a:xfrm>
           <a:prstGeom prst="rect">
@@ -31804,7 +33026,7 @@
                 <a:ea typeface="Calibri"/>
                 <a:cs typeface="Calibri"/>
                 <a:sym typeface="Calibri"/>
-                <a:hlinkClick r:id="rId6"/>
+                <a:hlinkClick r:id="rId7"/>
               </a:rPr>
               <a:t>https://arxiv.org/abs/2312.06635</a:t>
             </a:r>
@@ -31886,7 +33108,7 @@
                 <a:ea typeface="Calibri"/>
                 <a:cs typeface="Calibri"/>
                 <a:sym typeface="Calibri"/>
-                <a:hlinkClick r:id="rId7"/>
+                <a:hlinkClick r:id="rId8"/>
               </a:rPr>
               <a:t>https://arxiv.org/abs/2401.04722</a:t>
             </a:r>
@@ -32030,7 +33252,7 @@
                 <a:ea typeface="Calibri"/>
                 <a:cs typeface="Calibri"/>
                 <a:sym typeface="Calibri"/>
-                <a:hlinkClick r:id="rId8"/>
+                <a:hlinkClick r:id="rId9"/>
               </a:rPr>
               <a:t>https://srush.github.io/annotated-s4/</a:t>
             </a:r>
@@ -32071,7 +33293,7 @@
                 <a:ea typeface="Calibri"/>
                 <a:cs typeface="Calibri"/>
                 <a:sym typeface="Calibri"/>
-                <a:hlinkClick r:id="rId9"/>
+                <a:hlinkClick r:id="rId10"/>
               </a:rPr>
               <a:t>https://www.youtube.com/watch?v=GqwhkbrWDOI</a:t>
             </a:r>
@@ -32370,7 +33592,7 @@
           <p:nvPr/>
         </p:nvPicPr>
         <p:blipFill>
-          <a:blip r:embed="rId10" cstate="email">
+          <a:blip r:embed="rId11" cstate="email">
             <a:alphaModFix/>
             <a:extLst>
               <a:ext uri="{28A0092B-C50C-407E-A947-70E740481C1C}">
@@ -34437,7 +35659,7 @@
             <a:tbl>
               <a:tblPr>
                 <a:noFill/>
-                <a:tableStyleId>{2E395200-7371-4445-A9BE-FC5547D44B40}</a:tableStyleId>
+                <a:tableStyleId>{7EF94F85-B0A4-4D23-AFEC-976B4D1077D6}</a:tableStyleId>
               </a:tblPr>
               <a:tblGrid>
                 <a:gridCol w="912575">
@@ -40391,6 +41613,806 @@
         <p:spPr>
           <a:xfrm>
             <a:off x="72300" y="0"/>
+            <a:ext cx="2634300" cy="326400"/>
+          </a:xfrm>
+          <a:prstGeom prst="rect">
+            <a:avLst/>
+          </a:prstGeom>
+          <a:noFill/>
+          <a:ln>
+            <a:noFill/>
+          </a:ln>
+        </p:spPr>
+        <p:txBody>
+          <a:bodyPr spcFirstLastPara="1" wrap="square" lIns="9125" tIns="9125" rIns="9125" bIns="9125" anchor="t" anchorCtr="0">
+            <a:spAutoFit/>
+          </a:bodyPr>
+          <a:lstStyle/>
+          <a:p>
+            <a:pPr marL="0" lvl="0" indent="0" algn="l" rtl="0">
+              <a:spcBef>
+                <a:spcPts val="0"/>
+              </a:spcBef>
+              <a:spcAft>
+                <a:spcPts val="0"/>
+              </a:spcAft>
+              <a:buNone/>
+            </a:pPr>
+            <a:r>
+              <a:rPr lang="en" sz="2000" b="1">
+                <a:solidFill>
+                  <a:schemeClr val="dk1"/>
+                </a:solidFill>
+                <a:latin typeface="Calibri"/>
+                <a:ea typeface="Calibri"/>
+                <a:cs typeface="Calibri"/>
+                <a:sym typeface="Calibri"/>
+              </a:rPr>
+              <a:t>Open Interpreter</a:t>
+            </a:r>
+            <a:endParaRPr sz="2000" b="1">
+              <a:latin typeface="Calibri"/>
+              <a:ea typeface="Calibri"/>
+              <a:cs typeface="Calibri"/>
+              <a:sym typeface="Calibri"/>
+            </a:endParaRPr>
+          </a:p>
+        </p:txBody>
+      </p:sp>
+      <p:sp>
+        <p:nvSpPr>
+          <p:cNvPr id="127" name="Google Shape;127;p21"/>
+          <p:cNvSpPr txBox="1"/>
+          <p:nvPr/>
+        </p:nvSpPr>
+        <p:spPr>
+          <a:xfrm>
+            <a:off x="154450" y="644300"/>
+            <a:ext cx="3807300" cy="3247800"/>
+          </a:xfrm>
+          <a:prstGeom prst="rect">
+            <a:avLst/>
+          </a:prstGeom>
+          <a:solidFill>
+            <a:srgbClr val="FFF2CC"/>
+          </a:solidFill>
+          <a:ln w="9525" cap="flat" cmpd="sng">
+            <a:solidFill>
+              <a:srgbClr val="FF0000"/>
+            </a:solidFill>
+            <a:prstDash val="solid"/>
+            <a:round/>
+            <a:headEnd type="none" w="sm" len="sm"/>
+            <a:tailEnd type="none" w="sm" len="sm"/>
+          </a:ln>
+        </p:spPr>
+        <p:txBody>
+          <a:bodyPr spcFirstLastPara="1" wrap="square" lIns="91425" tIns="91425" rIns="91425" bIns="91425" anchor="t" anchorCtr="0">
+            <a:spAutoFit/>
+          </a:bodyPr>
+          <a:lstStyle/>
+          <a:p>
+            <a:pPr marL="0" lvl="0" indent="0" algn="l" rtl="0">
+              <a:spcBef>
+                <a:spcPts val="0"/>
+              </a:spcBef>
+              <a:spcAft>
+                <a:spcPts val="0"/>
+              </a:spcAft>
+              <a:buNone/>
+            </a:pPr>
+            <a:r>
+              <a:rPr lang="en" sz="1300">
+                <a:solidFill>
+                  <a:srgbClr val="0F0F0F"/>
+                </a:solidFill>
+                <a:latin typeface="Calibri"/>
+                <a:ea typeface="Calibri"/>
+                <a:cs typeface="Calibri"/>
+                <a:sym typeface="Calibri"/>
+              </a:rPr>
+              <a:t>Open Interpreter allows you to run code using LLM.</a:t>
+            </a:r>
+            <a:endParaRPr sz="1300">
+              <a:solidFill>
+                <a:srgbClr val="0F0F0F"/>
+              </a:solidFill>
+              <a:latin typeface="Calibri"/>
+              <a:ea typeface="Calibri"/>
+              <a:cs typeface="Calibri"/>
+              <a:sym typeface="Calibri"/>
+            </a:endParaRPr>
+          </a:p>
+          <a:p>
+            <a:pPr marL="0" lvl="0" indent="0" algn="l" rtl="0">
+              <a:spcBef>
+                <a:spcPts val="0"/>
+              </a:spcBef>
+              <a:spcAft>
+                <a:spcPts val="0"/>
+              </a:spcAft>
+              <a:buNone/>
+            </a:pPr>
+            <a:r>
+              <a:rPr lang="en" sz="1300">
+                <a:solidFill>
+                  <a:srgbClr val="0F0F0F"/>
+                </a:solidFill>
+                <a:latin typeface="Calibri"/>
+                <a:ea typeface="Calibri"/>
+                <a:cs typeface="Calibri"/>
+                <a:sym typeface="Calibri"/>
+              </a:rPr>
+              <a:t>Now you can do it using local LLM !</a:t>
+            </a:r>
+            <a:endParaRPr sz="1300">
+              <a:solidFill>
+                <a:srgbClr val="0F0F0F"/>
+              </a:solidFill>
+              <a:latin typeface="Calibri"/>
+              <a:ea typeface="Calibri"/>
+              <a:cs typeface="Calibri"/>
+              <a:sym typeface="Calibri"/>
+            </a:endParaRPr>
+          </a:p>
+          <a:p>
+            <a:pPr marL="0" lvl="0" indent="0" algn="l" rtl="0">
+              <a:spcBef>
+                <a:spcPts val="0"/>
+              </a:spcBef>
+              <a:spcAft>
+                <a:spcPts val="0"/>
+              </a:spcAft>
+              <a:buNone/>
+            </a:pPr>
+            <a:endParaRPr sz="1300">
+              <a:solidFill>
+                <a:srgbClr val="0F0F0F"/>
+              </a:solidFill>
+              <a:latin typeface="Calibri"/>
+              <a:ea typeface="Calibri"/>
+              <a:cs typeface="Calibri"/>
+              <a:sym typeface="Calibri"/>
+            </a:endParaRPr>
+          </a:p>
+          <a:p>
+            <a:pPr marL="228600" lvl="0" indent="-177800" algn="l" rtl="0">
+              <a:spcBef>
+                <a:spcPts val="0"/>
+              </a:spcBef>
+              <a:spcAft>
+                <a:spcPts val="0"/>
+              </a:spcAft>
+              <a:buSzPts val="1000"/>
+              <a:buFont typeface="Calibri"/>
+              <a:buChar char="●"/>
+            </a:pPr>
+            <a:r>
+              <a:rPr lang="en" sz="1000" u="sng">
+                <a:solidFill>
+                  <a:schemeClr val="hlink"/>
+                </a:solidFill>
+                <a:latin typeface="Calibri"/>
+                <a:ea typeface="Calibri"/>
+                <a:cs typeface="Calibri"/>
+                <a:sym typeface="Calibri"/>
+                <a:hlinkClick r:id="rId3"/>
+              </a:rPr>
+              <a:t>https://github.com/KillianLucas/open-interpreter</a:t>
+            </a:r>
+            <a:endParaRPr sz="1000">
+              <a:solidFill>
+                <a:srgbClr val="0F0F0F"/>
+              </a:solidFill>
+              <a:latin typeface="Calibri"/>
+              <a:ea typeface="Calibri"/>
+              <a:cs typeface="Calibri"/>
+              <a:sym typeface="Calibri"/>
+            </a:endParaRPr>
+          </a:p>
+          <a:p>
+            <a:pPr marL="228600" lvl="0" indent="-177800" algn="l" rtl="0">
+              <a:spcBef>
+                <a:spcPts val="0"/>
+              </a:spcBef>
+              <a:spcAft>
+                <a:spcPts val="0"/>
+              </a:spcAft>
+              <a:buSzPts val="1000"/>
+              <a:buFont typeface="Calibri"/>
+              <a:buChar char="●"/>
+            </a:pPr>
+            <a:r>
+              <a:rPr lang="en" sz="1000" u="sng">
+                <a:solidFill>
+                  <a:schemeClr val="hlink"/>
+                </a:solidFill>
+                <a:latin typeface="Calibri"/>
+                <a:ea typeface="Calibri"/>
+                <a:cs typeface="Calibri"/>
+                <a:sym typeface="Calibri"/>
+                <a:hlinkClick r:id="rId4"/>
+              </a:rPr>
+              <a:t>https://www.youtube.com/watch?v=xPd8FFzIeOw</a:t>
+            </a:r>
+            <a:r>
+              <a:rPr lang="en" sz="1000">
+                <a:solidFill>
+                  <a:srgbClr val="0F0F0F"/>
+                </a:solidFill>
+                <a:latin typeface="Calibri"/>
+                <a:ea typeface="Calibri"/>
+                <a:cs typeface="Calibri"/>
+                <a:sym typeface="Calibri"/>
+              </a:rPr>
+              <a:t> - video demo</a:t>
+            </a:r>
+            <a:endParaRPr sz="1000">
+              <a:solidFill>
+                <a:srgbClr val="0F0F0F"/>
+              </a:solidFill>
+              <a:latin typeface="Calibri"/>
+              <a:ea typeface="Calibri"/>
+              <a:cs typeface="Calibri"/>
+              <a:sym typeface="Calibri"/>
+            </a:endParaRPr>
+          </a:p>
+          <a:p>
+            <a:pPr marL="228600" lvl="0" indent="-177800" algn="l" rtl="0">
+              <a:spcBef>
+                <a:spcPts val="0"/>
+              </a:spcBef>
+              <a:spcAft>
+                <a:spcPts val="0"/>
+              </a:spcAft>
+              <a:buSzPts val="1000"/>
+              <a:buFont typeface="Calibri"/>
+              <a:buChar char="●"/>
+            </a:pPr>
+            <a:r>
+              <a:rPr lang="en" sz="1000" u="sng">
+                <a:solidFill>
+                  <a:schemeClr val="hlink"/>
+                </a:solidFill>
+                <a:latin typeface="Calibri"/>
+                <a:ea typeface="Calibri"/>
+                <a:cs typeface="Calibri"/>
+                <a:sym typeface="Calibri"/>
+                <a:hlinkClick r:id="rId5"/>
+              </a:rPr>
+              <a:t>https://openinterpreter.com</a:t>
+            </a:r>
+            <a:endParaRPr sz="1000">
+              <a:solidFill>
+                <a:srgbClr val="0F0F0F"/>
+              </a:solidFill>
+              <a:latin typeface="Calibri"/>
+              <a:ea typeface="Calibri"/>
+              <a:cs typeface="Calibri"/>
+              <a:sym typeface="Calibri"/>
+            </a:endParaRPr>
+          </a:p>
+          <a:p>
+            <a:pPr marL="0" lvl="0" indent="0" algn="l" rtl="0">
+              <a:spcBef>
+                <a:spcPts val="0"/>
+              </a:spcBef>
+              <a:spcAft>
+                <a:spcPts val="0"/>
+              </a:spcAft>
+              <a:buNone/>
+            </a:pPr>
+            <a:endParaRPr sz="1300">
+              <a:solidFill>
+                <a:srgbClr val="0F0F0F"/>
+              </a:solidFill>
+              <a:latin typeface="Calibri"/>
+              <a:ea typeface="Calibri"/>
+              <a:cs typeface="Calibri"/>
+              <a:sym typeface="Calibri"/>
+            </a:endParaRPr>
+          </a:p>
+          <a:p>
+            <a:pPr marL="0" lvl="0" indent="0" algn="l" rtl="0">
+              <a:spcBef>
+                <a:spcPts val="0"/>
+              </a:spcBef>
+              <a:spcAft>
+                <a:spcPts val="0"/>
+              </a:spcAft>
+              <a:buNone/>
+            </a:pPr>
+            <a:r>
+              <a:rPr lang="en" sz="1300">
+                <a:solidFill>
+                  <a:srgbClr val="0F0F0F"/>
+                </a:solidFill>
+                <a:latin typeface="Calibri"/>
+                <a:ea typeface="Calibri"/>
+                <a:cs typeface="Calibri"/>
+                <a:sym typeface="Calibri"/>
+              </a:rPr>
+              <a:t>Note: use "bash"</a:t>
+            </a:r>
+            <a:endParaRPr sz="1300">
+              <a:solidFill>
+                <a:srgbClr val="0F0F0F"/>
+              </a:solidFill>
+              <a:latin typeface="Calibri"/>
+              <a:ea typeface="Calibri"/>
+              <a:cs typeface="Calibri"/>
+              <a:sym typeface="Calibri"/>
+            </a:endParaRPr>
+          </a:p>
+          <a:p>
+            <a:pPr marL="0" lvl="0" indent="0" algn="l" rtl="0">
+              <a:spcBef>
+                <a:spcPts val="0"/>
+              </a:spcBef>
+              <a:spcAft>
+                <a:spcPts val="0"/>
+              </a:spcAft>
+              <a:buNone/>
+            </a:pPr>
+            <a:endParaRPr sz="1300">
+              <a:solidFill>
+                <a:srgbClr val="0F0F0F"/>
+              </a:solidFill>
+              <a:latin typeface="Calibri"/>
+              <a:ea typeface="Calibri"/>
+              <a:cs typeface="Calibri"/>
+              <a:sym typeface="Calibri"/>
+            </a:endParaRPr>
+          </a:p>
+          <a:p>
+            <a:pPr marL="0" lvl="0" indent="0" algn="l" rtl="0">
+              <a:spcBef>
+                <a:spcPts val="0"/>
+              </a:spcBef>
+              <a:spcAft>
+                <a:spcPts val="0"/>
+              </a:spcAft>
+              <a:buNone/>
+            </a:pPr>
+            <a:r>
+              <a:rPr lang="en" sz="1300" b="1">
+                <a:solidFill>
+                  <a:srgbClr val="3C78D8"/>
+                </a:solidFill>
+                <a:latin typeface="Calibri"/>
+                <a:ea typeface="Calibri"/>
+                <a:cs typeface="Calibri"/>
+                <a:sym typeface="Calibri"/>
+              </a:rPr>
+              <a:t>pip install open-interpreter</a:t>
+            </a:r>
+            <a:endParaRPr sz="1300" b="1">
+              <a:solidFill>
+                <a:srgbClr val="3C78D8"/>
+              </a:solidFill>
+              <a:latin typeface="Calibri"/>
+              <a:ea typeface="Calibri"/>
+              <a:cs typeface="Calibri"/>
+              <a:sym typeface="Calibri"/>
+            </a:endParaRPr>
+          </a:p>
+          <a:p>
+            <a:pPr marL="0" lvl="0" indent="0" algn="l" rtl="0">
+              <a:spcBef>
+                <a:spcPts val="0"/>
+              </a:spcBef>
+              <a:spcAft>
+                <a:spcPts val="0"/>
+              </a:spcAft>
+              <a:buNone/>
+            </a:pPr>
+            <a:endParaRPr sz="1300">
+              <a:solidFill>
+                <a:srgbClr val="0F0F0F"/>
+              </a:solidFill>
+              <a:latin typeface="Calibri"/>
+              <a:ea typeface="Calibri"/>
+              <a:cs typeface="Calibri"/>
+              <a:sym typeface="Calibri"/>
+            </a:endParaRPr>
+          </a:p>
+          <a:p>
+            <a:pPr marL="0" lvl="0" indent="0" algn="l" rtl="0">
+              <a:spcBef>
+                <a:spcPts val="0"/>
+              </a:spcBef>
+              <a:spcAft>
+                <a:spcPts val="0"/>
+              </a:spcAft>
+              <a:buNone/>
+            </a:pPr>
+            <a:r>
+              <a:rPr lang="en" sz="1300" b="1">
+                <a:solidFill>
+                  <a:srgbClr val="3C78D8"/>
+                </a:solidFill>
+                <a:latin typeface="Calibri"/>
+                <a:ea typeface="Calibri"/>
+                <a:cs typeface="Calibri"/>
+                <a:sym typeface="Calibri"/>
+              </a:rPr>
+              <a:t>interpreter   </a:t>
+            </a:r>
+            <a:r>
+              <a:rPr lang="en" sz="1300" b="1">
+                <a:solidFill>
+                  <a:srgbClr val="6AA84F"/>
+                </a:solidFill>
+                <a:latin typeface="Calibri"/>
+                <a:ea typeface="Calibri"/>
+                <a:cs typeface="Calibri"/>
+                <a:sym typeface="Calibri"/>
+              </a:rPr>
+              <a:t># start running it</a:t>
+            </a:r>
+            <a:endParaRPr sz="1300" b="1">
+              <a:solidFill>
+                <a:srgbClr val="6AA84F"/>
+              </a:solidFill>
+              <a:latin typeface="Calibri"/>
+              <a:ea typeface="Calibri"/>
+              <a:cs typeface="Calibri"/>
+              <a:sym typeface="Calibri"/>
+            </a:endParaRPr>
+          </a:p>
+          <a:p>
+            <a:pPr marL="0" lvl="0" indent="0" algn="l" rtl="0">
+              <a:spcBef>
+                <a:spcPts val="0"/>
+              </a:spcBef>
+              <a:spcAft>
+                <a:spcPts val="0"/>
+              </a:spcAft>
+              <a:buNone/>
+            </a:pPr>
+            <a:endParaRPr sz="1300" b="1">
+              <a:solidFill>
+                <a:srgbClr val="6AA84F"/>
+              </a:solidFill>
+              <a:latin typeface="Calibri"/>
+              <a:ea typeface="Calibri"/>
+              <a:cs typeface="Calibri"/>
+              <a:sym typeface="Calibri"/>
+            </a:endParaRPr>
+          </a:p>
+          <a:p>
+            <a:pPr marL="0" lvl="0" indent="0" algn="l" rtl="0">
+              <a:spcBef>
+                <a:spcPts val="0"/>
+              </a:spcBef>
+              <a:spcAft>
+                <a:spcPts val="0"/>
+              </a:spcAft>
+              <a:buNone/>
+            </a:pPr>
+            <a:r>
+              <a:rPr lang="en" sz="1300" b="1">
+                <a:solidFill>
+                  <a:srgbClr val="3C78D8"/>
+                </a:solidFill>
+                <a:latin typeface="Calibri"/>
+                <a:ea typeface="Calibri"/>
+                <a:cs typeface="Calibri"/>
+                <a:sym typeface="Calibri"/>
+              </a:rPr>
+              <a:t>interpreter --local   </a:t>
+            </a:r>
+            <a:r>
+              <a:rPr lang="en" sz="1300" b="1">
+                <a:solidFill>
+                  <a:srgbClr val="6AA84F"/>
+                </a:solidFill>
+                <a:latin typeface="Calibri"/>
+                <a:ea typeface="Calibri"/>
+                <a:cs typeface="Calibri"/>
+                <a:sym typeface="Calibri"/>
+              </a:rPr>
+              <a:t># use local LLM from LMStudio</a:t>
+            </a:r>
+            <a:endParaRPr sz="1300" b="1">
+              <a:solidFill>
+                <a:srgbClr val="6AA84F"/>
+              </a:solidFill>
+              <a:latin typeface="Calibri"/>
+              <a:ea typeface="Calibri"/>
+              <a:cs typeface="Calibri"/>
+              <a:sym typeface="Calibri"/>
+            </a:endParaRPr>
+          </a:p>
+          <a:p>
+            <a:pPr marL="0" lvl="0" indent="0" algn="l" rtl="0">
+              <a:spcBef>
+                <a:spcPts val="0"/>
+              </a:spcBef>
+              <a:spcAft>
+                <a:spcPts val="0"/>
+              </a:spcAft>
+              <a:buClr>
+                <a:schemeClr val="dk1"/>
+              </a:buClr>
+              <a:buSzPts val="1100"/>
+              <a:buFont typeface="Arial"/>
+              <a:buNone/>
+            </a:pPr>
+            <a:endParaRPr sz="1300" b="1">
+              <a:solidFill>
+                <a:srgbClr val="6AA84F"/>
+              </a:solidFill>
+              <a:latin typeface="Calibri"/>
+              <a:ea typeface="Calibri"/>
+              <a:cs typeface="Calibri"/>
+              <a:sym typeface="Calibri"/>
+            </a:endParaRPr>
+          </a:p>
+          <a:p>
+            <a:pPr marL="0" lvl="0" indent="0" algn="l" rtl="0">
+              <a:spcBef>
+                <a:spcPts val="0"/>
+              </a:spcBef>
+              <a:spcAft>
+                <a:spcPts val="0"/>
+              </a:spcAft>
+              <a:buNone/>
+            </a:pPr>
+            <a:r>
+              <a:rPr lang="en" sz="1300" b="1">
+                <a:solidFill>
+                  <a:srgbClr val="3C78D8"/>
+                </a:solidFill>
+                <a:latin typeface="Calibri"/>
+                <a:ea typeface="Calibri"/>
+                <a:cs typeface="Calibri"/>
+                <a:sym typeface="Calibri"/>
+              </a:rPr>
+              <a:t>interpreter  --vision </a:t>
+            </a:r>
+            <a:r>
+              <a:rPr lang="en" sz="1300" b="1">
+                <a:solidFill>
+                  <a:srgbClr val="6AA84F"/>
+                </a:solidFill>
+                <a:latin typeface="Calibri"/>
+                <a:ea typeface="Calibri"/>
+                <a:cs typeface="Calibri"/>
+                <a:sym typeface="Calibri"/>
+              </a:rPr>
+              <a:t># in "vision" mode</a:t>
+            </a:r>
+            <a:endParaRPr sz="1300" b="1">
+              <a:solidFill>
+                <a:srgbClr val="6AA84F"/>
+              </a:solidFill>
+              <a:latin typeface="Calibri"/>
+              <a:ea typeface="Calibri"/>
+              <a:cs typeface="Calibri"/>
+              <a:sym typeface="Calibri"/>
+            </a:endParaRPr>
+          </a:p>
+        </p:txBody>
+      </p:sp>
+      <p:pic>
+        <p:nvPicPr>
+          <p:cNvPr id="128" name="Google Shape;128;p21"/>
+          <p:cNvPicPr preferRelativeResize="0"/>
+          <p:nvPr/>
+        </p:nvPicPr>
+        <p:blipFill>
+          <a:blip r:embed="rId6" cstate="email">
+            <a:alphaModFix/>
+            <a:extLst>
+              <a:ext uri="{28A0092B-C50C-407E-A947-70E740481C1C}">
+                <a14:useLocalDpi xmlns:a14="http://schemas.microsoft.com/office/drawing/2010/main"/>
+              </a:ext>
+            </a:extLst>
+          </a:blip>
+          <a:stretch>
+            <a:fillRect/>
+          </a:stretch>
+        </p:blipFill>
+        <p:spPr>
+          <a:xfrm>
+            <a:off x="6478625" y="107976"/>
+            <a:ext cx="2578652" cy="1459300"/>
+          </a:xfrm>
+          <a:prstGeom prst="rect">
+            <a:avLst/>
+          </a:prstGeom>
+          <a:noFill/>
+          <a:ln>
+            <a:noFill/>
+          </a:ln>
+        </p:spPr>
+      </p:pic>
+      <p:sp>
+        <p:nvSpPr>
+          <p:cNvPr id="129" name="Google Shape;129;p21"/>
+          <p:cNvSpPr txBox="1"/>
+          <p:nvPr/>
+        </p:nvSpPr>
+        <p:spPr>
+          <a:xfrm>
+            <a:off x="4101475" y="1961600"/>
+            <a:ext cx="4901400" cy="1877700"/>
+          </a:xfrm>
+          <a:prstGeom prst="rect">
+            <a:avLst/>
+          </a:prstGeom>
+          <a:solidFill>
+            <a:srgbClr val="FFF2CC"/>
+          </a:solidFill>
+          <a:ln w="9525" cap="flat" cmpd="sng">
+            <a:solidFill>
+              <a:srgbClr val="FF0000"/>
+            </a:solidFill>
+            <a:prstDash val="solid"/>
+            <a:round/>
+            <a:headEnd type="none" w="sm" len="sm"/>
+            <a:tailEnd type="none" w="sm" len="sm"/>
+          </a:ln>
+        </p:spPr>
+        <p:txBody>
+          <a:bodyPr spcFirstLastPara="1" wrap="square" lIns="91425" tIns="91425" rIns="91425" bIns="91425" anchor="t" anchorCtr="0">
+            <a:spAutoFit/>
+          </a:bodyPr>
+          <a:lstStyle/>
+          <a:p>
+            <a:pPr marL="0" lvl="0" indent="0" algn="l" rtl="0">
+              <a:spcBef>
+                <a:spcPts val="0"/>
+              </a:spcBef>
+              <a:spcAft>
+                <a:spcPts val="0"/>
+              </a:spcAft>
+              <a:buClr>
+                <a:schemeClr val="dk1"/>
+              </a:buClr>
+              <a:buSzPts val="1100"/>
+              <a:buFont typeface="Arial"/>
+              <a:buNone/>
+            </a:pPr>
+            <a:r>
+              <a:rPr lang="en" sz="1100">
+                <a:solidFill>
+                  <a:srgbClr val="3C78D8"/>
+                </a:solidFill>
+                <a:latin typeface="Roboto Mono"/>
+                <a:ea typeface="Roboto Mono"/>
+                <a:cs typeface="Roboto Mono"/>
+                <a:sym typeface="Roboto Mono"/>
+              </a:rPr>
+              <a:t>interpreter --help</a:t>
+            </a:r>
+            <a:endParaRPr sz="1100">
+              <a:solidFill>
+                <a:srgbClr val="3C78D8"/>
+              </a:solidFill>
+              <a:latin typeface="Roboto Mono"/>
+              <a:ea typeface="Roboto Mono"/>
+              <a:cs typeface="Roboto Mono"/>
+              <a:sym typeface="Roboto Mono"/>
+            </a:endParaRPr>
+          </a:p>
+          <a:p>
+            <a:pPr marL="0" lvl="0" indent="0" algn="l" rtl="0">
+              <a:spcBef>
+                <a:spcPts val="0"/>
+              </a:spcBef>
+              <a:spcAft>
+                <a:spcPts val="0"/>
+              </a:spcAft>
+              <a:buClr>
+                <a:schemeClr val="dk1"/>
+              </a:buClr>
+              <a:buSzPts val="1100"/>
+              <a:buFont typeface="Arial"/>
+              <a:buNone/>
+            </a:pPr>
+            <a:r>
+              <a:rPr lang="en" sz="1100">
+                <a:solidFill>
+                  <a:srgbClr val="3C78D8"/>
+                </a:solidFill>
+                <a:latin typeface="Roboto Mono"/>
+                <a:ea typeface="Roboto Mono"/>
+                <a:cs typeface="Roboto Mono"/>
+                <a:sym typeface="Roboto Mono"/>
+              </a:rPr>
+              <a:t>usage: interpreter [-h] [-ci CUSTOM_INSTRUCTIONS] [-s SYSTEM_MESSAGE] [-y] [-v] [-m MODEL] [-t TEMPERATURE] [-lsv] [-lsf] [-c CONTEXT_WINDOW] [-x MAX_TOKENS] [-b MAX_BUDGET] [-ab API_BASE] [-ak API_KEY] </a:t>
+            </a:r>
+            <a:br>
+              <a:rPr lang="en" sz="1100">
+                <a:solidFill>
+                  <a:srgbClr val="3C78D8"/>
+                </a:solidFill>
+                <a:latin typeface="Roboto Mono"/>
+                <a:ea typeface="Roboto Mono"/>
+                <a:cs typeface="Roboto Mono"/>
+                <a:sym typeface="Roboto Mono"/>
+              </a:rPr>
+            </a:br>
+            <a:r>
+              <a:rPr lang="en" sz="1100">
+                <a:solidFill>
+                  <a:srgbClr val="3C78D8"/>
+                </a:solidFill>
+                <a:latin typeface="Roboto Mono"/>
+                <a:ea typeface="Roboto Mono"/>
+                <a:cs typeface="Roboto Mono"/>
+                <a:sym typeface="Roboto Mono"/>
+              </a:rPr>
+              <a:t>[-av API_VERSION] [-xo MAX_OUTPUT] [-fc] [-dt] [-o] [-sm] [-safe {off,ask,auto}] [-cf CONFIG_FILE] [-f] [-l] [-vi] [-os] [--config] [--reset_config]  [--conversations] [--version]</a:t>
+            </a:r>
+            <a:endParaRPr sz="1100">
+              <a:solidFill>
+                <a:srgbClr val="3C78D8"/>
+              </a:solidFill>
+              <a:latin typeface="Roboto Mono"/>
+              <a:ea typeface="Roboto Mono"/>
+              <a:cs typeface="Roboto Mono"/>
+              <a:sym typeface="Roboto Mono"/>
+            </a:endParaRPr>
+          </a:p>
+          <a:p>
+            <a:pPr marL="0" lvl="0" indent="0" algn="l" rtl="0">
+              <a:spcBef>
+                <a:spcPts val="0"/>
+              </a:spcBef>
+              <a:spcAft>
+                <a:spcPts val="0"/>
+              </a:spcAft>
+              <a:buNone/>
+            </a:pPr>
+            <a:endParaRPr sz="1100">
+              <a:solidFill>
+                <a:srgbClr val="3C78D8"/>
+              </a:solidFill>
+              <a:latin typeface="Roboto Mono"/>
+              <a:ea typeface="Roboto Mono"/>
+              <a:cs typeface="Roboto Mono"/>
+              <a:sym typeface="Roboto Mono"/>
+            </a:endParaRPr>
+          </a:p>
+        </p:txBody>
+      </p:sp>
+    </p:spTree>
+  </p:cSld>
+  <p:clrMapOvr>
+    <a:masterClrMapping/>
+  </p:clrMapOvr>
+</p:sld>
+</file>
+
+<file path=ppt/slides/slide8.xml><?xml version="1.0" encoding="utf-8"?>
+<p:sld xmlns:a="http://schemas.openxmlformats.org/drawingml/2006/main" xmlns:r="http://schemas.openxmlformats.org/officeDocument/2006/relationships" xmlns:p="http://schemas.openxmlformats.org/presentationml/2006/main">
+  <p:cSld>
+    <p:spTree>
+      <p:nvGrpSpPr>
+        <p:cNvPr id="1" name="Shape 133"/>
+        <p:cNvGrpSpPr/>
+        <p:nvPr/>
+      </p:nvGrpSpPr>
+      <p:grpSpPr>
+        <a:xfrm>
+          <a:off x="0" y="0"/>
+          <a:ext cx="0" cy="0"/>
+          <a:chOff x="0" y="0"/>
+          <a:chExt cx="0" cy="0"/>
+        </a:xfrm>
+      </p:grpSpPr>
+      <p:sp>
+        <p:nvSpPr>
+          <p:cNvPr id="134" name="Google Shape;134;p22"/>
+          <p:cNvSpPr txBox="1"/>
+          <p:nvPr/>
+        </p:nvSpPr>
+        <p:spPr>
+          <a:xfrm>
+            <a:off x="72300" y="0"/>
             <a:ext cx="1661700" cy="326400"/>
           </a:xfrm>
           <a:prstGeom prst="rect">
@@ -40439,7 +42461,7 @@
       </p:sp>
       <p:sp>
         <p:nvSpPr>
-          <p:cNvPr id="127" name="Google Shape;127;p21"/>
+          <p:cNvPr id="135" name="Google Shape;135;p22"/>
           <p:cNvSpPr txBox="1"/>
           <p:nvPr/>
         </p:nvSpPr>
@@ -40870,7 +42892,7 @@
       </p:sp>
       <p:pic>
         <p:nvPicPr>
-          <p:cNvPr id="128" name="Google Shape;128;p21"/>
+          <p:cNvPr id="136" name="Google Shape;136;p22"/>
           <p:cNvPicPr preferRelativeResize="0"/>
           <p:nvPr/>
         </p:nvPicPr>
@@ -40909,7 +42931,7 @@
       </p:pic>
       <p:pic>
         <p:nvPicPr>
-          <p:cNvPr id="129" name="Google Shape;129;p21"/>
+          <p:cNvPr id="137" name="Google Shape;137;p22"/>
           <p:cNvPicPr preferRelativeResize="0"/>
           <p:nvPr/>
         </p:nvPicPr>
@@ -40948,12 +42970,12 @@
 </p:sld>
 </file>
 
-<file path=ppt/slides/slide8.xml><?xml version="1.0" encoding="utf-8"?>
+<file path=ppt/slides/slide9.xml><?xml version="1.0" encoding="utf-8"?>
 <p:sld xmlns:a="http://schemas.openxmlformats.org/drawingml/2006/main" xmlns:r="http://schemas.openxmlformats.org/officeDocument/2006/relationships" xmlns:p="http://schemas.openxmlformats.org/presentationml/2006/main">
   <p:cSld>
     <p:spTree>
       <p:nvGrpSpPr>
-        <p:cNvPr id="1" name="Shape 133"/>
+        <p:cNvPr id="1" name="Shape 141"/>
         <p:cNvGrpSpPr/>
         <p:nvPr/>
       </p:nvGrpSpPr>
@@ -40967,7 +42989,7 @@
       </p:grpSpPr>
       <p:sp>
         <p:nvSpPr>
-          <p:cNvPr id="134" name="Google Shape;134;p22"/>
+          <p:cNvPr id="142" name="Google Shape;142;p23"/>
           <p:cNvSpPr txBox="1"/>
           <p:nvPr/>
         </p:nvSpPr>
@@ -41022,7 +43044,7 @@
       </p:sp>
       <p:sp>
         <p:nvSpPr>
-          <p:cNvPr id="135" name="Google Shape;135;p22"/>
+          <p:cNvPr id="143" name="Google Shape;143;p23"/>
           <p:cNvSpPr txBox="1"/>
           <p:nvPr/>
         </p:nvSpPr>
@@ -41267,7 +43289,7 @@
       </p:sp>
       <p:sp>
         <p:nvSpPr>
-          <p:cNvPr id="136" name="Google Shape;136;p22"/>
+          <p:cNvPr id="144" name="Google Shape;144;p23"/>
           <p:cNvSpPr txBox="1"/>
           <p:nvPr/>
         </p:nvSpPr>
@@ -41770,7 +43792,7 @@
       </p:sp>
       <p:sp>
         <p:nvSpPr>
-          <p:cNvPr id="137" name="Google Shape;137;p22"/>
+          <p:cNvPr id="145" name="Google Shape;145;p23"/>
           <p:cNvSpPr txBox="1"/>
           <p:nvPr/>
         </p:nvSpPr>
@@ -42149,7 +44171,7 @@
       </p:sp>
       <p:pic>
         <p:nvPicPr>
-          <p:cNvPr id="138" name="Google Shape;138;p22"/>
+          <p:cNvPr id="146" name="Google Shape;146;p23"/>
           <p:cNvPicPr preferRelativeResize="0"/>
           <p:nvPr/>
         </p:nvPicPr>
@@ -42188,7 +44210,7 @@
       </p:pic>
       <p:pic>
         <p:nvPicPr>
-          <p:cNvPr id="139" name="Google Shape;139;p22"/>
+          <p:cNvPr id="147" name="Google Shape;147;p23"/>
           <p:cNvPicPr preferRelativeResize="0"/>
           <p:nvPr/>
         </p:nvPicPr>
@@ -42227,7 +44249,7 @@
       </p:pic>
       <p:pic>
         <p:nvPicPr>
-          <p:cNvPr id="140" name="Google Shape;140;p22"/>
+          <p:cNvPr id="148" name="Google Shape;148;p23"/>
           <p:cNvPicPr preferRelativeResize="0"/>
           <p:nvPr/>
         </p:nvPicPr>
@@ -42248,1056 +44270,6 @@
           <a:xfrm>
             <a:off x="4203600" y="3226025"/>
             <a:ext cx="2196511" cy="1381550"/>
-          </a:xfrm>
-          <a:prstGeom prst="rect">
-            <a:avLst/>
-          </a:prstGeom>
-          <a:noFill/>
-          <a:ln w="9525" cap="flat" cmpd="sng">
-            <a:solidFill>
-              <a:srgbClr val="FF0000"/>
-            </a:solidFill>
-            <a:prstDash val="solid"/>
-            <a:round/>
-            <a:headEnd type="none" w="sm" len="sm"/>
-            <a:tailEnd type="none" w="sm" len="sm"/>
-          </a:ln>
-        </p:spPr>
-      </p:pic>
-    </p:spTree>
-  </p:cSld>
-  <p:clrMapOvr>
-    <a:masterClrMapping/>
-  </p:clrMapOvr>
-</p:sld>
-</file>
-
-<file path=ppt/slides/slide9.xml><?xml version="1.0" encoding="utf-8"?>
-<p:sld xmlns:a="http://schemas.openxmlformats.org/drawingml/2006/main" xmlns:r="http://schemas.openxmlformats.org/officeDocument/2006/relationships" xmlns:p="http://schemas.openxmlformats.org/presentationml/2006/main">
-  <p:cSld>
-    <p:spTree>
-      <p:nvGrpSpPr>
-        <p:cNvPr id="1" name="Shape 144"/>
-        <p:cNvGrpSpPr/>
-        <p:nvPr/>
-      </p:nvGrpSpPr>
-      <p:grpSpPr>
-        <a:xfrm>
-          <a:off x="0" y="0"/>
-          <a:ext cx="0" cy="0"/>
-          <a:chOff x="0" y="0"/>
-          <a:chExt cx="0" cy="0"/>
-        </a:xfrm>
-      </p:grpSpPr>
-      <p:sp>
-        <p:nvSpPr>
-          <p:cNvPr id="145" name="Google Shape;145;p23"/>
-          <p:cNvSpPr txBox="1"/>
-          <p:nvPr/>
-        </p:nvSpPr>
-        <p:spPr>
-          <a:xfrm>
-            <a:off x="72300" y="0"/>
-            <a:ext cx="4131300" cy="326400"/>
-          </a:xfrm>
-          <a:prstGeom prst="rect">
-            <a:avLst/>
-          </a:prstGeom>
-          <a:noFill/>
-          <a:ln>
-            <a:noFill/>
-          </a:ln>
-        </p:spPr>
-        <p:txBody>
-          <a:bodyPr spcFirstLastPara="1" wrap="square" lIns="9125" tIns="9125" rIns="9125" bIns="9125" anchor="t" anchorCtr="0">
-            <a:spAutoFit/>
-          </a:bodyPr>
-          <a:lstStyle/>
-          <a:p>
-            <a:pPr marL="0" lvl="0" indent="0" algn="l" rtl="0">
-              <a:spcBef>
-                <a:spcPts val="0"/>
-              </a:spcBef>
-              <a:spcAft>
-                <a:spcPts val="0"/>
-              </a:spcAft>
-              <a:buNone/>
-            </a:pPr>
-            <a:r>
-              <a:rPr lang="en" sz="2000" b="1">
-                <a:solidFill>
-                  <a:schemeClr val="dk1"/>
-                </a:solidFill>
-                <a:latin typeface="Calibri"/>
-                <a:ea typeface="Calibri"/>
-                <a:cs typeface="Calibri"/>
-                <a:sym typeface="Calibri"/>
-              </a:rPr>
-              <a:t>Misc - 2</a:t>
-            </a:r>
-            <a:endParaRPr sz="2000" b="1">
-              <a:latin typeface="Calibri"/>
-              <a:ea typeface="Calibri"/>
-              <a:cs typeface="Calibri"/>
-              <a:sym typeface="Calibri"/>
-            </a:endParaRPr>
-          </a:p>
-        </p:txBody>
-      </p:sp>
-      <p:sp>
-        <p:nvSpPr>
-          <p:cNvPr id="146" name="Google Shape;146;p23"/>
-          <p:cNvSpPr txBox="1"/>
-          <p:nvPr/>
-        </p:nvSpPr>
-        <p:spPr>
-          <a:xfrm>
-            <a:off x="165975" y="448225"/>
-            <a:ext cx="1935900" cy="661800"/>
-          </a:xfrm>
-          <a:prstGeom prst="rect">
-            <a:avLst/>
-          </a:prstGeom>
-          <a:solidFill>
-            <a:srgbClr val="FFF2CC"/>
-          </a:solidFill>
-          <a:ln w="9525" cap="flat" cmpd="sng">
-            <a:solidFill>
-              <a:srgbClr val="FF0000"/>
-            </a:solidFill>
-            <a:prstDash val="solid"/>
-            <a:round/>
-            <a:headEnd type="none" w="sm" len="sm"/>
-            <a:tailEnd type="none" w="sm" len="sm"/>
-          </a:ln>
-        </p:spPr>
-        <p:txBody>
-          <a:bodyPr spcFirstLastPara="1" wrap="square" lIns="91425" tIns="91425" rIns="91425" bIns="91425" anchor="t" anchorCtr="0">
-            <a:spAutoFit/>
-          </a:bodyPr>
-          <a:lstStyle/>
-          <a:p>
-            <a:pPr marL="0" lvl="0" indent="0" algn="l" rtl="0">
-              <a:spcBef>
-                <a:spcPts val="0"/>
-              </a:spcBef>
-              <a:spcAft>
-                <a:spcPts val="0"/>
-              </a:spcAft>
-              <a:buNone/>
-            </a:pPr>
-            <a:r>
-              <a:rPr lang="en" sz="1300">
-                <a:solidFill>
-                  <a:srgbClr val="0F0F0F"/>
-                </a:solidFill>
-                <a:latin typeface="Calibri"/>
-                <a:ea typeface="Calibri"/>
-                <a:cs typeface="Calibri"/>
-                <a:sym typeface="Calibri"/>
-              </a:rPr>
-              <a:t>AutoGen Studio</a:t>
-            </a:r>
-            <a:endParaRPr sz="1300">
-              <a:solidFill>
-                <a:srgbClr val="0F0F0F"/>
-              </a:solidFill>
-              <a:latin typeface="Calibri"/>
-              <a:ea typeface="Calibri"/>
-              <a:cs typeface="Calibri"/>
-              <a:sym typeface="Calibri"/>
-            </a:endParaRPr>
-          </a:p>
-          <a:p>
-            <a:pPr marL="0" lvl="0" indent="0" algn="l" rtl="0">
-              <a:spcBef>
-                <a:spcPts val="0"/>
-              </a:spcBef>
-              <a:spcAft>
-                <a:spcPts val="0"/>
-              </a:spcAft>
-              <a:buNone/>
-            </a:pPr>
-            <a:r>
-              <a:rPr lang="en" sz="900" u="sng">
-                <a:solidFill>
-                  <a:schemeClr val="hlink"/>
-                </a:solidFill>
-                <a:latin typeface="Calibri"/>
-                <a:ea typeface="Calibri"/>
-                <a:cs typeface="Calibri"/>
-                <a:sym typeface="Calibri"/>
-                <a:hlinkClick r:id="rId3"/>
-              </a:rPr>
-              <a:t>https://microsoft.github.io/autogen/blog/2023/12/01/AutoGenStudio/</a:t>
-            </a:r>
-            <a:endParaRPr sz="1200">
-              <a:solidFill>
-                <a:srgbClr val="0F0F0F"/>
-              </a:solidFill>
-              <a:latin typeface="Calibri"/>
-              <a:ea typeface="Calibri"/>
-              <a:cs typeface="Calibri"/>
-              <a:sym typeface="Calibri"/>
-            </a:endParaRPr>
-          </a:p>
-        </p:txBody>
-      </p:sp>
-      <p:sp>
-        <p:nvSpPr>
-          <p:cNvPr id="147" name="Google Shape;147;p23"/>
-          <p:cNvSpPr txBox="1"/>
-          <p:nvPr/>
-        </p:nvSpPr>
-        <p:spPr>
-          <a:xfrm>
-            <a:off x="6826100" y="59500"/>
-            <a:ext cx="2230500" cy="892800"/>
-          </a:xfrm>
-          <a:prstGeom prst="rect">
-            <a:avLst/>
-          </a:prstGeom>
-          <a:solidFill>
-            <a:srgbClr val="FFF2CC"/>
-          </a:solidFill>
-          <a:ln w="9525" cap="flat" cmpd="sng">
-            <a:solidFill>
-              <a:srgbClr val="FF0000"/>
-            </a:solidFill>
-            <a:prstDash val="solid"/>
-            <a:round/>
-            <a:headEnd type="none" w="sm" len="sm"/>
-            <a:tailEnd type="none" w="sm" len="sm"/>
-          </a:ln>
-        </p:spPr>
-        <p:txBody>
-          <a:bodyPr spcFirstLastPara="1" wrap="square" lIns="91425" tIns="91425" rIns="91425" bIns="91425" anchor="t" anchorCtr="0">
-            <a:spAutoFit/>
-          </a:bodyPr>
-          <a:lstStyle/>
-          <a:p>
-            <a:pPr marL="0" lvl="0" indent="0" algn="l" rtl="0">
-              <a:spcBef>
-                <a:spcPts val="0"/>
-              </a:spcBef>
-              <a:spcAft>
-                <a:spcPts val="0"/>
-              </a:spcAft>
-              <a:buNone/>
-            </a:pPr>
-            <a:r>
-              <a:rPr lang="en" sz="1300">
-                <a:solidFill>
-                  <a:srgbClr val="0F0F0F"/>
-                </a:solidFill>
-                <a:latin typeface="Calibri"/>
-                <a:ea typeface="Calibri"/>
-                <a:cs typeface="Calibri"/>
-                <a:sym typeface="Calibri"/>
-              </a:rPr>
-              <a:t>TechGPT-2.0: A LLM for knowledge graph construction</a:t>
-            </a:r>
-            <a:endParaRPr sz="1300">
-              <a:solidFill>
-                <a:srgbClr val="0F0F0F"/>
-              </a:solidFill>
-              <a:latin typeface="Calibri"/>
-              <a:ea typeface="Calibri"/>
-              <a:cs typeface="Calibri"/>
-              <a:sym typeface="Calibri"/>
-            </a:endParaRPr>
-          </a:p>
-          <a:p>
-            <a:pPr marL="0" lvl="0" indent="0" algn="l" rtl="0">
-              <a:spcBef>
-                <a:spcPts val="0"/>
-              </a:spcBef>
-              <a:spcAft>
-                <a:spcPts val="0"/>
-              </a:spcAft>
-              <a:buNone/>
-            </a:pPr>
-            <a:r>
-              <a:rPr lang="en" sz="1000" u="sng">
-                <a:solidFill>
-                  <a:schemeClr val="hlink"/>
-                </a:solidFill>
-                <a:latin typeface="Calibri"/>
-                <a:ea typeface="Calibri"/>
-                <a:cs typeface="Calibri"/>
-                <a:sym typeface="Calibri"/>
-                <a:hlinkClick r:id="rId4"/>
-              </a:rPr>
-              <a:t>https://arxiv.org/abs/2401.04507v1</a:t>
-            </a:r>
-            <a:r>
-              <a:rPr lang="en" sz="1000">
-                <a:solidFill>
-                  <a:srgbClr val="0F0F0F"/>
-                </a:solidFill>
-                <a:latin typeface="Calibri"/>
-                <a:ea typeface="Calibri"/>
-                <a:cs typeface="Calibri"/>
-                <a:sym typeface="Calibri"/>
-              </a:rPr>
-              <a:t> </a:t>
-            </a:r>
-            <a:endParaRPr sz="1000">
-              <a:solidFill>
-                <a:srgbClr val="0F0F0F"/>
-              </a:solidFill>
-              <a:latin typeface="Calibri"/>
-              <a:ea typeface="Calibri"/>
-              <a:cs typeface="Calibri"/>
-              <a:sym typeface="Calibri"/>
-            </a:endParaRPr>
-          </a:p>
-          <a:p>
-            <a:pPr marL="0" lvl="0" indent="0" algn="l" rtl="0">
-              <a:spcBef>
-                <a:spcPts val="0"/>
-              </a:spcBef>
-              <a:spcAft>
-                <a:spcPts val="0"/>
-              </a:spcAft>
-              <a:buNone/>
-            </a:pPr>
-            <a:r>
-              <a:rPr lang="en" sz="1000" u="sng">
-                <a:solidFill>
-                  <a:schemeClr val="hlink"/>
-                </a:solidFill>
-                <a:latin typeface="Calibri"/>
-                <a:ea typeface="Calibri"/>
-                <a:cs typeface="Calibri"/>
-                <a:sym typeface="Calibri"/>
-                <a:hlinkClick r:id="rId5"/>
-              </a:rPr>
-              <a:t>https://github.com/neukg/TechGPT-2.0</a:t>
-            </a:r>
-            <a:r>
-              <a:rPr lang="en" sz="1000">
-                <a:solidFill>
-                  <a:srgbClr val="0F0F0F"/>
-                </a:solidFill>
-                <a:latin typeface="Calibri"/>
-                <a:ea typeface="Calibri"/>
-                <a:cs typeface="Calibri"/>
-                <a:sym typeface="Calibri"/>
-              </a:rPr>
-              <a:t> </a:t>
-            </a:r>
-            <a:endParaRPr sz="1000">
-              <a:solidFill>
-                <a:srgbClr val="0F0F0F"/>
-              </a:solidFill>
-              <a:latin typeface="Calibri"/>
-              <a:ea typeface="Calibri"/>
-              <a:cs typeface="Calibri"/>
-              <a:sym typeface="Calibri"/>
-            </a:endParaRPr>
-          </a:p>
-        </p:txBody>
-      </p:sp>
-      <p:sp>
-        <p:nvSpPr>
-          <p:cNvPr id="148" name="Google Shape;148;p23"/>
-          <p:cNvSpPr txBox="1"/>
-          <p:nvPr/>
-        </p:nvSpPr>
-        <p:spPr>
-          <a:xfrm>
-            <a:off x="2468650" y="59500"/>
-            <a:ext cx="2443800" cy="1293000"/>
-          </a:xfrm>
-          <a:prstGeom prst="rect">
-            <a:avLst/>
-          </a:prstGeom>
-          <a:solidFill>
-            <a:srgbClr val="FFF2CC"/>
-          </a:solidFill>
-          <a:ln w="9525" cap="flat" cmpd="sng">
-            <a:solidFill>
-              <a:srgbClr val="FF0000"/>
-            </a:solidFill>
-            <a:prstDash val="solid"/>
-            <a:round/>
-            <a:headEnd type="none" w="sm" len="sm"/>
-            <a:tailEnd type="none" w="sm" len="sm"/>
-          </a:ln>
-        </p:spPr>
-        <p:txBody>
-          <a:bodyPr spcFirstLastPara="1" wrap="square" lIns="91425" tIns="91425" rIns="91425" bIns="91425" anchor="t" anchorCtr="0">
-            <a:spAutoFit/>
-          </a:bodyPr>
-          <a:lstStyle/>
-          <a:p>
-            <a:pPr marL="0" lvl="0" indent="0" algn="l" rtl="0">
-              <a:spcBef>
-                <a:spcPts val="0"/>
-              </a:spcBef>
-              <a:spcAft>
-                <a:spcPts val="0"/>
-              </a:spcAft>
-              <a:buNone/>
-            </a:pPr>
-            <a:r>
-              <a:rPr lang="en" sz="1300">
-                <a:solidFill>
-                  <a:srgbClr val="0F0F0F"/>
-                </a:solidFill>
-                <a:latin typeface="Calibri"/>
-                <a:ea typeface="Calibri"/>
-                <a:cs typeface="Calibri"/>
-                <a:sym typeface="Calibri"/>
-              </a:rPr>
-              <a:t>Not a single commercial LLM can sort the list of ~100 references according to the last name of the first author</a:t>
-            </a:r>
-            <a:endParaRPr sz="1300">
-              <a:solidFill>
-                <a:srgbClr val="0F0F0F"/>
-              </a:solidFill>
-              <a:latin typeface="Calibri"/>
-              <a:ea typeface="Calibri"/>
-              <a:cs typeface="Calibri"/>
-              <a:sym typeface="Calibri"/>
-            </a:endParaRPr>
-          </a:p>
-          <a:p>
-            <a:pPr marL="0" lvl="0" indent="0" algn="l" rtl="0">
-              <a:spcBef>
-                <a:spcPts val="0"/>
-              </a:spcBef>
-              <a:spcAft>
-                <a:spcPts val="0"/>
-              </a:spcAft>
-              <a:buNone/>
-            </a:pPr>
-            <a:r>
-              <a:rPr lang="en" sz="1000" u="sng">
-                <a:solidFill>
-                  <a:schemeClr val="hlink"/>
-                </a:solidFill>
-                <a:latin typeface="Calibri"/>
-                <a:ea typeface="Calibri"/>
-                <a:cs typeface="Calibri"/>
-                <a:sym typeface="Calibri"/>
-                <a:hlinkClick r:id="rId6"/>
-              </a:rPr>
-              <a:t>https://twitter.com/kchonyc/status/1745151497258872989</a:t>
-            </a:r>
-            <a:r>
-              <a:rPr lang="en" sz="1000">
-                <a:solidFill>
-                  <a:srgbClr val="0F0F0F"/>
-                </a:solidFill>
-                <a:latin typeface="Calibri"/>
-                <a:ea typeface="Calibri"/>
-                <a:cs typeface="Calibri"/>
-                <a:sym typeface="Calibri"/>
-              </a:rPr>
-              <a:t> </a:t>
-            </a:r>
-            <a:endParaRPr sz="1000">
-              <a:solidFill>
-                <a:srgbClr val="0F0F0F"/>
-              </a:solidFill>
-              <a:latin typeface="Calibri"/>
-              <a:ea typeface="Calibri"/>
-              <a:cs typeface="Calibri"/>
-              <a:sym typeface="Calibri"/>
-            </a:endParaRPr>
-          </a:p>
-        </p:txBody>
-      </p:sp>
-      <p:sp>
-        <p:nvSpPr>
-          <p:cNvPr id="149" name="Google Shape;149;p23"/>
-          <p:cNvSpPr txBox="1"/>
-          <p:nvPr/>
-        </p:nvSpPr>
-        <p:spPr>
-          <a:xfrm>
-            <a:off x="5472800" y="1775925"/>
-            <a:ext cx="3583800" cy="1493100"/>
-          </a:xfrm>
-          <a:prstGeom prst="rect">
-            <a:avLst/>
-          </a:prstGeom>
-          <a:solidFill>
-            <a:srgbClr val="FFF2CC"/>
-          </a:solidFill>
-          <a:ln w="9525" cap="flat" cmpd="sng">
-            <a:solidFill>
-              <a:srgbClr val="FF0000"/>
-            </a:solidFill>
-            <a:prstDash val="solid"/>
-            <a:round/>
-            <a:headEnd type="none" w="sm" len="sm"/>
-            <a:tailEnd type="none" w="sm" len="sm"/>
-          </a:ln>
-        </p:spPr>
-        <p:txBody>
-          <a:bodyPr spcFirstLastPara="1" wrap="square" lIns="91425" tIns="91425" rIns="91425" bIns="91425" anchor="t" anchorCtr="0">
-            <a:spAutoFit/>
-          </a:bodyPr>
-          <a:lstStyle/>
-          <a:p>
-            <a:pPr marL="0" lvl="0" indent="0" algn="l" rtl="0">
-              <a:spcBef>
-                <a:spcPts val="0"/>
-              </a:spcBef>
-              <a:spcAft>
-                <a:spcPts val="0"/>
-              </a:spcAft>
-              <a:buNone/>
-            </a:pPr>
-            <a:r>
-              <a:rPr lang="en" sz="1300">
-                <a:solidFill>
-                  <a:srgbClr val="0F0F0F"/>
-                </a:solidFill>
-                <a:latin typeface="Calibri"/>
-                <a:ea typeface="Calibri"/>
-                <a:cs typeface="Calibri"/>
-                <a:sym typeface="Calibri"/>
-              </a:rPr>
-              <a:t>Importance of proper prompting: Depending on the format used in few-shot prompting, you may get accuracies:</a:t>
-            </a:r>
-            <a:endParaRPr sz="1300">
-              <a:solidFill>
-                <a:srgbClr val="0F0F0F"/>
-              </a:solidFill>
-              <a:latin typeface="Calibri"/>
-              <a:ea typeface="Calibri"/>
-              <a:cs typeface="Calibri"/>
-              <a:sym typeface="Calibri"/>
-            </a:endParaRPr>
-          </a:p>
-          <a:p>
-            <a:pPr marL="228600" lvl="0" indent="-196850" algn="l" rtl="0">
-              <a:spcBef>
-                <a:spcPts val="0"/>
-              </a:spcBef>
-              <a:spcAft>
-                <a:spcPts val="0"/>
-              </a:spcAft>
-              <a:buSzPts val="1300"/>
-              <a:buFont typeface="Calibri"/>
-              <a:buChar char="●"/>
-            </a:pPr>
-            <a:r>
-              <a:rPr lang="en" sz="1300">
-                <a:solidFill>
-                  <a:srgbClr val="FF0000"/>
-                </a:solidFill>
-                <a:latin typeface="Calibri"/>
-                <a:ea typeface="Calibri"/>
-                <a:cs typeface="Calibri"/>
-                <a:sym typeface="Calibri"/>
-              </a:rPr>
-              <a:t>4%-88%</a:t>
-            </a:r>
-            <a:r>
-              <a:rPr lang="en" sz="1300">
-                <a:solidFill>
-                  <a:srgbClr val="0F0F0F"/>
-                </a:solidFill>
-                <a:latin typeface="Calibri"/>
-                <a:ea typeface="Calibri"/>
-                <a:cs typeface="Calibri"/>
-                <a:sym typeface="Calibri"/>
-              </a:rPr>
-              <a:t> with LLaMA-2-70B 5-shot</a:t>
-            </a:r>
-            <a:endParaRPr sz="1300">
-              <a:solidFill>
-                <a:srgbClr val="0F0F0F"/>
-              </a:solidFill>
-              <a:latin typeface="Calibri"/>
-              <a:ea typeface="Calibri"/>
-              <a:cs typeface="Calibri"/>
-              <a:sym typeface="Calibri"/>
-            </a:endParaRPr>
-          </a:p>
-          <a:p>
-            <a:pPr marL="228600" lvl="0" indent="-196850" algn="l" rtl="0">
-              <a:spcBef>
-                <a:spcPts val="0"/>
-              </a:spcBef>
-              <a:spcAft>
-                <a:spcPts val="0"/>
-              </a:spcAft>
-              <a:buSzPts val="1300"/>
-              <a:buFont typeface="Calibri"/>
-              <a:buChar char="●"/>
-            </a:pPr>
-            <a:r>
-              <a:rPr lang="en" sz="1300">
-                <a:solidFill>
-                  <a:srgbClr val="FF0000"/>
-                </a:solidFill>
-                <a:latin typeface="Calibri"/>
-                <a:ea typeface="Calibri"/>
-                <a:cs typeface="Calibri"/>
-                <a:sym typeface="Calibri"/>
-              </a:rPr>
-              <a:t>47%-85%</a:t>
-            </a:r>
-            <a:r>
-              <a:rPr lang="en" sz="1300">
-                <a:solidFill>
-                  <a:srgbClr val="0F0F0F"/>
-                </a:solidFill>
-                <a:latin typeface="Calibri"/>
-                <a:ea typeface="Calibri"/>
-                <a:cs typeface="Calibri"/>
-                <a:sym typeface="Calibri"/>
-              </a:rPr>
-              <a:t> w/GPT3.5</a:t>
-            </a:r>
-            <a:endParaRPr sz="1300">
-              <a:solidFill>
-                <a:srgbClr val="0F0F0F"/>
-              </a:solidFill>
-              <a:latin typeface="Calibri"/>
-              <a:ea typeface="Calibri"/>
-              <a:cs typeface="Calibri"/>
-              <a:sym typeface="Calibri"/>
-            </a:endParaRPr>
-          </a:p>
-          <a:p>
-            <a:pPr marL="0" lvl="0" indent="0" algn="l" rtl="0">
-              <a:spcBef>
-                <a:spcPts val="0"/>
-              </a:spcBef>
-              <a:spcAft>
-                <a:spcPts val="0"/>
-              </a:spcAft>
-              <a:buNone/>
-            </a:pPr>
-            <a:r>
-              <a:rPr lang="en" sz="1000" u="sng">
-                <a:solidFill>
-                  <a:schemeClr val="hlink"/>
-                </a:solidFill>
-                <a:latin typeface="Calibri"/>
-                <a:ea typeface="Calibri"/>
-                <a:cs typeface="Calibri"/>
-                <a:sym typeface="Calibri"/>
-                <a:hlinkClick r:id="rId7"/>
-              </a:rPr>
-              <a:t>https://twitter.com/melaniesclar/status/1745557109419458695</a:t>
-            </a:r>
-            <a:r>
-              <a:rPr lang="en" sz="1000">
-                <a:solidFill>
-                  <a:srgbClr val="0F0F0F"/>
-                </a:solidFill>
-                <a:latin typeface="Calibri"/>
-                <a:ea typeface="Calibri"/>
-                <a:cs typeface="Calibri"/>
-                <a:sym typeface="Calibri"/>
-              </a:rPr>
-              <a:t> </a:t>
-            </a:r>
-            <a:endParaRPr sz="1000">
-              <a:solidFill>
-                <a:srgbClr val="0F0F0F"/>
-              </a:solidFill>
-              <a:latin typeface="Calibri"/>
-              <a:ea typeface="Calibri"/>
-              <a:cs typeface="Calibri"/>
-              <a:sym typeface="Calibri"/>
-            </a:endParaRPr>
-          </a:p>
-          <a:p>
-            <a:pPr marL="0" lvl="0" indent="0" algn="l" rtl="0">
-              <a:spcBef>
-                <a:spcPts val="0"/>
-              </a:spcBef>
-              <a:spcAft>
-                <a:spcPts val="0"/>
-              </a:spcAft>
-              <a:buNone/>
-            </a:pPr>
-            <a:r>
-              <a:rPr lang="en" sz="1000" u="sng">
-                <a:solidFill>
-                  <a:schemeClr val="hlink"/>
-                </a:solidFill>
-                <a:latin typeface="Calibri"/>
-                <a:ea typeface="Calibri"/>
-                <a:cs typeface="Calibri"/>
-                <a:sym typeface="Calibri"/>
-                <a:hlinkClick r:id="rId8"/>
-              </a:rPr>
-              <a:t>https://arxiv.org/abs/2310.11324</a:t>
-            </a:r>
-            <a:r>
-              <a:rPr lang="en" sz="1000">
-                <a:solidFill>
-                  <a:srgbClr val="0F0F0F"/>
-                </a:solidFill>
-                <a:latin typeface="Calibri"/>
-                <a:ea typeface="Calibri"/>
-                <a:cs typeface="Calibri"/>
-                <a:sym typeface="Calibri"/>
-              </a:rPr>
-              <a:t> </a:t>
-            </a:r>
-            <a:endParaRPr sz="1000">
-              <a:solidFill>
-                <a:srgbClr val="0F0F0F"/>
-              </a:solidFill>
-              <a:latin typeface="Calibri"/>
-              <a:ea typeface="Calibri"/>
-              <a:cs typeface="Calibri"/>
-              <a:sym typeface="Calibri"/>
-            </a:endParaRPr>
-          </a:p>
-        </p:txBody>
-      </p:sp>
-      <p:sp>
-        <p:nvSpPr>
-          <p:cNvPr id="150" name="Google Shape;150;p23"/>
-          <p:cNvSpPr txBox="1"/>
-          <p:nvPr/>
-        </p:nvSpPr>
-        <p:spPr>
-          <a:xfrm>
-            <a:off x="165975" y="2666325"/>
-            <a:ext cx="4321500" cy="1293000"/>
-          </a:xfrm>
-          <a:prstGeom prst="rect">
-            <a:avLst/>
-          </a:prstGeom>
-          <a:solidFill>
-            <a:srgbClr val="FFF2CC"/>
-          </a:solidFill>
-          <a:ln w="9525" cap="flat" cmpd="sng">
-            <a:solidFill>
-              <a:srgbClr val="FF0000"/>
-            </a:solidFill>
-            <a:prstDash val="solid"/>
-            <a:round/>
-            <a:headEnd type="none" w="sm" len="sm"/>
-            <a:tailEnd type="none" w="sm" len="sm"/>
-          </a:ln>
-        </p:spPr>
-        <p:txBody>
-          <a:bodyPr spcFirstLastPara="1" wrap="square" lIns="91425" tIns="91425" rIns="91425" bIns="91425" anchor="t" anchorCtr="0">
-            <a:spAutoFit/>
-          </a:bodyPr>
-          <a:lstStyle/>
-          <a:p>
-            <a:pPr marL="0" lvl="0" indent="0" algn="l" rtl="0">
-              <a:spcBef>
-                <a:spcPts val="0"/>
-              </a:spcBef>
-              <a:spcAft>
-                <a:spcPts val="0"/>
-              </a:spcAft>
-              <a:buNone/>
-            </a:pPr>
-            <a:r>
-              <a:rPr lang="en" sz="1300">
-                <a:solidFill>
-                  <a:srgbClr val="0F0F0F"/>
-                </a:solidFill>
-                <a:latin typeface="Calibri"/>
-                <a:ea typeface="Calibri"/>
-                <a:cs typeface="Calibri"/>
-                <a:sym typeface="Calibri"/>
-              </a:rPr>
-              <a:t>Pennsylvania State started a collaboration with OpenAI. State employees will use </a:t>
-            </a:r>
-            <a:r>
-              <a:rPr lang="en" sz="1300" b="1">
-                <a:solidFill>
-                  <a:srgbClr val="FF0000"/>
-                </a:solidFill>
-                <a:latin typeface="Calibri"/>
-                <a:ea typeface="Calibri"/>
-                <a:cs typeface="Calibri"/>
-                <a:sym typeface="Calibri"/>
-              </a:rPr>
-              <a:t>ChatGPT Enterprise</a:t>
-            </a:r>
-            <a:r>
-              <a:rPr lang="en" sz="1300">
-                <a:solidFill>
-                  <a:srgbClr val="0F0F0F"/>
-                </a:solidFill>
-                <a:latin typeface="Calibri"/>
-                <a:ea typeface="Calibri"/>
-                <a:cs typeface="Calibri"/>
-                <a:sym typeface="Calibri"/>
-              </a:rPr>
-              <a:t> to assist in various tasks such as creating and editing copy, updating policy language, drafting job descriptions, and generating code. </a:t>
-            </a:r>
-            <a:endParaRPr sz="1300">
-              <a:solidFill>
-                <a:srgbClr val="0F0F0F"/>
-              </a:solidFill>
-              <a:latin typeface="Calibri"/>
-              <a:ea typeface="Calibri"/>
-              <a:cs typeface="Calibri"/>
-              <a:sym typeface="Calibri"/>
-            </a:endParaRPr>
-          </a:p>
-          <a:p>
-            <a:pPr marL="0" lvl="0" indent="0" algn="l" rtl="0">
-              <a:spcBef>
-                <a:spcPts val="0"/>
-              </a:spcBef>
-              <a:spcAft>
-                <a:spcPts val="0"/>
-              </a:spcAft>
-              <a:buNone/>
-            </a:pPr>
-            <a:r>
-              <a:rPr lang="en" sz="1000" u="sng">
-                <a:solidFill>
-                  <a:schemeClr val="hlink"/>
-                </a:solidFill>
-                <a:latin typeface="Calibri"/>
-                <a:ea typeface="Calibri"/>
-                <a:cs typeface="Calibri"/>
-                <a:sym typeface="Calibri"/>
-                <a:hlinkClick r:id="rId9"/>
-              </a:rPr>
-              <a:t>https://www.governor.pa.gov/newsroom/shapiro-administration-and-openai-launch-first-in-the-nation-generative-ai-pilot-for-commonwealth-employees/</a:t>
-            </a:r>
-            <a:r>
-              <a:rPr lang="en" sz="1000">
-                <a:solidFill>
-                  <a:srgbClr val="0F0F0F"/>
-                </a:solidFill>
-                <a:latin typeface="Calibri"/>
-                <a:ea typeface="Calibri"/>
-                <a:cs typeface="Calibri"/>
-                <a:sym typeface="Calibri"/>
-              </a:rPr>
-              <a:t> </a:t>
-            </a:r>
-            <a:endParaRPr sz="1000">
-              <a:solidFill>
-                <a:srgbClr val="0F0F0F"/>
-              </a:solidFill>
-              <a:latin typeface="Calibri"/>
-              <a:ea typeface="Calibri"/>
-              <a:cs typeface="Calibri"/>
-              <a:sym typeface="Calibri"/>
-            </a:endParaRPr>
-          </a:p>
-        </p:txBody>
-      </p:sp>
-      <p:pic>
-        <p:nvPicPr>
-          <p:cNvPr id="151" name="Google Shape;151;p23"/>
-          <p:cNvPicPr preferRelativeResize="0"/>
-          <p:nvPr/>
-        </p:nvPicPr>
-        <p:blipFill>
-          <a:blip r:embed="rId10" cstate="email">
-            <a:alphaModFix/>
-            <a:extLst>
-              <a:ext uri="{28A0092B-C50C-407E-A947-70E740481C1C}">
-                <a14:useLocalDpi xmlns:a14="http://schemas.microsoft.com/office/drawing/2010/main"/>
-              </a:ext>
-            </a:extLst>
-          </a:blip>
-          <a:stretch>
-            <a:fillRect/>
-          </a:stretch>
-        </p:blipFill>
-        <p:spPr>
-          <a:xfrm>
-            <a:off x="165976" y="1195788"/>
-            <a:ext cx="1935777" cy="1384751"/>
-          </a:xfrm>
-          <a:prstGeom prst="rect">
-            <a:avLst/>
-          </a:prstGeom>
-          <a:noFill/>
-          <a:ln w="9525" cap="flat" cmpd="sng">
-            <a:solidFill>
-              <a:srgbClr val="FF0000"/>
-            </a:solidFill>
-            <a:prstDash val="solid"/>
-            <a:round/>
-            <a:headEnd type="none" w="sm" len="sm"/>
-            <a:tailEnd type="none" w="sm" len="sm"/>
-          </a:ln>
-        </p:spPr>
-      </p:pic>
-      <p:pic>
-        <p:nvPicPr>
-          <p:cNvPr id="152" name="Google Shape;152;p23"/>
-          <p:cNvPicPr preferRelativeResize="0"/>
-          <p:nvPr/>
-        </p:nvPicPr>
-        <p:blipFill>
-          <a:blip r:embed="rId11" cstate="email">
-            <a:alphaModFix/>
-            <a:extLst>
-              <a:ext uri="{28A0092B-C50C-407E-A947-70E740481C1C}">
-                <a14:useLocalDpi xmlns:a14="http://schemas.microsoft.com/office/drawing/2010/main"/>
-              </a:ext>
-            </a:extLst>
-          </a:blip>
-          <a:stretch>
-            <a:fillRect/>
-          </a:stretch>
-        </p:blipFill>
-        <p:spPr>
-          <a:xfrm>
-            <a:off x="6826100" y="987025"/>
-            <a:ext cx="2230500" cy="596850"/>
-          </a:xfrm>
-          <a:prstGeom prst="rect">
-            <a:avLst/>
-          </a:prstGeom>
-          <a:noFill/>
-          <a:ln w="9525" cap="flat" cmpd="sng">
-            <a:solidFill>
-              <a:srgbClr val="FF0000"/>
-            </a:solidFill>
-            <a:prstDash val="solid"/>
-            <a:round/>
-            <a:headEnd type="none" w="sm" len="sm"/>
-            <a:tailEnd type="none" w="sm" len="sm"/>
-          </a:ln>
-        </p:spPr>
-      </p:pic>
-      <p:pic>
-        <p:nvPicPr>
-          <p:cNvPr id="153" name="Google Shape;153;p23"/>
-          <p:cNvPicPr preferRelativeResize="0"/>
-          <p:nvPr/>
-        </p:nvPicPr>
-        <p:blipFill>
-          <a:blip r:embed="rId12" cstate="email">
-            <a:alphaModFix/>
-            <a:extLst>
-              <a:ext uri="{28A0092B-C50C-407E-A947-70E740481C1C}">
-                <a14:useLocalDpi xmlns:a14="http://schemas.microsoft.com/office/drawing/2010/main"/>
-              </a:ext>
-            </a:extLst>
-          </a:blip>
-          <a:stretch>
-            <a:fillRect/>
-          </a:stretch>
-        </p:blipFill>
-        <p:spPr>
-          <a:xfrm>
-            <a:off x="4961262" y="59500"/>
-            <a:ext cx="1318188" cy="1293000"/>
-          </a:xfrm>
-          <a:prstGeom prst="rect">
-            <a:avLst/>
-          </a:prstGeom>
-          <a:noFill/>
-          <a:ln w="9525" cap="flat" cmpd="sng">
-            <a:solidFill>
-              <a:srgbClr val="FF0000"/>
-            </a:solidFill>
-            <a:prstDash val="solid"/>
-            <a:round/>
-            <a:headEnd type="none" w="sm" len="sm"/>
-            <a:tailEnd type="none" w="sm" len="sm"/>
-          </a:ln>
-        </p:spPr>
-      </p:pic>
-      <p:pic>
-        <p:nvPicPr>
-          <p:cNvPr id="154" name="Google Shape;154;p23"/>
-          <p:cNvPicPr preferRelativeResize="0"/>
-          <p:nvPr/>
-        </p:nvPicPr>
-        <p:blipFill>
-          <a:blip r:embed="rId13" cstate="email">
-            <a:alphaModFix/>
-            <a:extLst>
-              <a:ext uri="{28A0092B-C50C-407E-A947-70E740481C1C}">
-                <a14:useLocalDpi xmlns:a14="http://schemas.microsoft.com/office/drawing/2010/main"/>
-              </a:ext>
-            </a:extLst>
-          </a:blip>
-          <a:stretch>
-            <a:fillRect/>
-          </a:stretch>
-        </p:blipFill>
-        <p:spPr>
-          <a:xfrm>
-            <a:off x="699377" y="4045100"/>
-            <a:ext cx="1472875" cy="980125"/>
-          </a:xfrm>
-          <a:prstGeom prst="rect">
-            <a:avLst/>
-          </a:prstGeom>
-          <a:noFill/>
-          <a:ln>
-            <a:noFill/>
-          </a:ln>
-        </p:spPr>
-      </p:pic>
-      <p:pic>
-        <p:nvPicPr>
-          <p:cNvPr id="155" name="Google Shape;155;p23"/>
-          <p:cNvPicPr preferRelativeResize="0"/>
-          <p:nvPr/>
-        </p:nvPicPr>
-        <p:blipFill rotWithShape="1">
-          <a:blip r:embed="rId14" cstate="email">
-            <a:alphaModFix/>
-            <a:extLst>
-              <a:ext uri="{28A0092B-C50C-407E-A947-70E740481C1C}">
-                <a14:useLocalDpi xmlns:a14="http://schemas.microsoft.com/office/drawing/2010/main"/>
-              </a:ext>
-            </a:extLst>
-          </a:blip>
-          <a:srcRect/>
-          <a:stretch/>
-        </p:blipFill>
-        <p:spPr>
-          <a:xfrm>
-            <a:off x="2308200" y="4045100"/>
-            <a:ext cx="1505188" cy="980125"/>
-          </a:xfrm>
-          <a:prstGeom prst="rect">
-            <a:avLst/>
-          </a:prstGeom>
-          <a:noFill/>
-          <a:ln>
-            <a:noFill/>
-          </a:ln>
-        </p:spPr>
-      </p:pic>
-      <p:pic>
-        <p:nvPicPr>
-          <p:cNvPr id="156" name="Google Shape;156;p23"/>
-          <p:cNvPicPr preferRelativeResize="0"/>
-          <p:nvPr/>
-        </p:nvPicPr>
-        <p:blipFill>
-          <a:blip r:embed="rId15" cstate="email">
-            <a:alphaModFix/>
-            <a:extLst>
-              <a:ext uri="{28A0092B-C50C-407E-A947-70E740481C1C}">
-                <a14:useLocalDpi xmlns:a14="http://schemas.microsoft.com/office/drawing/2010/main"/>
-              </a:ext>
-            </a:extLst>
-          </a:blip>
-          <a:stretch>
-            <a:fillRect/>
-          </a:stretch>
-        </p:blipFill>
-        <p:spPr>
-          <a:xfrm>
-            <a:off x="6445321" y="3329882"/>
-            <a:ext cx="1638751" cy="1771626"/>
           </a:xfrm>
           <a:prstGeom prst="rect">
             <a:avLst/>

--- a/2024/2024-01-12-AI-Updates.pptx
+++ b/2024/2024-01-12-AI-Updates.pptx
@@ -5,7 +5,7 @@
     <p:sldMasterId id="2147483661" r:id="rId1"/>
   </p:sldMasterIdLst>
   <p:notesMasterIdLst>
-    <p:notesMasterId r:id="rId31"/>
+    <p:notesMasterId r:id="rId30"/>
   </p:notesMasterIdLst>
   <p:sldIdLst>
     <p:sldId id="256" r:id="rId2"/>
@@ -36,17 +36,16 @@
     <p:sldId id="281" r:id="rId27"/>
     <p:sldId id="282" r:id="rId28"/>
     <p:sldId id="283" r:id="rId29"/>
-    <p:sldId id="284" r:id="rId30"/>
   </p:sldIdLst>
   <p:sldSz cx="9144000" cy="5143500" type="screen16x9"/>
   <p:notesSz cx="6858000" cy="9144000"/>
   <p:embeddedFontLst>
     <p:embeddedFont>
       <p:font typeface="Roboto Mono" pitchFamily="49" charset="0"/>
-      <p:regular r:id="rId32"/>
-      <p:bold r:id="rId33"/>
-      <p:italic r:id="rId34"/>
-      <p:boldItalic r:id="rId35"/>
+      <p:regular r:id="rId31"/>
+      <p:bold r:id="rId32"/>
+      <p:italic r:id="rId33"/>
+      <p:boldItalic r:id="rId34"/>
     </p:embeddedFont>
   </p:embeddedFontLst>
   <p:defaultTextStyle>
@@ -855,7 +854,7 @@
         </p:nvSpPr>
         <p:spPr>
           <a:xfrm>
-            <a:off x="381300" y="685800"/>
+            <a:off x="381000" y="685800"/>
             <a:ext cx="6096000" cy="3429000"/>
           </a:xfrm>
           <a:custGeom>
@@ -2415,7 +2414,7 @@
         </p:nvSpPr>
         <p:spPr>
           <a:xfrm>
-            <a:off x="381300" y="685800"/>
+            <a:off x="381000" y="685800"/>
             <a:ext cx="6096000" cy="3429000"/>
           </a:xfrm>
           <a:custGeom>
@@ -2906,110 +2905,6 @@
 </p:notes>
 </file>
 
-<file path=ppt/notesSlides/notesSlide29.xml><?xml version="1.0" encoding="utf-8"?>
-<p:notes xmlns:a="http://schemas.openxmlformats.org/drawingml/2006/main" xmlns:r="http://schemas.openxmlformats.org/officeDocument/2006/relationships" xmlns:p="http://schemas.openxmlformats.org/presentationml/2006/main" showMasterSp="0" showMasterPhAnim="0">
-  <p:cSld>
-    <p:spTree>
-      <p:nvGrpSpPr>
-        <p:cNvPr id="1" name="Shape 366"/>
-        <p:cNvGrpSpPr/>
-        <p:nvPr/>
-      </p:nvGrpSpPr>
-      <p:grpSpPr>
-        <a:xfrm>
-          <a:off x="0" y="0"/>
-          <a:ext cx="0" cy="0"/>
-          <a:chOff x="0" y="0"/>
-          <a:chExt cx="0" cy="0"/>
-        </a:xfrm>
-      </p:grpSpPr>
-      <p:sp>
-        <p:nvSpPr>
-          <p:cNvPr id="367" name="Google Shape;367;g2aabfee0e51_0_0:notes"/>
-          <p:cNvSpPr>
-            <a:spLocks noGrp="1" noRot="1" noChangeAspect="1"/>
-          </p:cNvSpPr>
-          <p:nvPr>
-            <p:ph type="sldImg" idx="2"/>
-          </p:nvPr>
-        </p:nvSpPr>
-        <p:spPr>
-          <a:xfrm>
-            <a:off x="381300" y="685800"/>
-            <a:ext cx="6096000" cy="3429000"/>
-          </a:xfrm>
-          <a:custGeom>
-            <a:avLst/>
-            <a:gdLst/>
-            <a:ahLst/>
-            <a:cxnLst/>
-            <a:rect l="l" t="t" r="r" b="b"/>
-            <a:pathLst>
-              <a:path w="120000" h="120000" extrusionOk="0">
-                <a:moveTo>
-                  <a:pt x="0" y="0"/>
-                </a:moveTo>
-                <a:lnTo>
-                  <a:pt x="120000" y="0"/>
-                </a:lnTo>
-                <a:lnTo>
-                  <a:pt x="120000" y="120000"/>
-                </a:lnTo>
-                <a:lnTo>
-                  <a:pt x="0" y="120000"/>
-                </a:lnTo>
-                <a:close/>
-              </a:path>
-            </a:pathLst>
-          </a:custGeom>
-        </p:spPr>
-      </p:sp>
-      <p:sp>
-        <p:nvSpPr>
-          <p:cNvPr id="368" name="Google Shape;368;g2aabfee0e51_0_0:notes"/>
-          <p:cNvSpPr txBox="1">
-            <a:spLocks noGrp="1"/>
-          </p:cNvSpPr>
-          <p:nvPr>
-            <p:ph type="body" idx="1"/>
-          </p:nvPr>
-        </p:nvSpPr>
-        <p:spPr>
-          <a:xfrm>
-            <a:off x="685800" y="4343400"/>
-            <a:ext cx="5486400" cy="4114800"/>
-          </a:xfrm>
-          <a:prstGeom prst="rect">
-            <a:avLst/>
-          </a:prstGeom>
-        </p:spPr>
-        <p:txBody>
-          <a:bodyPr spcFirstLastPara="1" wrap="square" lIns="91425" tIns="91425" rIns="91425" bIns="91425" anchor="t" anchorCtr="0">
-            <a:noAutofit/>
-          </a:bodyPr>
-          <a:lstStyle/>
-          <a:p>
-            <a:pPr marL="0" lvl="0" indent="0" algn="l" rtl="0">
-              <a:spcBef>
-                <a:spcPts val="0"/>
-              </a:spcBef>
-              <a:spcAft>
-                <a:spcPts val="0"/>
-              </a:spcAft>
-              <a:buNone/>
-            </a:pPr>
-            <a:endParaRPr/>
-          </a:p>
-        </p:txBody>
-      </p:sp>
-    </p:spTree>
-  </p:cSld>
-  <p:clrMapOvr>
-    <a:masterClrMapping/>
-  </p:clrMapOvr>
-</p:notes>
-</file>
-
 <file path=ppt/notesSlides/notesSlide3.xml><?xml version="1.0" encoding="utf-8"?>
 <p:notes xmlns:a="http://schemas.openxmlformats.org/drawingml/2006/main" xmlns:r="http://schemas.openxmlformats.org/officeDocument/2006/relationships" xmlns:p="http://schemas.openxmlformats.org/presentationml/2006/main" showMasterSp="0" showMasterPhAnim="0">
   <p:cSld>
@@ -3247,7 +3142,7 @@
         </p:nvSpPr>
         <p:spPr>
           <a:xfrm>
-            <a:off x="381300" y="685800"/>
+            <a:off x="381000" y="685800"/>
             <a:ext cx="6096000" cy="3429000"/>
           </a:xfrm>
           <a:custGeom>
@@ -12119,8 +12014,8 @@
         </p:nvSpPr>
         <p:spPr>
           <a:xfrm>
-            <a:off x="6826100" y="59500"/>
-            <a:ext cx="2230500" cy="892800"/>
+            <a:off x="6599950" y="59500"/>
+            <a:ext cx="2456650" cy="892800"/>
           </a:xfrm>
           <a:prstGeom prst="rect">
             <a:avLst/>
@@ -12154,7 +12049,7 @@
               <a:buNone/>
             </a:pPr>
             <a:r>
-              <a:rPr lang="en" sz="1300">
+              <a:rPr lang="en" sz="1300" dirty="0">
                 <a:solidFill>
                   <a:srgbClr val="0F0F0F"/>
                 </a:solidFill>
@@ -12165,7 +12060,7 @@
               </a:rPr>
               <a:t>TechGPT-2.0: A LLM for knowledge graph construction</a:t>
             </a:r>
-            <a:endParaRPr sz="1300">
+            <a:endParaRPr sz="1300" dirty="0">
               <a:solidFill>
                 <a:srgbClr val="0F0F0F"/>
               </a:solidFill>
@@ -12186,7 +12081,7 @@
               <a:buNone/>
             </a:pPr>
             <a:r>
-              <a:rPr lang="en" sz="1000" u="sng">
+              <a:rPr lang="en" sz="1000" u="sng" dirty="0">
                 <a:solidFill>
                   <a:schemeClr val="hlink"/>
                 </a:solidFill>
@@ -12199,7 +12094,7 @@
               <a:t>https://arxiv.org/abs/2401.04507v1</a:t>
             </a:r>
             <a:r>
-              <a:rPr lang="en" sz="1000">
+              <a:rPr lang="en" sz="1000" dirty="0">
                 <a:solidFill>
                   <a:srgbClr val="0F0F0F"/>
                 </a:solidFill>
@@ -12210,7 +12105,7 @@
               </a:rPr>
               <a:t> </a:t>
             </a:r>
-            <a:endParaRPr sz="1000">
+            <a:endParaRPr sz="1000" dirty="0">
               <a:solidFill>
                 <a:srgbClr val="0F0F0F"/>
               </a:solidFill>
@@ -12231,7 +12126,7 @@
               <a:buNone/>
             </a:pPr>
             <a:r>
-              <a:rPr lang="en" sz="1000" u="sng">
+              <a:rPr lang="en" sz="1000" u="sng" dirty="0">
                 <a:solidFill>
                   <a:schemeClr val="hlink"/>
                 </a:solidFill>
@@ -12244,7 +12139,7 @@
               <a:t>https://github.com/neukg/TechGPT-2.0</a:t>
             </a:r>
             <a:r>
-              <a:rPr lang="en" sz="1000">
+              <a:rPr lang="en" sz="1000" dirty="0">
                 <a:solidFill>
                   <a:srgbClr val="0F0F0F"/>
                 </a:solidFill>
@@ -12255,7 +12150,7 @@
               </a:rPr>
               <a:t> </a:t>
             </a:r>
-            <a:endParaRPr sz="1000">
+            <a:endParaRPr sz="1000" dirty="0">
               <a:solidFill>
                 <a:srgbClr val="0F0F0F"/>
               </a:solidFill>
@@ -12634,8 +12529,8 @@
         </p:nvSpPr>
         <p:spPr>
           <a:xfrm>
-            <a:off x="165975" y="2666325"/>
-            <a:ext cx="4321500" cy="1293000"/>
+            <a:off x="165974" y="2666325"/>
+            <a:ext cx="4558425" cy="1293000"/>
           </a:xfrm>
           <a:prstGeom prst="rect">
             <a:avLst/>
@@ -12669,7 +12564,7 @@
               <a:buNone/>
             </a:pPr>
             <a:r>
-              <a:rPr lang="en" sz="1300">
+              <a:rPr lang="en" sz="1300" dirty="0">
                 <a:solidFill>
                   <a:srgbClr val="0F0F0F"/>
                 </a:solidFill>
@@ -12678,10 +12573,34 @@
                 <a:cs typeface="Calibri"/>
                 <a:sym typeface="Calibri"/>
               </a:rPr>
-              <a:t>Pennsylvania State started a collaboration with OpenAI. State employees will use </a:t>
-            </a:r>
-            <a:r>
-              <a:rPr lang="en" sz="1300" b="1">
+              <a:t>Pennsylvania State started a collaboration with </a:t>
+            </a:r>
+            <a:r>
+              <a:rPr lang="en" sz="1300" dirty="0" err="1">
+                <a:solidFill>
+                  <a:srgbClr val="0F0F0F"/>
+                </a:solidFill>
+                <a:latin typeface="Calibri"/>
+                <a:ea typeface="Calibri"/>
+                <a:cs typeface="Calibri"/>
+                <a:sym typeface="Calibri"/>
+              </a:rPr>
+              <a:t>OpenAI</a:t>
+            </a:r>
+            <a:r>
+              <a:rPr lang="en" sz="1300" dirty="0">
+                <a:solidFill>
+                  <a:srgbClr val="0F0F0F"/>
+                </a:solidFill>
+                <a:latin typeface="Calibri"/>
+                <a:ea typeface="Calibri"/>
+                <a:cs typeface="Calibri"/>
+                <a:sym typeface="Calibri"/>
+              </a:rPr>
+              <a:t>. State employees will use </a:t>
+            </a:r>
+            <a:r>
+              <a:rPr lang="en" sz="1300" b="1" dirty="0" err="1">
                 <a:solidFill>
                   <a:srgbClr val="FF0000"/>
                 </a:solidFill>
@@ -12690,10 +12609,22 @@
                 <a:cs typeface="Calibri"/>
                 <a:sym typeface="Calibri"/>
               </a:rPr>
-              <a:t>ChatGPT Enterprise</a:t>
-            </a:r>
-            <a:r>
-              <a:rPr lang="en" sz="1300">
+              <a:t>ChatGPT</a:t>
+            </a:r>
+            <a:r>
+              <a:rPr lang="en" sz="1300" b="1" dirty="0">
+                <a:solidFill>
+                  <a:srgbClr val="FF0000"/>
+                </a:solidFill>
+                <a:latin typeface="Calibri"/>
+                <a:ea typeface="Calibri"/>
+                <a:cs typeface="Calibri"/>
+                <a:sym typeface="Calibri"/>
+              </a:rPr>
+              <a:t> Enterprise</a:t>
+            </a:r>
+            <a:r>
+              <a:rPr lang="en" sz="1300" dirty="0">
                 <a:solidFill>
                   <a:srgbClr val="0F0F0F"/>
                 </a:solidFill>
@@ -12704,7 +12635,7 @@
               </a:rPr>
               <a:t> to assist in various tasks such as creating and editing copy, updating policy language, drafting job descriptions, and generating code. </a:t>
             </a:r>
-            <a:endParaRPr sz="1300">
+            <a:endParaRPr sz="1300" dirty="0">
               <a:solidFill>
                 <a:srgbClr val="0F0F0F"/>
               </a:solidFill>
@@ -12725,7 +12656,7 @@
               <a:buNone/>
             </a:pPr>
             <a:r>
-              <a:rPr lang="en" sz="1000" u="sng">
+              <a:rPr lang="en" sz="1000" u="sng" dirty="0">
                 <a:solidFill>
                   <a:schemeClr val="hlink"/>
                 </a:solidFill>
@@ -12738,7 +12669,7 @@
               <a:t>https://www.governor.pa.gov/newsroom/shapiro-administration-and-openai-launch-first-in-the-nation-generative-ai-pilot-for-commonwealth-employees/</a:t>
             </a:r>
             <a:r>
-              <a:rPr lang="en" sz="1000">
+              <a:rPr lang="en" sz="1000" dirty="0">
                 <a:solidFill>
                   <a:srgbClr val="0F0F0F"/>
                 </a:solidFill>
@@ -12749,7 +12680,7 @@
               </a:rPr>
               <a:t> </a:t>
             </a:r>
-            <a:endParaRPr sz="1000">
+            <a:endParaRPr sz="1000" dirty="0">
               <a:solidFill>
                 <a:srgbClr val="0F0F0F"/>
               </a:solidFill>
@@ -12821,7 +12752,7 @@
         </p:blipFill>
         <p:spPr>
           <a:xfrm>
-            <a:off x="6826100" y="987025"/>
+            <a:off x="6826100" y="1060500"/>
             <a:ext cx="2230500" cy="596850"/>
           </a:xfrm>
           <a:prstGeom prst="rect">
@@ -25928,7 +25859,7 @@
                 <a:cs typeface="Calibri"/>
                 <a:sym typeface="Calibri"/>
               </a:rPr>
-              <a:t>translation , data entry, call center representatives, bank tellers, fraud detection specialists, meteorologists, manufacturing - assembly joba, defect detection, travel agents / assistants</a:t>
+              <a:t>translation , data entry, call center representatives, bank tellers, fraud detection specialists, meteorologists, manufacturing - assembly jobs, defect detection, travel agents / assistants</a:t>
             </a:r>
             <a:endParaRPr sz="1300">
               <a:solidFill>
@@ -25980,7 +25911,31 @@
                 <a:cs typeface="Calibri"/>
                 <a:sym typeface="Calibri"/>
               </a:rPr>
-              <a:t>Amazon, Walmart - lots of human-free solutions (for example, picking, packing, shipping orders)</a:t>
+              <a:t>Amazon, Walmart - lots of </a:t>
+            </a:r>
+            <a:r>
+              <a:rPr lang="en" sz="1300">
+                <a:solidFill>
+                  <a:srgbClr val="FF0000"/>
+                </a:solidFill>
+                <a:latin typeface="Calibri"/>
+                <a:ea typeface="Calibri"/>
+                <a:cs typeface="Calibri"/>
+                <a:sym typeface="Calibri"/>
+              </a:rPr>
+              <a:t>human-free</a:t>
+            </a:r>
+            <a:r>
+              <a:rPr lang="en" sz="1300">
+                <a:solidFill>
+                  <a:srgbClr val="0F0F0F"/>
+                </a:solidFill>
+                <a:latin typeface="Calibri"/>
+                <a:ea typeface="Calibri"/>
+                <a:cs typeface="Calibri"/>
+                <a:sym typeface="Calibri"/>
+              </a:rPr>
+              <a:t> solutions (for example, picking, packing, shipping orders)</a:t>
             </a:r>
             <a:endParaRPr sz="1300">
               <a:solidFill>
@@ -29794,8 +29749,8 @@
         </p:nvSpPr>
         <p:spPr>
           <a:xfrm>
-            <a:off x="5113225" y="3139400"/>
-            <a:ext cx="3163200" cy="1493100"/>
+            <a:off x="5113224" y="3139400"/>
+            <a:ext cx="3268775" cy="1493100"/>
           </a:xfrm>
           <a:prstGeom prst="rect">
             <a:avLst/>
@@ -29829,7 +29784,7 @@
               <a:buNone/>
             </a:pPr>
             <a:r>
-              <a:rPr lang="en" sz="1300">
+              <a:rPr lang="en" sz="1300" dirty="0">
                 <a:solidFill>
                   <a:srgbClr val="0F0F0F"/>
                 </a:solidFill>
@@ -29838,9 +29793,21 @@
                 <a:cs typeface="Calibri"/>
                 <a:sym typeface="Calibri"/>
               </a:rPr>
-              <a:t>Offline AI on iOS &amp; Android (training and fine-tuning) - by Siraj Raval</a:t>
-            </a:r>
-            <a:endParaRPr sz="1300">
+              <a:t>Offline AI on iOS &amp; Android (training and fine-tuning) - by Siraj </a:t>
+            </a:r>
+            <a:r>
+              <a:rPr lang="en" sz="1300" dirty="0" err="1">
+                <a:solidFill>
+                  <a:srgbClr val="0F0F0F"/>
+                </a:solidFill>
+                <a:latin typeface="Calibri"/>
+                <a:ea typeface="Calibri"/>
+                <a:cs typeface="Calibri"/>
+                <a:sym typeface="Calibri"/>
+              </a:rPr>
+              <a:t>Raval</a:t>
+            </a:r>
+            <a:endParaRPr sz="1300" dirty="0">
               <a:solidFill>
                 <a:srgbClr val="0F0F0F"/>
               </a:solidFill>
@@ -29861,7 +29828,7 @@
               <a:buNone/>
             </a:pPr>
             <a:r>
-              <a:rPr lang="en" sz="1000" u="sng">
+              <a:rPr lang="en" sz="1000" u="sng" dirty="0">
                 <a:solidFill>
                   <a:schemeClr val="hlink"/>
                 </a:solidFill>
@@ -29873,7 +29840,7 @@
               </a:rPr>
               <a:t>https://www.youtube.com/watch?v=c8YM15v9w8M</a:t>
             </a:r>
-            <a:endParaRPr sz="1000">
+            <a:endParaRPr sz="1000" dirty="0">
               <a:solidFill>
                 <a:srgbClr val="0F0F0F"/>
               </a:solidFill>
@@ -29893,7 +29860,7 @@
               </a:spcAft>
               <a:buNone/>
             </a:pPr>
-            <a:endParaRPr sz="1300">
+            <a:endParaRPr sz="1300" dirty="0">
               <a:solidFill>
                 <a:srgbClr val="0F0F0F"/>
               </a:solidFill>
@@ -29914,7 +29881,7 @@
               <a:buNone/>
             </a:pPr>
             <a:r>
-              <a:rPr lang="en" sz="1300">
+              <a:rPr lang="en" sz="1300" dirty="0">
                 <a:solidFill>
                   <a:srgbClr val="0F0F0F"/>
                 </a:solidFill>
@@ -29925,7 +29892,7 @@
               </a:rPr>
               <a:t>Doctor Dignity - a LLM that can pass the US Medical Licensing Exam, based on LLaMa-7B</a:t>
             </a:r>
-            <a:endParaRPr sz="1300">
+            <a:endParaRPr sz="1300" dirty="0">
               <a:solidFill>
                 <a:srgbClr val="0F0F0F"/>
               </a:solidFill>
@@ -29946,7 +29913,7 @@
               <a:buNone/>
             </a:pPr>
             <a:r>
-              <a:rPr lang="en" sz="1000" u="sng">
+              <a:rPr lang="en" sz="1000" u="sng" dirty="0">
                 <a:solidFill>
                   <a:schemeClr val="hlink"/>
                 </a:solidFill>
@@ -29958,7 +29925,7 @@
               </a:rPr>
               <a:t>https://github.com/llSourcell/Doctor-Dignity</a:t>
             </a:r>
-            <a:endParaRPr sz="1000">
+            <a:endParaRPr sz="1000" dirty="0">
               <a:solidFill>
                 <a:srgbClr val="0F0F0F"/>
               </a:solidFill>
@@ -29978,8 +29945,8 @@
         </p:nvSpPr>
         <p:spPr>
           <a:xfrm>
-            <a:off x="5113225" y="1857212"/>
-            <a:ext cx="3163200" cy="1215900"/>
+            <a:off x="5113224" y="1857212"/>
+            <a:ext cx="3268775" cy="1215900"/>
           </a:xfrm>
           <a:prstGeom prst="rect">
             <a:avLst/>
@@ -30293,8 +30260,8 @@
         </p:nvSpPr>
         <p:spPr>
           <a:xfrm>
-            <a:off x="5113225" y="540409"/>
-            <a:ext cx="3163200" cy="1246800"/>
+            <a:off x="5113224" y="540409"/>
+            <a:ext cx="3268775" cy="1246800"/>
           </a:xfrm>
           <a:prstGeom prst="rect">
             <a:avLst/>
@@ -30642,9 +30609,12 @@
                 <a:cs typeface="Calibri"/>
                 <a:sym typeface="Calibri"/>
               </a:rPr>
-              <a:t>xxxx</a:t>
+              <a:t>Monarch Mixer (M2)</a:t>
             </a:r>
             <a:endParaRPr sz="2000" b="1">
+              <a:solidFill>
+                <a:schemeClr val="dk1"/>
+              </a:solidFill>
               <a:latin typeface="Calibri"/>
               <a:ea typeface="Calibri"/>
               <a:cs typeface="Calibri"/>
@@ -32337,152 +32307,6 @@
             <a:endParaRPr sz="7000" b="1">
               <a:solidFill>
                 <a:srgbClr val="3C78D8"/>
-              </a:solidFill>
-              <a:latin typeface="Calibri"/>
-              <a:ea typeface="Calibri"/>
-              <a:cs typeface="Calibri"/>
-              <a:sym typeface="Calibri"/>
-            </a:endParaRPr>
-          </a:p>
-        </p:txBody>
-      </p:sp>
-    </p:spTree>
-  </p:cSld>
-  <p:clrMapOvr>
-    <a:masterClrMapping/>
-  </p:clrMapOvr>
-</p:sld>
-</file>
-
-<file path=ppt/slides/slide29.xml><?xml version="1.0" encoding="utf-8"?>
-<p:sld xmlns:a="http://schemas.openxmlformats.org/drawingml/2006/main" xmlns:r="http://schemas.openxmlformats.org/officeDocument/2006/relationships" xmlns:p="http://schemas.openxmlformats.org/presentationml/2006/main">
-  <p:cSld>
-    <p:spTree>
-      <p:nvGrpSpPr>
-        <p:cNvPr id="1" name="Shape 369"/>
-        <p:cNvGrpSpPr/>
-        <p:nvPr/>
-      </p:nvGrpSpPr>
-      <p:grpSpPr>
-        <a:xfrm>
-          <a:off x="0" y="0"/>
-          <a:ext cx="0" cy="0"/>
-          <a:chOff x="0" y="0"/>
-          <a:chExt cx="0" cy="0"/>
-        </a:xfrm>
-      </p:grpSpPr>
-      <p:sp>
-        <p:nvSpPr>
-          <p:cNvPr id="370" name="Google Shape;370;p43"/>
-          <p:cNvSpPr txBox="1"/>
-          <p:nvPr/>
-        </p:nvSpPr>
-        <p:spPr>
-          <a:xfrm>
-            <a:off x="72300" y="0"/>
-            <a:ext cx="4131300" cy="326400"/>
-          </a:xfrm>
-          <a:prstGeom prst="rect">
-            <a:avLst/>
-          </a:prstGeom>
-          <a:noFill/>
-          <a:ln>
-            <a:noFill/>
-          </a:ln>
-        </p:spPr>
-        <p:txBody>
-          <a:bodyPr spcFirstLastPara="1" wrap="square" lIns="9125" tIns="9125" rIns="9125" bIns="9125" anchor="t" anchorCtr="0">
-            <a:spAutoFit/>
-          </a:bodyPr>
-          <a:lstStyle/>
-          <a:p>
-            <a:pPr marL="0" lvl="0" indent="0" algn="l" rtl="0">
-              <a:spcBef>
-                <a:spcPts val="0"/>
-              </a:spcBef>
-              <a:spcAft>
-                <a:spcPts val="0"/>
-              </a:spcAft>
-              <a:buNone/>
-            </a:pPr>
-            <a:r>
-              <a:rPr lang="en" sz="2000" b="1">
-                <a:solidFill>
-                  <a:schemeClr val="dk1"/>
-                </a:solidFill>
-                <a:latin typeface="Calibri"/>
-                <a:ea typeface="Calibri"/>
-                <a:cs typeface="Calibri"/>
-                <a:sym typeface="Calibri"/>
-              </a:rPr>
-              <a:t>xxxx</a:t>
-            </a:r>
-            <a:endParaRPr sz="2000" b="1">
-              <a:latin typeface="Calibri"/>
-              <a:ea typeface="Calibri"/>
-              <a:cs typeface="Calibri"/>
-              <a:sym typeface="Calibri"/>
-            </a:endParaRPr>
-          </a:p>
-        </p:txBody>
-      </p:sp>
-      <p:sp>
-        <p:nvSpPr>
-          <p:cNvPr id="371" name="Google Shape;371;p43"/>
-          <p:cNvSpPr txBox="1"/>
-          <p:nvPr/>
-        </p:nvSpPr>
-        <p:spPr>
-          <a:xfrm>
-            <a:off x="147175" y="607825"/>
-            <a:ext cx="4321500" cy="384900"/>
-          </a:xfrm>
-          <a:prstGeom prst="rect">
-            <a:avLst/>
-          </a:prstGeom>
-          <a:solidFill>
-            <a:srgbClr val="FFF2CC"/>
-          </a:solidFill>
-          <a:ln w="9525" cap="flat" cmpd="sng">
-            <a:solidFill>
-              <a:srgbClr val="FF0000"/>
-            </a:solidFill>
-            <a:prstDash val="solid"/>
-            <a:round/>
-            <a:headEnd type="none" w="sm" len="sm"/>
-            <a:tailEnd type="none" w="sm" len="sm"/>
-          </a:ln>
-        </p:spPr>
-        <p:txBody>
-          <a:bodyPr spcFirstLastPara="1" wrap="square" lIns="91425" tIns="91425" rIns="91425" bIns="91425" anchor="t" anchorCtr="0">
-            <a:spAutoFit/>
-          </a:bodyPr>
-          <a:lstStyle/>
-          <a:p>
-            <a:pPr marL="0" lvl="0" indent="0" algn="l" rtl="0">
-              <a:spcBef>
-                <a:spcPts val="0"/>
-              </a:spcBef>
-              <a:spcAft>
-                <a:spcPts val="0"/>
-              </a:spcAft>
-              <a:buNone/>
-            </a:pPr>
-            <a:r>
-              <a:rPr lang="en" sz="1300">
-                <a:solidFill>
-                  <a:srgbClr val="0F0F0F"/>
-                </a:solidFill>
-                <a:latin typeface="Calibri"/>
-                <a:ea typeface="Calibri"/>
-                <a:cs typeface="Calibri"/>
-                <a:sym typeface="Calibri"/>
-              </a:rPr>
-              <a:t>xxxx</a:t>
-            </a:r>
-            <a:endParaRPr sz="1300">
-              <a:solidFill>
-                <a:srgbClr val="0F0F0F"/>
               </a:solidFill>
               <a:latin typeface="Calibri"/>
               <a:ea typeface="Calibri"/>
@@ -35652,14 +35476,14 @@
         </p:nvGraphicFramePr>
         <p:xfrm>
           <a:off x="4966463" y="2553800"/>
-          <a:ext cx="3000000" cy="3000000"/>
+          <a:ext cx="3909125" cy="2500750"/>
         </p:xfrm>
         <a:graphic>
           <a:graphicData uri="http://schemas.openxmlformats.org/drawingml/2006/table">
             <a:tbl>
               <a:tblPr>
                 <a:noFill/>
-                <a:tableStyleId>{7EF94F85-B0A4-4D23-AFEC-976B4D1077D6}</a:tableStyleId>
+                <a:tableStyleId>{A9B523D1-4CE6-4E4E-86FE-5DEB4B61E2DE}</a:tableStyleId>
               </a:tblPr>
               <a:tblGrid>
                 <a:gridCol w="912575">
@@ -41667,7 +41491,7 @@
         </p:nvSpPr>
         <p:spPr>
           <a:xfrm>
-            <a:off x="154450" y="644300"/>
+            <a:off x="134525" y="664225"/>
             <a:ext cx="3807300" cy="3247800"/>
           </a:xfrm>
           <a:prstGeom prst="rect">
@@ -42468,7 +42292,7 @@
         <p:spPr>
           <a:xfrm>
             <a:off x="147175" y="607825"/>
-            <a:ext cx="4321500" cy="2385900"/>
+            <a:ext cx="4321500" cy="2401200"/>
           </a:xfrm>
           <a:prstGeom prst="rect">
             <a:avLst/>
@@ -42502,6 +42326,390 @@
               <a:buNone/>
             </a:pPr>
             <a:r>
+              <a:rPr lang="en" sz="1000" u="sng">
+                <a:solidFill>
+                  <a:schemeClr val="hlink"/>
+                </a:solidFill>
+                <a:latin typeface="Calibri"/>
+                <a:ea typeface="Calibri"/>
+                <a:cs typeface="Calibri"/>
+                <a:sym typeface="Calibri"/>
+                <a:hlinkClick r:id="rId3"/>
+              </a:rPr>
+              <a:t>https://gptstore.ai</a:t>
+            </a:r>
+            <a:r>
+              <a:rPr lang="en" sz="1000">
+                <a:solidFill>
+                  <a:srgbClr val="0F0F0F"/>
+                </a:solidFill>
+                <a:latin typeface="Calibri"/>
+                <a:ea typeface="Calibri"/>
+                <a:cs typeface="Calibri"/>
+                <a:sym typeface="Calibri"/>
+              </a:rPr>
+              <a:t> </a:t>
+            </a:r>
+            <a:endParaRPr sz="1000">
+              <a:solidFill>
+                <a:srgbClr val="0F0F0F"/>
+              </a:solidFill>
+              <a:latin typeface="Calibri"/>
+              <a:ea typeface="Calibri"/>
+              <a:cs typeface="Calibri"/>
+              <a:sym typeface="Calibri"/>
+            </a:endParaRPr>
+          </a:p>
+          <a:p>
+            <a:pPr marL="0" lvl="0" indent="0" algn="l" rtl="0">
+              <a:spcBef>
+                <a:spcPts val="0"/>
+              </a:spcBef>
+              <a:spcAft>
+                <a:spcPts val="0"/>
+              </a:spcAft>
+              <a:buNone/>
+            </a:pPr>
+            <a:r>
+              <a:rPr lang="en" sz="1000" u="sng">
+                <a:solidFill>
+                  <a:schemeClr val="hlink"/>
+                </a:solidFill>
+                <a:latin typeface="Calibri"/>
+                <a:ea typeface="Calibri"/>
+                <a:cs typeface="Calibri"/>
+                <a:sym typeface="Calibri"/>
+                <a:hlinkClick r:id="rId4"/>
+              </a:rPr>
+              <a:t>https://chat.openai.com/gpts</a:t>
+            </a:r>
+            <a:r>
+              <a:rPr lang="en" sz="1000">
+                <a:solidFill>
+                  <a:srgbClr val="0F0F0F"/>
+                </a:solidFill>
+                <a:latin typeface="Calibri"/>
+                <a:ea typeface="Calibri"/>
+                <a:cs typeface="Calibri"/>
+                <a:sym typeface="Calibri"/>
+              </a:rPr>
+              <a:t> </a:t>
+            </a:r>
+            <a:endParaRPr sz="1000">
+              <a:solidFill>
+                <a:srgbClr val="0F0F0F"/>
+              </a:solidFill>
+              <a:latin typeface="Calibri"/>
+              <a:ea typeface="Calibri"/>
+              <a:cs typeface="Calibri"/>
+              <a:sym typeface="Calibri"/>
+            </a:endParaRPr>
+          </a:p>
+          <a:p>
+            <a:pPr marL="0" lvl="0" indent="0" algn="l" rtl="0">
+              <a:spcBef>
+                <a:spcPts val="0"/>
+              </a:spcBef>
+              <a:spcAft>
+                <a:spcPts val="0"/>
+              </a:spcAft>
+              <a:buNone/>
+            </a:pPr>
+            <a:r>
+              <a:rPr lang="en" sz="1000" u="sng">
+                <a:solidFill>
+                  <a:schemeClr val="hlink"/>
+                </a:solidFill>
+                <a:latin typeface="Calibri"/>
+                <a:ea typeface="Calibri"/>
+                <a:cs typeface="Calibri"/>
+                <a:sym typeface="Calibri"/>
+                <a:hlinkClick r:id="rId5"/>
+              </a:rPr>
+              <a:t>https://www.youtube.com/watch?v=ZbVjyQyVaWw</a:t>
+            </a:r>
+            <a:r>
+              <a:rPr lang="en" sz="1000">
+                <a:solidFill>
+                  <a:srgbClr val="0F0F0F"/>
+                </a:solidFill>
+                <a:latin typeface="Calibri"/>
+                <a:ea typeface="Calibri"/>
+                <a:cs typeface="Calibri"/>
+                <a:sym typeface="Calibri"/>
+              </a:rPr>
+              <a:t> </a:t>
+            </a:r>
+            <a:br>
+              <a:rPr lang="en" sz="1000">
+                <a:solidFill>
+                  <a:srgbClr val="0F0F0F"/>
+                </a:solidFill>
+                <a:latin typeface="Calibri"/>
+                <a:ea typeface="Calibri"/>
+                <a:cs typeface="Calibri"/>
+                <a:sym typeface="Calibri"/>
+              </a:rPr>
+            </a:br>
+            <a:r>
+              <a:rPr lang="en" sz="1000" u="sng">
+                <a:solidFill>
+                  <a:schemeClr val="hlink"/>
+                </a:solidFill>
+                <a:latin typeface="Calibri"/>
+                <a:ea typeface="Calibri"/>
+                <a:cs typeface="Calibri"/>
+                <a:sym typeface="Calibri"/>
+                <a:hlinkClick r:id="rId6"/>
+              </a:rPr>
+              <a:t>https://www.youtube.com/watch?v=NOpmy7Kqgok</a:t>
+            </a:r>
+            <a:r>
+              <a:rPr lang="en" sz="1000">
+                <a:solidFill>
+                  <a:srgbClr val="0F0F0F"/>
+                </a:solidFill>
+                <a:latin typeface="Calibri"/>
+                <a:ea typeface="Calibri"/>
+                <a:cs typeface="Calibri"/>
+                <a:sym typeface="Calibri"/>
+              </a:rPr>
+              <a:t> </a:t>
+            </a:r>
+            <a:endParaRPr sz="1000">
+              <a:solidFill>
+                <a:srgbClr val="0F0F0F"/>
+              </a:solidFill>
+              <a:latin typeface="Calibri"/>
+              <a:ea typeface="Calibri"/>
+              <a:cs typeface="Calibri"/>
+              <a:sym typeface="Calibri"/>
+            </a:endParaRPr>
+          </a:p>
+          <a:p>
+            <a:pPr marL="0" lvl="0" indent="0" algn="l" rtl="0">
+              <a:spcBef>
+                <a:spcPts val="0"/>
+              </a:spcBef>
+              <a:spcAft>
+                <a:spcPts val="0"/>
+              </a:spcAft>
+              <a:buNone/>
+            </a:pPr>
+            <a:r>
+              <a:rPr lang="en" sz="1300">
+                <a:solidFill>
+                  <a:srgbClr val="0F0F0F"/>
+                </a:solidFill>
+                <a:latin typeface="Calibri"/>
+                <a:ea typeface="Calibri"/>
+                <a:cs typeface="Calibri"/>
+                <a:sym typeface="Calibri"/>
+              </a:rPr>
+              <a:t>Protect your prompt and data:</a:t>
+            </a:r>
+            <a:endParaRPr sz="1300">
+              <a:solidFill>
+                <a:srgbClr val="0F0F0F"/>
+              </a:solidFill>
+              <a:latin typeface="Calibri"/>
+              <a:ea typeface="Calibri"/>
+              <a:cs typeface="Calibri"/>
+              <a:sym typeface="Calibri"/>
+            </a:endParaRPr>
+          </a:p>
+          <a:p>
+            <a:pPr marL="0" lvl="0" indent="0" algn="l" rtl="0">
+              <a:spcBef>
+                <a:spcPts val="0"/>
+              </a:spcBef>
+              <a:spcAft>
+                <a:spcPts val="0"/>
+              </a:spcAft>
+              <a:buNone/>
+            </a:pPr>
+            <a:r>
+              <a:rPr lang="en" sz="1000" u="sng">
+                <a:solidFill>
+                  <a:schemeClr val="hlink"/>
+                </a:solidFill>
+                <a:latin typeface="Calibri"/>
+                <a:ea typeface="Calibri"/>
+                <a:cs typeface="Calibri"/>
+                <a:sym typeface="Calibri"/>
+                <a:hlinkClick r:id="rId7"/>
+              </a:rPr>
+              <a:t>https://www.youtube.com/watch?v=Ey2Wt1heba4</a:t>
+            </a:r>
+            <a:r>
+              <a:rPr lang="en" sz="1000">
+                <a:solidFill>
+                  <a:srgbClr val="0F0F0F"/>
+                </a:solidFill>
+                <a:latin typeface="Calibri"/>
+                <a:ea typeface="Calibri"/>
+                <a:cs typeface="Calibri"/>
+                <a:sym typeface="Calibri"/>
+              </a:rPr>
+              <a:t> </a:t>
+            </a:r>
+            <a:endParaRPr sz="1000">
+              <a:solidFill>
+                <a:srgbClr val="0F0F0F"/>
+              </a:solidFill>
+              <a:latin typeface="Calibri"/>
+              <a:ea typeface="Calibri"/>
+              <a:cs typeface="Calibri"/>
+              <a:sym typeface="Calibri"/>
+            </a:endParaRPr>
+          </a:p>
+          <a:p>
+            <a:pPr marL="0" lvl="0" indent="0" algn="l" rtl="0">
+              <a:spcBef>
+                <a:spcPts val="0"/>
+              </a:spcBef>
+              <a:spcAft>
+                <a:spcPts val="0"/>
+              </a:spcAft>
+              <a:buNone/>
+            </a:pPr>
+            <a:endParaRPr sz="800">
+              <a:solidFill>
+                <a:srgbClr val="0F0F0F"/>
+              </a:solidFill>
+              <a:latin typeface="Calibri"/>
+              <a:ea typeface="Calibri"/>
+              <a:cs typeface="Calibri"/>
+              <a:sym typeface="Calibri"/>
+            </a:endParaRPr>
+          </a:p>
+          <a:p>
+            <a:pPr marL="0" lvl="0" indent="0" algn="l" rtl="0">
+              <a:spcBef>
+                <a:spcPts val="0"/>
+              </a:spcBef>
+              <a:spcAft>
+                <a:spcPts val="0"/>
+              </a:spcAft>
+              <a:buNone/>
+            </a:pPr>
+            <a:r>
+              <a:rPr lang="en" sz="1300">
+                <a:solidFill>
+                  <a:srgbClr val="0F0F0F"/>
+                </a:solidFill>
+                <a:latin typeface="Calibri"/>
+                <a:ea typeface="Calibri"/>
+                <a:cs typeface="Calibri"/>
+                <a:sym typeface="Calibri"/>
+              </a:rPr>
+              <a:t>"Save for All", create builder profile,</a:t>
+            </a:r>
+            <a:endParaRPr sz="1300">
+              <a:solidFill>
+                <a:srgbClr val="0F0F0F"/>
+              </a:solidFill>
+              <a:latin typeface="Calibri"/>
+              <a:ea typeface="Calibri"/>
+              <a:cs typeface="Calibri"/>
+              <a:sym typeface="Calibri"/>
+            </a:endParaRPr>
+          </a:p>
+          <a:p>
+            <a:pPr marL="0" lvl="0" indent="0" algn="l" rtl="0">
+              <a:spcBef>
+                <a:spcPts val="0"/>
+              </a:spcBef>
+              <a:spcAft>
+                <a:spcPts val="0"/>
+              </a:spcAft>
+              <a:buNone/>
+            </a:pPr>
+            <a:r>
+              <a:rPr lang="en" sz="1300">
+                <a:solidFill>
+                  <a:srgbClr val="0F0F0F"/>
+                </a:solidFill>
+                <a:latin typeface="Calibri"/>
+                <a:ea typeface="Calibri"/>
+                <a:cs typeface="Calibri"/>
+                <a:sym typeface="Calibri"/>
+              </a:rPr>
+              <a:t> start earning (in Q1, based on user engagement)</a:t>
+            </a:r>
+            <a:endParaRPr sz="1300">
+              <a:solidFill>
+                <a:srgbClr val="0F0F0F"/>
+              </a:solidFill>
+              <a:latin typeface="Calibri"/>
+              <a:ea typeface="Calibri"/>
+              <a:cs typeface="Calibri"/>
+              <a:sym typeface="Calibri"/>
+            </a:endParaRPr>
+          </a:p>
+          <a:p>
+            <a:pPr marL="0" lvl="0" indent="0" algn="l" rtl="0">
+              <a:spcBef>
+                <a:spcPts val="0"/>
+              </a:spcBef>
+              <a:spcAft>
+                <a:spcPts val="0"/>
+              </a:spcAft>
+              <a:buNone/>
+            </a:pPr>
+            <a:endParaRPr sz="800">
+              <a:solidFill>
+                <a:srgbClr val="0F0F0F"/>
+              </a:solidFill>
+              <a:latin typeface="Calibri"/>
+              <a:ea typeface="Calibri"/>
+              <a:cs typeface="Calibri"/>
+              <a:sym typeface="Calibri"/>
+            </a:endParaRPr>
+          </a:p>
+          <a:p>
+            <a:pPr marL="0" lvl="0" indent="0" algn="l" rtl="0">
+              <a:spcBef>
+                <a:spcPts val="0"/>
+              </a:spcBef>
+              <a:spcAft>
+                <a:spcPts val="0"/>
+              </a:spcAft>
+              <a:buNone/>
+            </a:pPr>
+            <a:r>
+              <a:rPr lang="en" sz="1300">
+                <a:solidFill>
+                  <a:srgbClr val="0F0F0F"/>
+                </a:solidFill>
+                <a:latin typeface="Calibri"/>
+                <a:ea typeface="Calibri"/>
+                <a:cs typeface="Calibri"/>
+                <a:sym typeface="Calibri"/>
+              </a:rPr>
+              <a:t>AI Tool Explorer</a:t>
+            </a:r>
+            <a:endParaRPr sz="1300">
+              <a:solidFill>
+                <a:srgbClr val="0F0F0F"/>
+              </a:solidFill>
+              <a:latin typeface="Calibri"/>
+              <a:ea typeface="Calibri"/>
+              <a:cs typeface="Calibri"/>
+              <a:sym typeface="Calibri"/>
+            </a:endParaRPr>
+          </a:p>
+          <a:p>
+            <a:pPr marL="0" lvl="0" indent="0" algn="l" rtl="0">
+              <a:spcBef>
+                <a:spcPts val="0"/>
+              </a:spcBef>
+              <a:spcAft>
+                <a:spcPts val="0"/>
+              </a:spcAft>
+              <a:buNone/>
+            </a:pPr>
+            <a:r>
               <a:rPr lang="en" sz="1300" u="sng">
                 <a:solidFill>
                   <a:schemeClr val="hlink"/>
@@ -42510,9 +42718,9 @@
                 <a:ea typeface="Calibri"/>
                 <a:cs typeface="Calibri"/>
                 <a:sym typeface="Calibri"/>
-                <a:hlinkClick r:id="rId3"/>
-              </a:rPr>
-              <a:t>https://gptstore.ai</a:t>
+                <a:hlinkClick r:id="rId8"/>
+              </a:rPr>
+              <a:t>https://chat.openai.com/g/g-YFQNFNgSM-ai-tool-explorer</a:t>
             </a:r>
             <a:r>
               <a:rPr lang="en" sz="1300">
@@ -42555,314 +42763,7 @@
                 <a:ea typeface="Calibri"/>
                 <a:cs typeface="Calibri"/>
                 <a:sym typeface="Calibri"/>
-                <a:hlinkClick r:id="rId4"/>
-              </a:rPr>
-              <a:t>https://chat.openai.com/gpts</a:t>
-            </a:r>
-            <a:r>
-              <a:rPr lang="en" sz="1300">
-                <a:solidFill>
-                  <a:srgbClr val="0F0F0F"/>
-                </a:solidFill>
-                <a:latin typeface="Calibri"/>
-                <a:ea typeface="Calibri"/>
-                <a:cs typeface="Calibri"/>
-                <a:sym typeface="Calibri"/>
-              </a:rPr>
-              <a:t> </a:t>
-            </a:r>
-            <a:endParaRPr sz="1300">
-              <a:solidFill>
-                <a:srgbClr val="0F0F0F"/>
-              </a:solidFill>
-              <a:latin typeface="Calibri"/>
-              <a:ea typeface="Calibri"/>
-              <a:cs typeface="Calibri"/>
-              <a:sym typeface="Calibri"/>
-            </a:endParaRPr>
-          </a:p>
-          <a:p>
-            <a:pPr marL="0" lvl="0" indent="0" algn="l" rtl="0">
-              <a:spcBef>
-                <a:spcPts val="0"/>
-              </a:spcBef>
-              <a:spcAft>
-                <a:spcPts val="0"/>
-              </a:spcAft>
-              <a:buNone/>
-            </a:pPr>
-            <a:r>
-              <a:rPr lang="en" sz="1300" u="sng">
-                <a:solidFill>
-                  <a:schemeClr val="hlink"/>
-                </a:solidFill>
-                <a:latin typeface="Calibri"/>
-                <a:ea typeface="Calibri"/>
-                <a:cs typeface="Calibri"/>
-                <a:sym typeface="Calibri"/>
-                <a:hlinkClick r:id="rId5"/>
-              </a:rPr>
-              <a:t>https://www.youtube.com/watch?v=ZbVjyQyVaWw</a:t>
-            </a:r>
-            <a:r>
-              <a:rPr lang="en" sz="1300">
-                <a:solidFill>
-                  <a:srgbClr val="0F0F0F"/>
-                </a:solidFill>
-                <a:latin typeface="Calibri"/>
-                <a:ea typeface="Calibri"/>
-                <a:cs typeface="Calibri"/>
-                <a:sym typeface="Calibri"/>
-              </a:rPr>
-              <a:t> </a:t>
-            </a:r>
-            <a:br>
-              <a:rPr lang="en" sz="1300">
-                <a:solidFill>
-                  <a:srgbClr val="0F0F0F"/>
-                </a:solidFill>
-                <a:latin typeface="Calibri"/>
-                <a:ea typeface="Calibri"/>
-                <a:cs typeface="Calibri"/>
-                <a:sym typeface="Calibri"/>
-              </a:rPr>
-            </a:br>
-            <a:r>
-              <a:rPr lang="en" sz="1300" u="sng">
-                <a:solidFill>
-                  <a:schemeClr val="hlink"/>
-                </a:solidFill>
-                <a:latin typeface="Calibri"/>
-                <a:ea typeface="Calibri"/>
-                <a:cs typeface="Calibri"/>
-                <a:sym typeface="Calibri"/>
-                <a:hlinkClick r:id="rId6"/>
-              </a:rPr>
-              <a:t>https://www.youtube.com/watch?v=NOpmy7Kqgok</a:t>
-            </a:r>
-            <a:r>
-              <a:rPr lang="en" sz="1300">
-                <a:solidFill>
-                  <a:srgbClr val="0F0F0F"/>
-                </a:solidFill>
-                <a:latin typeface="Calibri"/>
-                <a:ea typeface="Calibri"/>
-                <a:cs typeface="Calibri"/>
-                <a:sym typeface="Calibri"/>
-              </a:rPr>
-              <a:t> </a:t>
-            </a:r>
-            <a:endParaRPr sz="1300">
-              <a:solidFill>
-                <a:srgbClr val="0F0F0F"/>
-              </a:solidFill>
-              <a:latin typeface="Calibri"/>
-              <a:ea typeface="Calibri"/>
-              <a:cs typeface="Calibri"/>
-              <a:sym typeface="Calibri"/>
-            </a:endParaRPr>
-          </a:p>
-          <a:p>
-            <a:pPr marL="0" lvl="0" indent="0" algn="l" rtl="0">
-              <a:spcBef>
-                <a:spcPts val="0"/>
-              </a:spcBef>
-              <a:spcAft>
-                <a:spcPts val="0"/>
-              </a:spcAft>
-              <a:buNone/>
-            </a:pPr>
-            <a:endParaRPr sz="1300">
-              <a:solidFill>
-                <a:srgbClr val="0F0F0F"/>
-              </a:solidFill>
-              <a:latin typeface="Calibri"/>
-              <a:ea typeface="Calibri"/>
-              <a:cs typeface="Calibri"/>
-              <a:sym typeface="Calibri"/>
-            </a:endParaRPr>
-          </a:p>
-          <a:p>
-            <a:pPr marL="0" lvl="0" indent="0" algn="l" rtl="0">
-              <a:spcBef>
-                <a:spcPts val="0"/>
-              </a:spcBef>
-              <a:spcAft>
-                <a:spcPts val="0"/>
-              </a:spcAft>
-              <a:buNone/>
-            </a:pPr>
-            <a:r>
-              <a:rPr lang="en" sz="1300">
-                <a:solidFill>
-                  <a:srgbClr val="0F0F0F"/>
-                </a:solidFill>
-                <a:latin typeface="Calibri"/>
-                <a:ea typeface="Calibri"/>
-                <a:cs typeface="Calibri"/>
-                <a:sym typeface="Calibri"/>
-              </a:rPr>
-              <a:t>"Save for All", create builder profile,</a:t>
-            </a:r>
-            <a:endParaRPr sz="1300">
-              <a:solidFill>
-                <a:srgbClr val="0F0F0F"/>
-              </a:solidFill>
-              <a:latin typeface="Calibri"/>
-              <a:ea typeface="Calibri"/>
-              <a:cs typeface="Calibri"/>
-              <a:sym typeface="Calibri"/>
-            </a:endParaRPr>
-          </a:p>
-          <a:p>
-            <a:pPr marL="0" lvl="0" indent="0" algn="l" rtl="0">
-              <a:spcBef>
-                <a:spcPts val="0"/>
-              </a:spcBef>
-              <a:spcAft>
-                <a:spcPts val="0"/>
-              </a:spcAft>
-              <a:buNone/>
-            </a:pPr>
-            <a:r>
-              <a:rPr lang="en" sz="1300">
-                <a:solidFill>
-                  <a:srgbClr val="0F0F0F"/>
-                </a:solidFill>
-                <a:latin typeface="Calibri"/>
-                <a:ea typeface="Calibri"/>
-                <a:cs typeface="Calibri"/>
-                <a:sym typeface="Calibri"/>
-              </a:rPr>
-              <a:t> start earning (in Q1, based on user engagement)</a:t>
-            </a:r>
-            <a:endParaRPr sz="1300">
-              <a:solidFill>
-                <a:srgbClr val="0F0F0F"/>
-              </a:solidFill>
-              <a:latin typeface="Calibri"/>
-              <a:ea typeface="Calibri"/>
-              <a:cs typeface="Calibri"/>
-              <a:sym typeface="Calibri"/>
-            </a:endParaRPr>
-          </a:p>
-          <a:p>
-            <a:pPr marL="0" lvl="0" indent="0" algn="l" rtl="0">
-              <a:spcBef>
-                <a:spcPts val="0"/>
-              </a:spcBef>
-              <a:spcAft>
-                <a:spcPts val="0"/>
-              </a:spcAft>
-              <a:buNone/>
-            </a:pPr>
-            <a:endParaRPr sz="1300">
-              <a:solidFill>
-                <a:srgbClr val="0F0F0F"/>
-              </a:solidFill>
-              <a:latin typeface="Calibri"/>
-              <a:ea typeface="Calibri"/>
-              <a:cs typeface="Calibri"/>
-              <a:sym typeface="Calibri"/>
-            </a:endParaRPr>
-          </a:p>
-          <a:p>
-            <a:pPr marL="0" lvl="0" indent="0" algn="l" rtl="0">
-              <a:spcBef>
-                <a:spcPts val="0"/>
-              </a:spcBef>
-              <a:spcAft>
-                <a:spcPts val="0"/>
-              </a:spcAft>
-              <a:buNone/>
-            </a:pPr>
-            <a:r>
-              <a:rPr lang="en" sz="1300">
-                <a:solidFill>
-                  <a:srgbClr val="0F0F0F"/>
-                </a:solidFill>
-                <a:latin typeface="Calibri"/>
-                <a:ea typeface="Calibri"/>
-                <a:cs typeface="Calibri"/>
-                <a:sym typeface="Calibri"/>
-              </a:rPr>
-              <a:t>AI Tool Explorer</a:t>
-            </a:r>
-            <a:endParaRPr sz="1300">
-              <a:solidFill>
-                <a:srgbClr val="0F0F0F"/>
-              </a:solidFill>
-              <a:latin typeface="Calibri"/>
-              <a:ea typeface="Calibri"/>
-              <a:cs typeface="Calibri"/>
-              <a:sym typeface="Calibri"/>
-            </a:endParaRPr>
-          </a:p>
-          <a:p>
-            <a:pPr marL="0" lvl="0" indent="0" algn="l" rtl="0">
-              <a:spcBef>
-                <a:spcPts val="0"/>
-              </a:spcBef>
-              <a:spcAft>
-                <a:spcPts val="0"/>
-              </a:spcAft>
-              <a:buNone/>
-            </a:pPr>
-            <a:r>
-              <a:rPr lang="en" sz="1300" u="sng">
-                <a:solidFill>
-                  <a:schemeClr val="hlink"/>
-                </a:solidFill>
-                <a:latin typeface="Calibri"/>
-                <a:ea typeface="Calibri"/>
-                <a:cs typeface="Calibri"/>
-                <a:sym typeface="Calibri"/>
-                <a:hlinkClick r:id="rId7"/>
-              </a:rPr>
-              <a:t>https://chat.openai.com/g/g-YFQNFNgSM-ai-tool-explorer</a:t>
-            </a:r>
-            <a:r>
-              <a:rPr lang="en" sz="1300">
-                <a:solidFill>
-                  <a:srgbClr val="0F0F0F"/>
-                </a:solidFill>
-                <a:latin typeface="Calibri"/>
-                <a:ea typeface="Calibri"/>
-                <a:cs typeface="Calibri"/>
-                <a:sym typeface="Calibri"/>
-              </a:rPr>
-              <a:t> </a:t>
-            </a:r>
-            <a:endParaRPr sz="1300">
-              <a:solidFill>
-                <a:srgbClr val="0F0F0F"/>
-              </a:solidFill>
-              <a:latin typeface="Calibri"/>
-              <a:ea typeface="Calibri"/>
-              <a:cs typeface="Calibri"/>
-              <a:sym typeface="Calibri"/>
-            </a:endParaRPr>
-          </a:p>
-          <a:p>
-            <a:pPr marL="0" lvl="0" indent="0" algn="l" rtl="0">
-              <a:spcBef>
-                <a:spcPts val="0"/>
-              </a:spcBef>
-              <a:spcAft>
-                <a:spcPts val="0"/>
-              </a:spcAft>
-              <a:buNone/>
-            </a:pPr>
-            <a:r>
-              <a:rPr lang="en" sz="1300" u="sng">
-                <a:solidFill>
-                  <a:schemeClr val="hlink"/>
-                </a:solidFill>
-                <a:latin typeface="Calibri"/>
-                <a:ea typeface="Calibri"/>
-                <a:cs typeface="Calibri"/>
-                <a:sym typeface="Calibri"/>
-                <a:hlinkClick r:id="rId8"/>
+                <a:hlinkClick r:id="rId9"/>
               </a:rPr>
               <a:t>https://gptsdex.com</a:t>
             </a:r>
@@ -42897,7 +42798,7 @@
           <p:nvPr/>
         </p:nvPicPr>
         <p:blipFill>
-          <a:blip r:embed="rId9" cstate="email">
+          <a:blip r:embed="rId10" cstate="email">
             <a:alphaModFix/>
             <a:extLst>
               <a:ext uri="{28A0092B-C50C-407E-A947-70E740481C1C}">
@@ -42936,7 +42837,7 @@
           <p:nvPr/>
         </p:nvPicPr>
         <p:blipFill>
-          <a:blip r:embed="rId10" cstate="email">
+          <a:blip r:embed="rId11" cstate="email">
             <a:alphaModFix/>
             <a:extLst>
               <a:ext uri="{28A0092B-C50C-407E-A947-70E740481C1C}">
@@ -42950,7 +42851,7 @@
         </p:blipFill>
         <p:spPr>
           <a:xfrm>
-            <a:off x="585175" y="3164725"/>
+            <a:off x="585175" y="3204446"/>
             <a:ext cx="3445499" cy="1671000"/>
           </a:xfrm>
           <a:prstGeom prst="rect">
